--- a/Results_Presentation.pptx
+++ b/Results_Presentation.pptx
@@ -13,9 +13,14 @@
     <p:sldId id="261" r:id="rId7"/>
     <p:sldId id="262" r:id="rId8"/>
     <p:sldId id="263" r:id="rId9"/>
-    <p:sldId id="264" r:id="rId10"/>
-    <p:sldId id="265" r:id="rId11"/>
-    <p:sldId id="266" r:id="rId12"/>
+    <p:sldId id="266" r:id="rId10"/>
+    <p:sldId id="264" r:id="rId11"/>
+    <p:sldId id="265" r:id="rId12"/>
+    <p:sldId id="267" r:id="rId13"/>
+    <p:sldId id="268" r:id="rId14"/>
+    <p:sldId id="269" r:id="rId15"/>
+    <p:sldId id="270" r:id="rId16"/>
+    <p:sldId id="271" r:id="rId17"/>
   </p:sldIdLst>
   <p:sldSz cx="12192000" cy="6858000"/>
   <p:notesSz cx="6858000" cy="9144000"/>
@@ -114,6 +119,11 @@
       </a:defRPr>
     </a:lvl9pPr>
   </p:defaultTextStyle>
+  <p:extLst>
+    <p:ext uri="{EFAFB233-063F-42B5-8137-9DF3F51BA10A}">
+      <p15:sldGuideLst xmlns:p15="http://schemas.microsoft.com/office/powerpoint/2012/main"/>
+    </p:ext>
+  </p:extLst>
 </p:presentation>
 </file>
 
@@ -266,7 +276,7 @@
           <a:p>
             <a:fld id="{2771BB51-21FF-49C0-8E42-BDE44188109C}" type="datetimeFigureOut">
               <a:rPr lang="en-IN" smtClean="0"/>
-              <a:t>10-10-2026</a:t>
+              <a:t>11-10-2026</a:t>
             </a:fld>
             <a:endParaRPr lang="en-IN"/>
           </a:p>
@@ -466,7 +476,7 @@
           <a:p>
             <a:fld id="{2771BB51-21FF-49C0-8E42-BDE44188109C}" type="datetimeFigureOut">
               <a:rPr lang="en-IN" smtClean="0"/>
-              <a:t>10-10-2026</a:t>
+              <a:t>11-10-2026</a:t>
             </a:fld>
             <a:endParaRPr lang="en-IN"/>
           </a:p>
@@ -676,7 +686,7 @@
           <a:p>
             <a:fld id="{2771BB51-21FF-49C0-8E42-BDE44188109C}" type="datetimeFigureOut">
               <a:rPr lang="en-IN" smtClean="0"/>
-              <a:t>10-10-2026</a:t>
+              <a:t>11-10-2026</a:t>
             </a:fld>
             <a:endParaRPr lang="en-IN"/>
           </a:p>
@@ -876,7 +886,7 @@
           <a:p>
             <a:fld id="{2771BB51-21FF-49C0-8E42-BDE44188109C}" type="datetimeFigureOut">
               <a:rPr lang="en-IN" smtClean="0"/>
-              <a:t>10-10-2026</a:t>
+              <a:t>11-10-2026</a:t>
             </a:fld>
             <a:endParaRPr lang="en-IN"/>
           </a:p>
@@ -1152,7 +1162,7 @@
           <a:p>
             <a:fld id="{2771BB51-21FF-49C0-8E42-BDE44188109C}" type="datetimeFigureOut">
               <a:rPr lang="en-IN" smtClean="0"/>
-              <a:t>10-10-2026</a:t>
+              <a:t>11-10-2026</a:t>
             </a:fld>
             <a:endParaRPr lang="en-IN"/>
           </a:p>
@@ -1420,7 +1430,7 @@
           <a:p>
             <a:fld id="{2771BB51-21FF-49C0-8E42-BDE44188109C}" type="datetimeFigureOut">
               <a:rPr lang="en-IN" smtClean="0"/>
-              <a:t>10-10-2026</a:t>
+              <a:t>11-10-2026</a:t>
             </a:fld>
             <a:endParaRPr lang="en-IN"/>
           </a:p>
@@ -1835,7 +1845,7 @@
           <a:p>
             <a:fld id="{2771BB51-21FF-49C0-8E42-BDE44188109C}" type="datetimeFigureOut">
               <a:rPr lang="en-IN" smtClean="0"/>
-              <a:t>10-10-2026</a:t>
+              <a:t>11-10-2026</a:t>
             </a:fld>
             <a:endParaRPr lang="en-IN"/>
           </a:p>
@@ -1977,7 +1987,7 @@
           <a:p>
             <a:fld id="{2771BB51-21FF-49C0-8E42-BDE44188109C}" type="datetimeFigureOut">
               <a:rPr lang="en-IN" smtClean="0"/>
-              <a:t>10-10-2026</a:t>
+              <a:t>11-10-2026</a:t>
             </a:fld>
             <a:endParaRPr lang="en-IN"/>
           </a:p>
@@ -2090,7 +2100,7 @@
           <a:p>
             <a:fld id="{2771BB51-21FF-49C0-8E42-BDE44188109C}" type="datetimeFigureOut">
               <a:rPr lang="en-IN" smtClean="0"/>
-              <a:t>10-10-2026</a:t>
+              <a:t>11-10-2026</a:t>
             </a:fld>
             <a:endParaRPr lang="en-IN"/>
           </a:p>
@@ -2403,7 +2413,7 @@
           <a:p>
             <a:fld id="{2771BB51-21FF-49C0-8E42-BDE44188109C}" type="datetimeFigureOut">
               <a:rPr lang="en-IN" smtClean="0"/>
-              <a:t>10-10-2026</a:t>
+              <a:t>11-10-2026</a:t>
             </a:fld>
             <a:endParaRPr lang="en-IN"/>
           </a:p>
@@ -2692,7 +2702,7 @@
           <a:p>
             <a:fld id="{2771BB51-21FF-49C0-8E42-BDE44188109C}" type="datetimeFigureOut">
               <a:rPr lang="en-IN" smtClean="0"/>
-              <a:t>10-10-2026</a:t>
+              <a:t>11-10-2026</a:t>
             </a:fld>
             <a:endParaRPr lang="en-IN"/>
           </a:p>
@@ -2935,7 +2945,7 @@
           <a:p>
             <a:fld id="{2771BB51-21FF-49C0-8E42-BDE44188109C}" type="datetimeFigureOut">
               <a:rPr lang="en-IN" smtClean="0"/>
-              <a:t>10-10-2026</a:t>
+              <a:t>11-10-2026</a:t>
             </a:fld>
             <a:endParaRPr lang="en-IN"/>
           </a:p>
@@ -3423,6 +3433,266 @@
         <p:cNvPr id="1" name="">
           <a:extLst>
             <a:ext uri="{FF2B5EF4-FFF2-40B4-BE49-F238E27FC236}">
+              <a16:creationId xmlns:a16="http://schemas.microsoft.com/office/drawing/2014/main" id="{A9F98FB9-1567-1698-A4A4-609651791B8A}"/>
+            </a:ext>
+          </a:extLst>
+        </p:cNvPr>
+        <p:cNvGrpSpPr/>
+        <p:nvPr/>
+      </p:nvGrpSpPr>
+      <p:grpSpPr>
+        <a:xfrm>
+          <a:off x="0" y="0"/>
+          <a:ext cx="0" cy="0"/>
+          <a:chOff x="0" y="0"/>
+          <a:chExt cx="0" cy="0"/>
+        </a:xfrm>
+      </p:grpSpPr>
+      <p:sp>
+        <p:nvSpPr>
+          <p:cNvPr id="2" name="Title 1">
+            <a:extLst>
+              <a:ext uri="{FF2B5EF4-FFF2-40B4-BE49-F238E27FC236}">
+                <a16:creationId xmlns:a16="http://schemas.microsoft.com/office/drawing/2014/main" id="{6C7F720D-D504-542D-7C85-568D45EBDC81}"/>
+              </a:ext>
+            </a:extLst>
+          </p:cNvPr>
+          <p:cNvSpPr>
+            <a:spLocks noGrp="1"/>
+          </p:cNvSpPr>
+          <p:nvPr>
+            <p:ph type="title"/>
+          </p:nvPr>
+        </p:nvSpPr>
+        <p:spPr/>
+        <p:txBody>
+          <a:bodyPr/>
+          <a:lstStyle/>
+          <a:p>
+            <a:r>
+              <a:rPr lang="en-US" dirty="0"/>
+              <a:t>Hybrid QML- 3 class classification – Basic entangler 8 qubits, 2 rep</a:t>
+            </a:r>
+            <a:endParaRPr lang="en-IN" dirty="0"/>
+          </a:p>
+        </p:txBody>
+      </p:sp>
+      <p:sp>
+        <p:nvSpPr>
+          <p:cNvPr id="7" name="TextBox 6">
+            <a:extLst>
+              <a:ext uri="{FF2B5EF4-FFF2-40B4-BE49-F238E27FC236}">
+                <a16:creationId xmlns:a16="http://schemas.microsoft.com/office/drawing/2014/main" id="{848DE4A4-F699-F5A3-7FA2-4FFFDCDE3BD2}"/>
+              </a:ext>
+            </a:extLst>
+          </p:cNvPr>
+          <p:cNvSpPr txBox="1"/>
+          <p:nvPr/>
+        </p:nvSpPr>
+        <p:spPr>
+          <a:xfrm>
+            <a:off x="7661186" y="2189953"/>
+            <a:ext cx="2775833" cy="923330"/>
+          </a:xfrm>
+          <a:prstGeom prst="rect">
+            <a:avLst/>
+          </a:prstGeom>
+          <a:noFill/>
+        </p:spPr>
+        <p:txBody>
+          <a:bodyPr wrap="square" rtlCol="0">
+            <a:spAutoFit/>
+          </a:bodyPr>
+          <a:lstStyle/>
+          <a:p>
+            <a:r>
+              <a:rPr lang="en-IN" dirty="0"/>
+              <a:t>Best epoch: 19 </a:t>
+            </a:r>
+          </a:p>
+          <a:p>
+            <a:r>
+              <a:rPr lang="en-IN" dirty="0"/>
+              <a:t>Train </a:t>
+            </a:r>
+            <a:r>
+              <a:rPr lang="en-IN" dirty="0" err="1"/>
+              <a:t>acc</a:t>
+            </a:r>
+            <a:r>
+              <a:rPr lang="en-IN" dirty="0"/>
+              <a:t>: 0.8020 </a:t>
+            </a:r>
+          </a:p>
+          <a:p>
+            <a:r>
+              <a:rPr lang="en-IN" dirty="0"/>
+              <a:t>Val </a:t>
+            </a:r>
+            <a:r>
+              <a:rPr lang="en-IN" dirty="0" err="1"/>
+              <a:t>acc</a:t>
+            </a:r>
+            <a:r>
+              <a:rPr lang="en-IN" dirty="0"/>
+              <a:t>: 0.7855</a:t>
+            </a:r>
+          </a:p>
+        </p:txBody>
+      </p:sp>
+      <p:sp>
+        <p:nvSpPr>
+          <p:cNvPr id="10" name="TextBox 9">
+            <a:extLst>
+              <a:ext uri="{FF2B5EF4-FFF2-40B4-BE49-F238E27FC236}">
+                <a16:creationId xmlns:a16="http://schemas.microsoft.com/office/drawing/2014/main" id="{E7DD2D62-45BA-8BF6-5719-F86D382CC4E2}"/>
+              </a:ext>
+            </a:extLst>
+          </p:cNvPr>
+          <p:cNvSpPr txBox="1"/>
+          <p:nvPr/>
+        </p:nvSpPr>
+        <p:spPr>
+          <a:xfrm>
+            <a:off x="838200" y="3752091"/>
+            <a:ext cx="3303917" cy="375053"/>
+          </a:xfrm>
+          <a:prstGeom prst="rect">
+            <a:avLst/>
+          </a:prstGeom>
+          <a:noFill/>
+        </p:spPr>
+        <p:txBody>
+          <a:bodyPr wrap="square" rtlCol="0">
+            <a:spAutoFit/>
+          </a:bodyPr>
+          <a:lstStyle/>
+          <a:p>
+            <a:r>
+              <a:rPr lang="en-US" dirty="0"/>
+              <a:t>Test set results</a:t>
+            </a:r>
+            <a:endParaRPr lang="en-IN" dirty="0"/>
+          </a:p>
+        </p:txBody>
+      </p:sp>
+      <p:sp>
+        <p:nvSpPr>
+          <p:cNvPr id="11" name="TextBox 10">
+            <a:extLst>
+              <a:ext uri="{FF2B5EF4-FFF2-40B4-BE49-F238E27FC236}">
+                <a16:creationId xmlns:a16="http://schemas.microsoft.com/office/drawing/2014/main" id="{6D9C562A-1E31-7F87-1833-23DD509C3A48}"/>
+              </a:ext>
+            </a:extLst>
+          </p:cNvPr>
+          <p:cNvSpPr txBox="1"/>
+          <p:nvPr/>
+        </p:nvSpPr>
+        <p:spPr>
+          <a:xfrm>
+            <a:off x="7661186" y="4573483"/>
+            <a:ext cx="2191110" cy="646331"/>
+          </a:xfrm>
+          <a:prstGeom prst="rect">
+            <a:avLst/>
+          </a:prstGeom>
+          <a:noFill/>
+        </p:spPr>
+        <p:txBody>
+          <a:bodyPr wrap="square" rtlCol="0">
+            <a:spAutoFit/>
+          </a:bodyPr>
+          <a:lstStyle/>
+          <a:p>
+            <a:r>
+              <a:rPr lang="en-US" dirty="0"/>
+              <a:t>Test samples: 387 Test accuracy: 0.7390 </a:t>
+            </a:r>
+            <a:endParaRPr lang="en-IN" dirty="0"/>
+          </a:p>
+        </p:txBody>
+      </p:sp>
+      <p:pic>
+        <p:nvPicPr>
+          <p:cNvPr id="5" name="Picture 4">
+            <a:extLst>
+              <a:ext uri="{FF2B5EF4-FFF2-40B4-BE49-F238E27FC236}">
+                <a16:creationId xmlns:a16="http://schemas.microsoft.com/office/drawing/2014/main" id="{435DA6D1-0AE5-0886-329D-8CBC36210157}"/>
+              </a:ext>
+            </a:extLst>
+          </p:cNvPr>
+          <p:cNvPicPr>
+            <a:picLocks noChangeAspect="1"/>
+          </p:cNvPicPr>
+          <p:nvPr/>
+        </p:nvPicPr>
+        <p:blipFill>
+          <a:blip r:embed="rId2"/>
+          <a:stretch>
+            <a:fillRect/>
+          </a:stretch>
+        </p:blipFill>
+        <p:spPr>
+          <a:xfrm>
+            <a:off x="968526" y="1610640"/>
+            <a:ext cx="6562334" cy="2141451"/>
+          </a:xfrm>
+          <a:prstGeom prst="rect">
+            <a:avLst/>
+          </a:prstGeom>
+        </p:spPr>
+      </p:pic>
+      <p:pic>
+        <p:nvPicPr>
+          <p:cNvPr id="9" name="Picture 8">
+            <a:extLst>
+              <a:ext uri="{FF2B5EF4-FFF2-40B4-BE49-F238E27FC236}">
+                <a16:creationId xmlns:a16="http://schemas.microsoft.com/office/drawing/2014/main" id="{35081ED4-8658-6858-3C99-485C04713369}"/>
+              </a:ext>
+            </a:extLst>
+          </p:cNvPr>
+          <p:cNvPicPr>
+            <a:picLocks noChangeAspect="1"/>
+          </p:cNvPicPr>
+          <p:nvPr/>
+        </p:nvPicPr>
+        <p:blipFill>
+          <a:blip r:embed="rId3"/>
+          <a:stretch>
+            <a:fillRect/>
+          </a:stretch>
+        </p:blipFill>
+        <p:spPr>
+          <a:xfrm>
+            <a:off x="990484" y="4127144"/>
+            <a:ext cx="6670702" cy="2608866"/>
+          </a:xfrm>
+          <a:prstGeom prst="rect">
+            <a:avLst/>
+          </a:prstGeom>
+        </p:spPr>
+      </p:pic>
+    </p:spTree>
+    <p:extLst>
+      <p:ext uri="{BB962C8B-B14F-4D97-AF65-F5344CB8AC3E}">
+        <p14:creationId xmlns:p14="http://schemas.microsoft.com/office/powerpoint/2010/main" val="1661897433"/>
+      </p:ext>
+    </p:extLst>
+  </p:cSld>
+  <p:clrMapOvr>
+    <a:masterClrMapping/>
+  </p:clrMapOvr>
+</p:sld>
+</file>
+
+<file path=ppt/slides/slide11.xml><?xml version="1.0" encoding="utf-8"?>
+<p:sld xmlns:a="http://schemas.openxmlformats.org/drawingml/2006/main" xmlns:r="http://schemas.openxmlformats.org/officeDocument/2006/relationships" xmlns:p="http://schemas.openxmlformats.org/presentationml/2006/main">
+  <p:cSld>
+    <p:spTree>
+      <p:nvGrpSpPr>
+        <p:cNvPr id="1" name="">
+          <a:extLst>
+            <a:ext uri="{FF2B5EF4-FFF2-40B4-BE49-F238E27FC236}">
               <a16:creationId xmlns:a16="http://schemas.microsoft.com/office/drawing/2014/main" id="{D6C22500-4DA6-42BB-BDDB-EBA94FF59CC9}"/>
             </a:ext>
           </a:extLst>
@@ -3675,7 +3945,527 @@
 </p:sld>
 </file>
 
-<file path=ppt/slides/slide11.xml><?xml version="1.0" encoding="utf-8"?>
+<file path=ppt/slides/slide12.xml><?xml version="1.0" encoding="utf-8"?>
+<p:sld xmlns:a="http://schemas.openxmlformats.org/drawingml/2006/main" xmlns:r="http://schemas.openxmlformats.org/officeDocument/2006/relationships" xmlns:p="http://schemas.openxmlformats.org/presentationml/2006/main">
+  <p:cSld>
+    <p:spTree>
+      <p:nvGrpSpPr>
+        <p:cNvPr id="1" name="">
+          <a:extLst>
+            <a:ext uri="{FF2B5EF4-FFF2-40B4-BE49-F238E27FC236}">
+              <a16:creationId xmlns:a16="http://schemas.microsoft.com/office/drawing/2014/main" id="{A4D0291C-3C23-0216-35A3-0FA4175451DA}"/>
+            </a:ext>
+          </a:extLst>
+        </p:cNvPr>
+        <p:cNvGrpSpPr/>
+        <p:nvPr/>
+      </p:nvGrpSpPr>
+      <p:grpSpPr>
+        <a:xfrm>
+          <a:off x="0" y="0"/>
+          <a:ext cx="0" cy="0"/>
+          <a:chOff x="0" y="0"/>
+          <a:chExt cx="0" cy="0"/>
+        </a:xfrm>
+      </p:grpSpPr>
+      <p:sp>
+        <p:nvSpPr>
+          <p:cNvPr id="2" name="Title 1">
+            <a:extLst>
+              <a:ext uri="{FF2B5EF4-FFF2-40B4-BE49-F238E27FC236}">
+                <a16:creationId xmlns:a16="http://schemas.microsoft.com/office/drawing/2014/main" id="{463E7538-A1A2-851E-2A17-FE216BD7B25B}"/>
+              </a:ext>
+            </a:extLst>
+          </p:cNvPr>
+          <p:cNvSpPr>
+            <a:spLocks noGrp="1"/>
+          </p:cNvSpPr>
+          <p:nvPr>
+            <p:ph type="title"/>
+          </p:nvPr>
+        </p:nvSpPr>
+        <p:spPr/>
+        <p:txBody>
+          <a:bodyPr/>
+          <a:lstStyle/>
+          <a:p>
+            <a:r>
+              <a:rPr lang="en-US" dirty="0"/>
+              <a:t>Hybrid QML- 3 class classification – Basic entangler 16 qubits, 1 rep</a:t>
+            </a:r>
+            <a:endParaRPr lang="en-IN" dirty="0"/>
+          </a:p>
+        </p:txBody>
+      </p:sp>
+      <p:sp>
+        <p:nvSpPr>
+          <p:cNvPr id="7" name="TextBox 6">
+            <a:extLst>
+              <a:ext uri="{FF2B5EF4-FFF2-40B4-BE49-F238E27FC236}">
+                <a16:creationId xmlns:a16="http://schemas.microsoft.com/office/drawing/2014/main" id="{0024F242-A09C-A861-C03E-43C6F1715AB6}"/>
+              </a:ext>
+            </a:extLst>
+          </p:cNvPr>
+          <p:cNvSpPr txBox="1"/>
+          <p:nvPr/>
+        </p:nvSpPr>
+        <p:spPr>
+          <a:xfrm>
+            <a:off x="7773188" y="2189953"/>
+            <a:ext cx="2775833" cy="923330"/>
+          </a:xfrm>
+          <a:prstGeom prst="rect">
+            <a:avLst/>
+          </a:prstGeom>
+          <a:noFill/>
+        </p:spPr>
+        <p:txBody>
+          <a:bodyPr wrap="square" rtlCol="0">
+            <a:spAutoFit/>
+          </a:bodyPr>
+          <a:lstStyle/>
+          <a:p>
+            <a:r>
+              <a:rPr lang="en-IN" dirty="0"/>
+              <a:t>Best epoch: 25 </a:t>
+            </a:r>
+          </a:p>
+          <a:p>
+            <a:r>
+              <a:rPr lang="en-IN" dirty="0"/>
+              <a:t>Train </a:t>
+            </a:r>
+            <a:r>
+              <a:rPr lang="en-IN" dirty="0" err="1"/>
+              <a:t>acc</a:t>
+            </a:r>
+            <a:r>
+              <a:rPr lang="en-IN" dirty="0"/>
+              <a:t>: 0.8486 </a:t>
+            </a:r>
+          </a:p>
+          <a:p>
+            <a:r>
+              <a:rPr lang="en-IN" dirty="0"/>
+              <a:t>Val </a:t>
+            </a:r>
+            <a:r>
+              <a:rPr lang="en-IN" dirty="0" err="1"/>
+              <a:t>acc</a:t>
+            </a:r>
+            <a:r>
+              <a:rPr lang="en-IN" dirty="0"/>
+              <a:t>: 0.7726</a:t>
+            </a:r>
+          </a:p>
+        </p:txBody>
+      </p:sp>
+      <p:sp>
+        <p:nvSpPr>
+          <p:cNvPr id="10" name="TextBox 9">
+            <a:extLst>
+              <a:ext uri="{FF2B5EF4-FFF2-40B4-BE49-F238E27FC236}">
+                <a16:creationId xmlns:a16="http://schemas.microsoft.com/office/drawing/2014/main" id="{27DAEBAD-C765-90B2-8101-C5D12D965F59}"/>
+              </a:ext>
+            </a:extLst>
+          </p:cNvPr>
+          <p:cNvSpPr txBox="1"/>
+          <p:nvPr/>
+        </p:nvSpPr>
+        <p:spPr>
+          <a:xfrm>
+            <a:off x="838200" y="3752091"/>
+            <a:ext cx="3303917" cy="375053"/>
+          </a:xfrm>
+          <a:prstGeom prst="rect">
+            <a:avLst/>
+          </a:prstGeom>
+          <a:noFill/>
+        </p:spPr>
+        <p:txBody>
+          <a:bodyPr wrap="square" rtlCol="0">
+            <a:spAutoFit/>
+          </a:bodyPr>
+          <a:lstStyle/>
+          <a:p>
+            <a:r>
+              <a:rPr lang="en-US" dirty="0"/>
+              <a:t>Test set results</a:t>
+            </a:r>
+            <a:endParaRPr lang="en-IN" dirty="0"/>
+          </a:p>
+        </p:txBody>
+      </p:sp>
+      <p:sp>
+        <p:nvSpPr>
+          <p:cNvPr id="11" name="TextBox 10">
+            <a:extLst>
+              <a:ext uri="{FF2B5EF4-FFF2-40B4-BE49-F238E27FC236}">
+                <a16:creationId xmlns:a16="http://schemas.microsoft.com/office/drawing/2014/main" id="{1AB6216A-9535-DDA0-F2F9-7B224212A0B4}"/>
+              </a:ext>
+            </a:extLst>
+          </p:cNvPr>
+          <p:cNvSpPr txBox="1"/>
+          <p:nvPr/>
+        </p:nvSpPr>
+        <p:spPr>
+          <a:xfrm>
+            <a:off x="7661186" y="4573483"/>
+            <a:ext cx="2191110" cy="646331"/>
+          </a:xfrm>
+          <a:prstGeom prst="rect">
+            <a:avLst/>
+          </a:prstGeom>
+          <a:noFill/>
+        </p:spPr>
+        <p:txBody>
+          <a:bodyPr wrap="square" rtlCol="0">
+            <a:spAutoFit/>
+          </a:bodyPr>
+          <a:lstStyle/>
+          <a:p>
+            <a:r>
+              <a:rPr lang="en-US" dirty="0"/>
+              <a:t>Test samples: 387 Test accuracy: 0.7700</a:t>
+            </a:r>
+            <a:endParaRPr lang="en-IN" dirty="0"/>
+          </a:p>
+        </p:txBody>
+      </p:sp>
+      <p:pic>
+        <p:nvPicPr>
+          <p:cNvPr id="5" name="Picture 4">
+            <a:extLst>
+              <a:ext uri="{FF2B5EF4-FFF2-40B4-BE49-F238E27FC236}">
+                <a16:creationId xmlns:a16="http://schemas.microsoft.com/office/drawing/2014/main" id="{64ACE42B-F808-33EE-1532-CDF584C61EE6}"/>
+              </a:ext>
+            </a:extLst>
+          </p:cNvPr>
+          <p:cNvPicPr>
+            <a:picLocks noChangeAspect="1"/>
+          </p:cNvPicPr>
+          <p:nvPr/>
+        </p:nvPicPr>
+        <p:blipFill>
+          <a:blip r:embed="rId2"/>
+          <a:stretch>
+            <a:fillRect/>
+          </a:stretch>
+        </p:blipFill>
+        <p:spPr>
+          <a:xfrm>
+            <a:off x="838200" y="1535710"/>
+            <a:ext cx="6934988" cy="2231816"/>
+          </a:xfrm>
+          <a:prstGeom prst="rect">
+            <a:avLst/>
+          </a:prstGeom>
+        </p:spPr>
+      </p:pic>
+      <p:pic>
+        <p:nvPicPr>
+          <p:cNvPr id="9" name="Picture 8">
+            <a:extLst>
+              <a:ext uri="{FF2B5EF4-FFF2-40B4-BE49-F238E27FC236}">
+                <a16:creationId xmlns:a16="http://schemas.microsoft.com/office/drawing/2014/main" id="{E1AE4B65-5275-ACB1-B97F-A2DB71E2A678}"/>
+              </a:ext>
+            </a:extLst>
+          </p:cNvPr>
+          <p:cNvPicPr>
+            <a:picLocks noChangeAspect="1"/>
+          </p:cNvPicPr>
+          <p:nvPr/>
+        </p:nvPicPr>
+        <p:blipFill>
+          <a:blip r:embed="rId3"/>
+          <a:stretch>
+            <a:fillRect/>
+          </a:stretch>
+        </p:blipFill>
+        <p:spPr>
+          <a:xfrm>
+            <a:off x="838200" y="4261377"/>
+            <a:ext cx="5422929" cy="2121825"/>
+          </a:xfrm>
+          <a:prstGeom prst="rect">
+            <a:avLst/>
+          </a:prstGeom>
+        </p:spPr>
+      </p:pic>
+    </p:spTree>
+    <p:extLst>
+      <p:ext uri="{BB962C8B-B14F-4D97-AF65-F5344CB8AC3E}">
+        <p14:creationId xmlns:p14="http://schemas.microsoft.com/office/powerpoint/2010/main" val="1398610178"/>
+      </p:ext>
+    </p:extLst>
+  </p:cSld>
+  <p:clrMapOvr>
+    <a:masterClrMapping/>
+  </p:clrMapOvr>
+</p:sld>
+</file>
+
+<file path=ppt/slides/slide13.xml><?xml version="1.0" encoding="utf-8"?>
+<p:sld xmlns:a="http://schemas.openxmlformats.org/drawingml/2006/main" xmlns:r="http://schemas.openxmlformats.org/officeDocument/2006/relationships" xmlns:p="http://schemas.openxmlformats.org/presentationml/2006/main">
+  <p:cSld>
+    <p:spTree>
+      <p:nvGrpSpPr>
+        <p:cNvPr id="1" name="">
+          <a:extLst>
+            <a:ext uri="{FF2B5EF4-FFF2-40B4-BE49-F238E27FC236}">
+              <a16:creationId xmlns:a16="http://schemas.microsoft.com/office/drawing/2014/main" id="{948DDCFB-B20F-2DB6-C0DC-7CC5AA1F5EAF}"/>
+            </a:ext>
+          </a:extLst>
+        </p:cNvPr>
+        <p:cNvGrpSpPr/>
+        <p:nvPr/>
+      </p:nvGrpSpPr>
+      <p:grpSpPr>
+        <a:xfrm>
+          <a:off x="0" y="0"/>
+          <a:ext cx="0" cy="0"/>
+          <a:chOff x="0" y="0"/>
+          <a:chExt cx="0" cy="0"/>
+        </a:xfrm>
+      </p:grpSpPr>
+      <p:sp>
+        <p:nvSpPr>
+          <p:cNvPr id="2" name="Title 1">
+            <a:extLst>
+              <a:ext uri="{FF2B5EF4-FFF2-40B4-BE49-F238E27FC236}">
+                <a16:creationId xmlns:a16="http://schemas.microsoft.com/office/drawing/2014/main" id="{E8AD137C-BB5E-42E1-09B3-226DDDE1B557}"/>
+              </a:ext>
+            </a:extLst>
+          </p:cNvPr>
+          <p:cNvSpPr>
+            <a:spLocks noGrp="1"/>
+          </p:cNvSpPr>
+          <p:nvPr>
+            <p:ph type="title"/>
+          </p:nvPr>
+        </p:nvSpPr>
+        <p:spPr/>
+        <p:txBody>
+          <a:bodyPr/>
+          <a:lstStyle/>
+          <a:p>
+            <a:r>
+              <a:rPr lang="en-US" dirty="0"/>
+              <a:t>Hybrid QML- 3 class classification – Strong entangler 4 qubits, 2 rep</a:t>
+            </a:r>
+            <a:endParaRPr lang="en-IN" dirty="0"/>
+          </a:p>
+        </p:txBody>
+      </p:sp>
+      <p:sp>
+        <p:nvSpPr>
+          <p:cNvPr id="7" name="TextBox 6">
+            <a:extLst>
+              <a:ext uri="{FF2B5EF4-FFF2-40B4-BE49-F238E27FC236}">
+                <a16:creationId xmlns:a16="http://schemas.microsoft.com/office/drawing/2014/main" id="{A1820359-51FA-0855-8B19-9437A866E943}"/>
+              </a:ext>
+            </a:extLst>
+          </p:cNvPr>
+          <p:cNvSpPr txBox="1"/>
+          <p:nvPr/>
+        </p:nvSpPr>
+        <p:spPr>
+          <a:xfrm>
+            <a:off x="7980356" y="2060683"/>
+            <a:ext cx="2775833" cy="923330"/>
+          </a:xfrm>
+          <a:prstGeom prst="rect">
+            <a:avLst/>
+          </a:prstGeom>
+          <a:noFill/>
+        </p:spPr>
+        <p:txBody>
+          <a:bodyPr wrap="square" rtlCol="0">
+            <a:spAutoFit/>
+          </a:bodyPr>
+          <a:lstStyle/>
+          <a:p>
+            <a:r>
+              <a:rPr lang="en-IN" dirty="0"/>
+              <a:t>Best epoch: 28 </a:t>
+            </a:r>
+          </a:p>
+          <a:p>
+            <a:r>
+              <a:rPr lang="en-IN" dirty="0"/>
+              <a:t>Train </a:t>
+            </a:r>
+            <a:r>
+              <a:rPr lang="en-IN" dirty="0" err="1"/>
+              <a:t>acc</a:t>
+            </a:r>
+            <a:r>
+              <a:rPr lang="en-IN" dirty="0"/>
+              <a:t>: 0.8688 </a:t>
+            </a:r>
+          </a:p>
+          <a:p>
+            <a:r>
+              <a:rPr lang="en-IN" dirty="0"/>
+              <a:t>Val </a:t>
+            </a:r>
+            <a:r>
+              <a:rPr lang="en-IN" dirty="0" err="1"/>
+              <a:t>acc</a:t>
+            </a:r>
+            <a:r>
+              <a:rPr lang="en-IN" dirty="0"/>
+              <a:t>: 0.7726</a:t>
+            </a:r>
+          </a:p>
+        </p:txBody>
+      </p:sp>
+      <p:sp>
+        <p:nvSpPr>
+          <p:cNvPr id="10" name="TextBox 9">
+            <a:extLst>
+              <a:ext uri="{FF2B5EF4-FFF2-40B4-BE49-F238E27FC236}">
+                <a16:creationId xmlns:a16="http://schemas.microsoft.com/office/drawing/2014/main" id="{05D8520C-FDA2-E9FC-0E10-CB2F3CD6A35F}"/>
+              </a:ext>
+            </a:extLst>
+          </p:cNvPr>
+          <p:cNvSpPr txBox="1"/>
+          <p:nvPr/>
+        </p:nvSpPr>
+        <p:spPr>
+          <a:xfrm>
+            <a:off x="838200" y="3752091"/>
+            <a:ext cx="3303917" cy="375053"/>
+          </a:xfrm>
+          <a:prstGeom prst="rect">
+            <a:avLst/>
+          </a:prstGeom>
+          <a:noFill/>
+        </p:spPr>
+        <p:txBody>
+          <a:bodyPr wrap="square" rtlCol="0">
+            <a:spAutoFit/>
+          </a:bodyPr>
+          <a:lstStyle/>
+          <a:p>
+            <a:r>
+              <a:rPr lang="en-US" dirty="0"/>
+              <a:t>Test set results</a:t>
+            </a:r>
+            <a:endParaRPr lang="en-IN" dirty="0"/>
+          </a:p>
+        </p:txBody>
+      </p:sp>
+      <p:sp>
+        <p:nvSpPr>
+          <p:cNvPr id="11" name="TextBox 10">
+            <a:extLst>
+              <a:ext uri="{FF2B5EF4-FFF2-40B4-BE49-F238E27FC236}">
+                <a16:creationId xmlns:a16="http://schemas.microsoft.com/office/drawing/2014/main" id="{6587380A-FD9C-81CB-3FCE-2E43AFB10428}"/>
+              </a:ext>
+            </a:extLst>
+          </p:cNvPr>
+          <p:cNvSpPr txBox="1"/>
+          <p:nvPr/>
+        </p:nvSpPr>
+        <p:spPr>
+          <a:xfrm>
+            <a:off x="7661186" y="4573483"/>
+            <a:ext cx="2191110" cy="646331"/>
+          </a:xfrm>
+          <a:prstGeom prst="rect">
+            <a:avLst/>
+          </a:prstGeom>
+          <a:noFill/>
+        </p:spPr>
+        <p:txBody>
+          <a:bodyPr wrap="square" rtlCol="0">
+            <a:spAutoFit/>
+          </a:bodyPr>
+          <a:lstStyle/>
+          <a:p>
+            <a:r>
+              <a:rPr lang="en-US" dirty="0"/>
+              <a:t>Test samples: 387 Test accuracy: 0.7700</a:t>
+            </a:r>
+            <a:endParaRPr lang="en-IN" dirty="0"/>
+          </a:p>
+        </p:txBody>
+      </p:sp>
+      <p:pic>
+        <p:nvPicPr>
+          <p:cNvPr id="4" name="Picture 3">
+            <a:extLst>
+              <a:ext uri="{FF2B5EF4-FFF2-40B4-BE49-F238E27FC236}">
+                <a16:creationId xmlns:a16="http://schemas.microsoft.com/office/drawing/2014/main" id="{F94DF538-36A2-6AF9-BF95-57CC458D0552}"/>
+              </a:ext>
+            </a:extLst>
+          </p:cNvPr>
+          <p:cNvPicPr>
+            <a:picLocks noChangeAspect="1"/>
+          </p:cNvPicPr>
+          <p:nvPr/>
+        </p:nvPicPr>
+        <p:blipFill>
+          <a:blip r:embed="rId2"/>
+          <a:stretch>
+            <a:fillRect/>
+          </a:stretch>
+        </p:blipFill>
+        <p:spPr>
+          <a:xfrm>
+            <a:off x="985837" y="1569106"/>
+            <a:ext cx="6675349" cy="2172717"/>
+          </a:xfrm>
+          <a:prstGeom prst="rect">
+            <a:avLst/>
+          </a:prstGeom>
+        </p:spPr>
+      </p:pic>
+      <p:pic>
+        <p:nvPicPr>
+          <p:cNvPr id="8" name="Picture 7">
+            <a:extLst>
+              <a:ext uri="{FF2B5EF4-FFF2-40B4-BE49-F238E27FC236}">
+                <a16:creationId xmlns:a16="http://schemas.microsoft.com/office/drawing/2014/main" id="{0D118DFA-CD70-7BA4-92CB-4EB36FB0A967}"/>
+              </a:ext>
+            </a:extLst>
+          </p:cNvPr>
+          <p:cNvPicPr>
+            <a:picLocks noChangeAspect="1"/>
+          </p:cNvPicPr>
+          <p:nvPr/>
+        </p:nvPicPr>
+        <p:blipFill>
+          <a:blip r:embed="rId3"/>
+          <a:stretch>
+            <a:fillRect/>
+          </a:stretch>
+        </p:blipFill>
+        <p:spPr>
+          <a:xfrm>
+            <a:off x="895350" y="4239898"/>
+            <a:ext cx="5839640" cy="2252977"/>
+          </a:xfrm>
+          <a:prstGeom prst="rect">
+            <a:avLst/>
+          </a:prstGeom>
+        </p:spPr>
+      </p:pic>
+    </p:spTree>
+    <p:extLst>
+      <p:ext uri="{BB962C8B-B14F-4D97-AF65-F5344CB8AC3E}">
+        <p14:creationId xmlns:p14="http://schemas.microsoft.com/office/powerpoint/2010/main" val="4138906995"/>
+      </p:ext>
+    </p:extLst>
+  </p:cSld>
+  <p:clrMapOvr>
+    <a:masterClrMapping/>
+  </p:clrMapOvr>
+</p:sld>
+</file>
+
+<file path=ppt/slides/slide14.xml><?xml version="1.0" encoding="utf-8"?>
 <p:sld xmlns:a="http://schemas.openxmlformats.org/drawingml/2006/main" xmlns:r="http://schemas.openxmlformats.org/officeDocument/2006/relationships" xmlns:p="http://schemas.openxmlformats.org/presentationml/2006/main">
   <p:cSld>
     <p:spTree>
@@ -3697,7 +4487,7 @@
           <p:cNvPr id="2" name="Title 1">
             <a:extLst>
               <a:ext uri="{FF2B5EF4-FFF2-40B4-BE49-F238E27FC236}">
-                <a16:creationId xmlns:a16="http://schemas.microsoft.com/office/drawing/2014/main" id="{44F76F41-2AC2-92E4-3306-F7919242080B}"/>
+                <a16:creationId xmlns:a16="http://schemas.microsoft.com/office/drawing/2014/main" id="{3B3E3282-A289-5CC2-334A-5E91635C52E4}"/>
               </a:ext>
             </a:extLst>
           </p:cNvPr>
@@ -3715,7 +4505,7 @@
           <a:p>
             <a:r>
               <a:rPr lang="en-US" dirty="0"/>
-              <a:t>Hybrid QML- 3 class classification – Basic entangler 8 qubits, 1 rep</a:t>
+              <a:t>Benchmark – State vector simulator</a:t>
             </a:r>
             <a:endParaRPr lang="en-IN" dirty="0"/>
           </a:p>
@@ -3723,10 +4513,101 @@
       </p:sp>
       <p:pic>
         <p:nvPicPr>
-          <p:cNvPr id="6" name="Picture 5">
-            <a:extLst>
-              <a:ext uri="{FF2B5EF4-FFF2-40B4-BE49-F238E27FC236}">
-                <a16:creationId xmlns:a16="http://schemas.microsoft.com/office/drawing/2014/main" id="{4407D620-3DC7-D5FB-E867-8A32FD42E8E8}"/>
+          <p:cNvPr id="5" name="Content Placeholder 4">
+            <a:extLst>
+              <a:ext uri="{FF2B5EF4-FFF2-40B4-BE49-F238E27FC236}">
+                <a16:creationId xmlns:a16="http://schemas.microsoft.com/office/drawing/2014/main" id="{83DCC424-1139-9FDA-4FB3-0D3363D47CEC}"/>
+              </a:ext>
+            </a:extLst>
+          </p:cNvPr>
+          <p:cNvPicPr>
+            <a:picLocks noGrp="1" noChangeAspect="1"/>
+          </p:cNvPicPr>
+          <p:nvPr>
+            <p:ph idx="1"/>
+          </p:nvPr>
+        </p:nvPicPr>
+        <p:blipFill>
+          <a:blip r:embed="rId2"/>
+          <a:stretch>
+            <a:fillRect/>
+          </a:stretch>
+        </p:blipFill>
+        <p:spPr>
+          <a:xfrm>
+            <a:off x="1135904" y="1847056"/>
+            <a:ext cx="8791479" cy="4351338"/>
+          </a:xfrm>
+          <a:prstGeom prst="rect">
+            <a:avLst/>
+          </a:prstGeom>
+        </p:spPr>
+      </p:pic>
+    </p:spTree>
+    <p:extLst>
+      <p:ext uri="{BB962C8B-B14F-4D97-AF65-F5344CB8AC3E}">
+        <p14:creationId xmlns:p14="http://schemas.microsoft.com/office/powerpoint/2010/main" val="2503977742"/>
+      </p:ext>
+    </p:extLst>
+  </p:cSld>
+  <p:clrMapOvr>
+    <a:masterClrMapping/>
+  </p:clrMapOvr>
+</p:sld>
+</file>
+
+<file path=ppt/slides/slide15.xml><?xml version="1.0" encoding="utf-8"?>
+<p:sld xmlns:a="http://schemas.openxmlformats.org/drawingml/2006/main" xmlns:r="http://schemas.openxmlformats.org/officeDocument/2006/relationships" xmlns:p="http://schemas.openxmlformats.org/presentationml/2006/main">
+  <p:cSld>
+    <p:spTree>
+      <p:nvGrpSpPr>
+        <p:cNvPr id="1" name=""/>
+        <p:cNvGrpSpPr/>
+        <p:nvPr/>
+      </p:nvGrpSpPr>
+      <p:grpSpPr>
+        <a:xfrm>
+          <a:off x="0" y="0"/>
+          <a:ext cx="0" cy="0"/>
+          <a:chOff x="0" y="0"/>
+          <a:chExt cx="0" cy="0"/>
+        </a:xfrm>
+      </p:grpSpPr>
+      <p:sp>
+        <p:nvSpPr>
+          <p:cNvPr id="2" name="Title 1">
+            <a:extLst>
+              <a:ext uri="{FF2B5EF4-FFF2-40B4-BE49-F238E27FC236}">
+                <a16:creationId xmlns:a16="http://schemas.microsoft.com/office/drawing/2014/main" id="{2F6ED2F8-19F1-50F5-B2C8-90154A4B2396}"/>
+              </a:ext>
+            </a:extLst>
+          </p:cNvPr>
+          <p:cNvSpPr>
+            <a:spLocks noGrp="1"/>
+          </p:cNvSpPr>
+          <p:nvPr>
+            <p:ph type="title"/>
+          </p:nvPr>
+        </p:nvSpPr>
+        <p:spPr/>
+        <p:txBody>
+          <a:bodyPr/>
+          <a:lstStyle/>
+          <a:p>
+            <a:r>
+              <a:rPr lang="en-US" dirty="0"/>
+              <a:t>Benchmark – Sampling based simulator</a:t>
+            </a:r>
+            <a:endParaRPr lang="en-IN" dirty="0"/>
+          </a:p>
+        </p:txBody>
+      </p:sp>
+      <p:pic>
+        <p:nvPicPr>
+          <p:cNvPr id="5" name="Picture 4">
+            <a:extLst>
+              <a:ext uri="{FF2B5EF4-FFF2-40B4-BE49-F238E27FC236}">
+                <a16:creationId xmlns:a16="http://schemas.microsoft.com/office/drawing/2014/main" id="{A30FEE24-7E85-72A4-3E15-4B908D37859A}"/>
               </a:ext>
             </a:extLst>
           </p:cNvPr>
@@ -3743,108 +4624,68 @@
         </p:blipFill>
         <p:spPr>
           <a:xfrm>
-            <a:off x="838200" y="1509837"/>
-            <a:ext cx="8256578" cy="2684612"/>
+            <a:off x="838200" y="1818481"/>
+            <a:ext cx="9421540" cy="4582164"/>
           </a:xfrm>
           <a:prstGeom prst="rect">
             <a:avLst/>
           </a:prstGeom>
         </p:spPr>
       </p:pic>
-      <p:sp>
-        <p:nvSpPr>
-          <p:cNvPr id="7" name="TextBox 6">
-            <a:extLst>
-              <a:ext uri="{FF2B5EF4-FFF2-40B4-BE49-F238E27FC236}">
-                <a16:creationId xmlns:a16="http://schemas.microsoft.com/office/drawing/2014/main" id="{52F1D253-159B-9E8F-E86B-5F1D741A2287}"/>
-              </a:ext>
-            </a:extLst>
-          </p:cNvPr>
-          <p:cNvSpPr txBox="1"/>
-          <p:nvPr/>
-        </p:nvSpPr>
-        <p:spPr>
-          <a:xfrm>
-            <a:off x="9279731" y="1928813"/>
-            <a:ext cx="2586038" cy="923330"/>
-          </a:xfrm>
-          <a:prstGeom prst="rect">
-            <a:avLst/>
-          </a:prstGeom>
-          <a:noFill/>
-        </p:spPr>
-        <p:txBody>
-          <a:bodyPr wrap="square" rtlCol="0">
-            <a:spAutoFit/>
-          </a:bodyPr>
-          <a:lstStyle/>
-          <a:p>
-            <a:r>
-              <a:rPr lang="en-IN" dirty="0"/>
-              <a:t>Best epoch: 20 </a:t>
-            </a:r>
-          </a:p>
-          <a:p>
-            <a:r>
-              <a:rPr lang="en-IN" dirty="0"/>
-              <a:t>Train </a:t>
-            </a:r>
-            <a:r>
-              <a:rPr lang="en-IN" dirty="0" err="1"/>
-              <a:t>acc</a:t>
-            </a:r>
-            <a:r>
-              <a:rPr lang="en-IN" dirty="0"/>
-              <a:t>: 0.8403  </a:t>
-            </a:r>
-          </a:p>
-          <a:p>
-            <a:r>
-              <a:rPr lang="en-IN" dirty="0"/>
-              <a:t>Val </a:t>
-            </a:r>
-            <a:r>
-              <a:rPr lang="en-IN" dirty="0" err="1"/>
-              <a:t>acc</a:t>
-            </a:r>
-            <a:r>
-              <a:rPr lang="en-IN" dirty="0"/>
-              <a:t>: 0.8036</a:t>
-            </a:r>
-          </a:p>
-        </p:txBody>
-      </p:sp>
-      <p:sp>
-        <p:nvSpPr>
-          <p:cNvPr id="8" name="TextBox 7">
-            <a:extLst>
-              <a:ext uri="{FF2B5EF4-FFF2-40B4-BE49-F238E27FC236}">
-                <a16:creationId xmlns:a16="http://schemas.microsoft.com/office/drawing/2014/main" id="{4C3D9C4B-1A4D-78CF-3D20-19D506297CD6}"/>
-              </a:ext>
-            </a:extLst>
-          </p:cNvPr>
-          <p:cNvSpPr txBox="1"/>
-          <p:nvPr/>
-        </p:nvSpPr>
-        <p:spPr>
-          <a:xfrm>
-            <a:off x="1052513" y="4080704"/>
-            <a:ext cx="3303917" cy="375053"/>
-          </a:xfrm>
-          <a:prstGeom prst="rect">
-            <a:avLst/>
-          </a:prstGeom>
-          <a:noFill/>
-        </p:spPr>
-        <p:txBody>
-          <a:bodyPr wrap="square" rtlCol="0">
-            <a:spAutoFit/>
-          </a:bodyPr>
+    </p:spTree>
+    <p:extLst>
+      <p:ext uri="{BB962C8B-B14F-4D97-AF65-F5344CB8AC3E}">
+        <p14:creationId xmlns:p14="http://schemas.microsoft.com/office/powerpoint/2010/main" val="3712610399"/>
+      </p:ext>
+    </p:extLst>
+  </p:cSld>
+  <p:clrMapOvr>
+    <a:masterClrMapping/>
+  </p:clrMapOvr>
+</p:sld>
+</file>
+
+<file path=ppt/slides/slide16.xml><?xml version="1.0" encoding="utf-8"?>
+<p:sld xmlns:a="http://schemas.openxmlformats.org/drawingml/2006/main" xmlns:r="http://schemas.openxmlformats.org/officeDocument/2006/relationships" xmlns:p="http://schemas.openxmlformats.org/presentationml/2006/main">
+  <p:cSld>
+    <p:spTree>
+      <p:nvGrpSpPr>
+        <p:cNvPr id="1" name=""/>
+        <p:cNvGrpSpPr/>
+        <p:nvPr/>
+      </p:nvGrpSpPr>
+      <p:grpSpPr>
+        <a:xfrm>
+          <a:off x="0" y="0"/>
+          <a:ext cx="0" cy="0"/>
+          <a:chOff x="0" y="0"/>
+          <a:chExt cx="0" cy="0"/>
+        </a:xfrm>
+      </p:grpSpPr>
+      <p:sp>
+        <p:nvSpPr>
+          <p:cNvPr id="2" name="Title 1">
+            <a:extLst>
+              <a:ext uri="{FF2B5EF4-FFF2-40B4-BE49-F238E27FC236}">
+                <a16:creationId xmlns:a16="http://schemas.microsoft.com/office/drawing/2014/main" id="{0F6E60A4-7012-5F59-FE10-902DA745721D}"/>
+              </a:ext>
+            </a:extLst>
+          </p:cNvPr>
+          <p:cNvSpPr>
+            <a:spLocks noGrp="1"/>
+          </p:cNvSpPr>
+          <p:nvPr>
+            <p:ph type="title"/>
+          </p:nvPr>
+        </p:nvSpPr>
+        <p:spPr/>
+        <p:txBody>
+          <a:bodyPr/>
           <a:lstStyle/>
           <a:p>
             <a:r>
               <a:rPr lang="en-US" dirty="0"/>
-              <a:t>Test set results</a:t>
+              <a:t>Recall scores</a:t>
             </a:r>
             <a:endParaRPr lang="en-IN" dirty="0"/>
           </a:p>
@@ -3852,80 +4693,40 @@
       </p:sp>
       <p:pic>
         <p:nvPicPr>
-          <p:cNvPr id="10" name="Picture 9">
-            <a:extLst>
-              <a:ext uri="{FF2B5EF4-FFF2-40B4-BE49-F238E27FC236}">
-                <a16:creationId xmlns:a16="http://schemas.microsoft.com/office/drawing/2014/main" id="{86FA8033-4EAA-15FE-9BC3-3DBBB2B44CE2}"/>
+          <p:cNvPr id="5" name="Content Placeholder 4">
+            <a:extLst>
+              <a:ext uri="{FF2B5EF4-FFF2-40B4-BE49-F238E27FC236}">
+                <a16:creationId xmlns:a16="http://schemas.microsoft.com/office/drawing/2014/main" id="{49991E52-A204-23F9-4ADD-1CE68F69921A}"/>
               </a:ext>
             </a:extLst>
           </p:cNvPr>
           <p:cNvPicPr>
-            <a:picLocks noChangeAspect="1"/>
+            <a:picLocks noGrp="1" noChangeAspect="1"/>
           </p:cNvPicPr>
-          <p:nvPr/>
+          <p:nvPr>
+            <p:ph idx="1"/>
+          </p:nvPr>
         </p:nvPicPr>
         <p:blipFill>
-          <a:blip r:embed="rId3"/>
+          <a:blip r:embed="rId2"/>
           <a:stretch>
             <a:fillRect/>
           </a:stretch>
         </p:blipFill>
         <p:spPr>
           <a:xfrm>
-            <a:off x="909637" y="4455757"/>
-            <a:ext cx="5863456" cy="2300609"/>
+            <a:off x="1303260" y="1589882"/>
+            <a:ext cx="8885391" cy="4351338"/>
           </a:xfrm>
           <a:prstGeom prst="rect">
             <a:avLst/>
           </a:prstGeom>
         </p:spPr>
       </p:pic>
-      <p:sp>
-        <p:nvSpPr>
-          <p:cNvPr id="11" name="TextBox 10">
-            <a:extLst>
-              <a:ext uri="{FF2B5EF4-FFF2-40B4-BE49-F238E27FC236}">
-                <a16:creationId xmlns:a16="http://schemas.microsoft.com/office/drawing/2014/main" id="{4E36C15A-2C21-C693-E541-84524DCB2598}"/>
-              </a:ext>
-            </a:extLst>
-          </p:cNvPr>
-          <p:cNvSpPr txBox="1"/>
-          <p:nvPr/>
-        </p:nvSpPr>
-        <p:spPr>
-          <a:xfrm>
-            <a:off x="7008019" y="4979194"/>
-            <a:ext cx="2900362" cy="646331"/>
-          </a:xfrm>
-          <a:prstGeom prst="rect">
-            <a:avLst/>
-          </a:prstGeom>
-          <a:noFill/>
-        </p:spPr>
-        <p:txBody>
-          <a:bodyPr wrap="square" rtlCol="0">
-            <a:spAutoFit/>
-          </a:bodyPr>
-          <a:lstStyle/>
-          <a:p>
-            <a:r>
-              <a:rPr lang="en-US" dirty="0"/>
-              <a:t>Test samples: 387 </a:t>
-            </a:r>
-          </a:p>
-          <a:p>
-            <a:r>
-              <a:rPr lang="en-US" dirty="0"/>
-              <a:t>Test accuracy: 0.7907</a:t>
-            </a:r>
-            <a:endParaRPr lang="en-IN" dirty="0"/>
-          </a:p>
-        </p:txBody>
-      </p:sp>
     </p:spTree>
     <p:extLst>
       <p:ext uri="{BB962C8B-B14F-4D97-AF65-F5344CB8AC3E}">
-        <p14:creationId xmlns:p14="http://schemas.microsoft.com/office/powerpoint/2010/main" val="3414256386"/>
+        <p14:creationId xmlns:p14="http://schemas.microsoft.com/office/powerpoint/2010/main" val="2977515327"/>
       </p:ext>
     </p:extLst>
   </p:cSld>
@@ -6510,13 +7311,7 @@
   <p:cSld>
     <p:spTree>
       <p:nvGrpSpPr>
-        <p:cNvPr id="1" name="">
-          <a:extLst>
-            <a:ext uri="{FF2B5EF4-FFF2-40B4-BE49-F238E27FC236}">
-              <a16:creationId xmlns:a16="http://schemas.microsoft.com/office/drawing/2014/main" id="{A9F98FB9-1567-1698-A4A4-609651791B8A}"/>
-            </a:ext>
-          </a:extLst>
-        </p:cNvPr>
+        <p:cNvPr id="1" name=""/>
         <p:cNvGrpSpPr/>
         <p:nvPr/>
       </p:nvGrpSpPr>
@@ -6533,7 +7328,7 @@
           <p:cNvPr id="2" name="Title 1">
             <a:extLst>
               <a:ext uri="{FF2B5EF4-FFF2-40B4-BE49-F238E27FC236}">
-                <a16:creationId xmlns:a16="http://schemas.microsoft.com/office/drawing/2014/main" id="{6C7F720D-D504-542D-7C85-568D45EBDC81}"/>
+                <a16:creationId xmlns:a16="http://schemas.microsoft.com/office/drawing/2014/main" id="{44F76F41-2AC2-92E4-3306-F7919242080B}"/>
               </a:ext>
             </a:extLst>
           </p:cNvPr>
@@ -6551,142 +7346,7 @@
           <a:p>
             <a:r>
               <a:rPr lang="en-US" dirty="0"/>
-              <a:t>Hybrid QML- 3 class classification – Basic entangler 8 qubits, 2 rep</a:t>
-            </a:r>
-            <a:endParaRPr lang="en-IN" dirty="0"/>
-          </a:p>
-        </p:txBody>
-      </p:sp>
-      <p:sp>
-        <p:nvSpPr>
-          <p:cNvPr id="7" name="TextBox 6">
-            <a:extLst>
-              <a:ext uri="{FF2B5EF4-FFF2-40B4-BE49-F238E27FC236}">
-                <a16:creationId xmlns:a16="http://schemas.microsoft.com/office/drawing/2014/main" id="{848DE4A4-F699-F5A3-7FA2-4FFFDCDE3BD2}"/>
-              </a:ext>
-            </a:extLst>
-          </p:cNvPr>
-          <p:cNvSpPr txBox="1"/>
-          <p:nvPr/>
-        </p:nvSpPr>
-        <p:spPr>
-          <a:xfrm>
-            <a:off x="7661186" y="2189953"/>
-            <a:ext cx="2775833" cy="923330"/>
-          </a:xfrm>
-          <a:prstGeom prst="rect">
-            <a:avLst/>
-          </a:prstGeom>
-          <a:noFill/>
-        </p:spPr>
-        <p:txBody>
-          <a:bodyPr wrap="square" rtlCol="0">
-            <a:spAutoFit/>
-          </a:bodyPr>
-          <a:lstStyle/>
-          <a:p>
-            <a:r>
-              <a:rPr lang="en-IN" dirty="0"/>
-              <a:t>Best epoch: 19 </a:t>
-            </a:r>
-          </a:p>
-          <a:p>
-            <a:r>
-              <a:rPr lang="en-IN" dirty="0"/>
-              <a:t>Train </a:t>
-            </a:r>
-            <a:r>
-              <a:rPr lang="en-IN" dirty="0" err="1"/>
-              <a:t>acc</a:t>
-            </a:r>
-            <a:r>
-              <a:rPr lang="en-IN" dirty="0"/>
-              <a:t>: 0.8020 </a:t>
-            </a:r>
-          </a:p>
-          <a:p>
-            <a:r>
-              <a:rPr lang="en-IN" dirty="0"/>
-              <a:t>Val </a:t>
-            </a:r>
-            <a:r>
-              <a:rPr lang="en-IN" dirty="0" err="1"/>
-              <a:t>acc</a:t>
-            </a:r>
-            <a:r>
-              <a:rPr lang="en-IN" dirty="0"/>
-              <a:t>: 0.7855</a:t>
-            </a:r>
-          </a:p>
-        </p:txBody>
-      </p:sp>
-      <p:sp>
-        <p:nvSpPr>
-          <p:cNvPr id="10" name="TextBox 9">
-            <a:extLst>
-              <a:ext uri="{FF2B5EF4-FFF2-40B4-BE49-F238E27FC236}">
-                <a16:creationId xmlns:a16="http://schemas.microsoft.com/office/drawing/2014/main" id="{E7DD2D62-45BA-8BF6-5719-F86D382CC4E2}"/>
-              </a:ext>
-            </a:extLst>
-          </p:cNvPr>
-          <p:cNvSpPr txBox="1"/>
-          <p:nvPr/>
-        </p:nvSpPr>
-        <p:spPr>
-          <a:xfrm>
-            <a:off x="838200" y="3752091"/>
-            <a:ext cx="3303917" cy="375053"/>
-          </a:xfrm>
-          <a:prstGeom prst="rect">
-            <a:avLst/>
-          </a:prstGeom>
-          <a:noFill/>
-        </p:spPr>
-        <p:txBody>
-          <a:bodyPr wrap="square" rtlCol="0">
-            <a:spAutoFit/>
-          </a:bodyPr>
-          <a:lstStyle/>
-          <a:p>
-            <a:r>
-              <a:rPr lang="en-US" dirty="0"/>
-              <a:t>Test set results</a:t>
-            </a:r>
-            <a:endParaRPr lang="en-IN" dirty="0"/>
-          </a:p>
-        </p:txBody>
-      </p:sp>
-      <p:sp>
-        <p:nvSpPr>
-          <p:cNvPr id="11" name="TextBox 10">
-            <a:extLst>
-              <a:ext uri="{FF2B5EF4-FFF2-40B4-BE49-F238E27FC236}">
-                <a16:creationId xmlns:a16="http://schemas.microsoft.com/office/drawing/2014/main" id="{6D9C562A-1E31-7F87-1833-23DD509C3A48}"/>
-              </a:ext>
-            </a:extLst>
-          </p:cNvPr>
-          <p:cNvSpPr txBox="1"/>
-          <p:nvPr/>
-        </p:nvSpPr>
-        <p:spPr>
-          <a:xfrm>
-            <a:off x="7661186" y="4573483"/>
-            <a:ext cx="2191110" cy="646331"/>
-          </a:xfrm>
-          <a:prstGeom prst="rect">
-            <a:avLst/>
-          </a:prstGeom>
-          <a:noFill/>
-        </p:spPr>
-        <p:txBody>
-          <a:bodyPr wrap="square" rtlCol="0">
-            <a:spAutoFit/>
-          </a:bodyPr>
-          <a:lstStyle/>
-          <a:p>
-            <a:r>
-              <a:rPr lang="en-US" dirty="0"/>
-              <a:t>Test samples: 387 Test accuracy: 0.7390 </a:t>
+              <a:t>Hybrid QML- 3 class classification – Basic entangler 8 qubits, 1 rep</a:t>
             </a:r>
             <a:endParaRPr lang="en-IN" dirty="0"/>
           </a:p>
@@ -6694,10 +7354,10 @@
       </p:sp>
       <p:pic>
         <p:nvPicPr>
-          <p:cNvPr id="5" name="Picture 4">
-            <a:extLst>
-              <a:ext uri="{FF2B5EF4-FFF2-40B4-BE49-F238E27FC236}">
-                <a16:creationId xmlns:a16="http://schemas.microsoft.com/office/drawing/2014/main" id="{435DA6D1-0AE5-0886-329D-8CBC36210157}"/>
+          <p:cNvPr id="6" name="Picture 5">
+            <a:extLst>
+              <a:ext uri="{FF2B5EF4-FFF2-40B4-BE49-F238E27FC236}">
+                <a16:creationId xmlns:a16="http://schemas.microsoft.com/office/drawing/2014/main" id="{4407D620-3DC7-D5FB-E867-8A32FD42E8E8}"/>
               </a:ext>
             </a:extLst>
           </p:cNvPr>
@@ -6714,20 +7374,119 @@
         </p:blipFill>
         <p:spPr>
           <a:xfrm>
-            <a:off x="968526" y="1610640"/>
-            <a:ext cx="6562334" cy="2141451"/>
+            <a:off x="838200" y="1509837"/>
+            <a:ext cx="8256578" cy="2684612"/>
           </a:xfrm>
           <a:prstGeom prst="rect">
             <a:avLst/>
           </a:prstGeom>
         </p:spPr>
       </p:pic>
+      <p:sp>
+        <p:nvSpPr>
+          <p:cNvPr id="7" name="TextBox 6">
+            <a:extLst>
+              <a:ext uri="{FF2B5EF4-FFF2-40B4-BE49-F238E27FC236}">
+                <a16:creationId xmlns:a16="http://schemas.microsoft.com/office/drawing/2014/main" id="{52F1D253-159B-9E8F-E86B-5F1D741A2287}"/>
+              </a:ext>
+            </a:extLst>
+          </p:cNvPr>
+          <p:cNvSpPr txBox="1"/>
+          <p:nvPr/>
+        </p:nvSpPr>
+        <p:spPr>
+          <a:xfrm>
+            <a:off x="9279731" y="1928813"/>
+            <a:ext cx="2586038" cy="923330"/>
+          </a:xfrm>
+          <a:prstGeom prst="rect">
+            <a:avLst/>
+          </a:prstGeom>
+          <a:noFill/>
+        </p:spPr>
+        <p:txBody>
+          <a:bodyPr wrap="square" rtlCol="0">
+            <a:spAutoFit/>
+          </a:bodyPr>
+          <a:lstStyle/>
+          <a:p>
+            <a:r>
+              <a:rPr lang="en-IN" dirty="0"/>
+              <a:t>Best epoch: 20 </a:t>
+            </a:r>
+          </a:p>
+          <a:p>
+            <a:r>
+              <a:rPr lang="en-IN" dirty="0"/>
+              <a:t>Train </a:t>
+            </a:r>
+            <a:r>
+              <a:rPr lang="en-IN" dirty="0" err="1"/>
+              <a:t>acc</a:t>
+            </a:r>
+            <a:r>
+              <a:rPr lang="en-IN" dirty="0"/>
+              <a:t>: 0.8403  </a:t>
+            </a:r>
+          </a:p>
+          <a:p>
+            <a:r>
+              <a:rPr lang="en-IN" dirty="0"/>
+              <a:t>Val </a:t>
+            </a:r>
+            <a:r>
+              <a:rPr lang="en-IN" dirty="0" err="1"/>
+              <a:t>acc</a:t>
+            </a:r>
+            <a:r>
+              <a:rPr lang="en-IN" dirty="0"/>
+              <a:t>: 0.8036</a:t>
+            </a:r>
+          </a:p>
+        </p:txBody>
+      </p:sp>
+      <p:sp>
+        <p:nvSpPr>
+          <p:cNvPr id="8" name="TextBox 7">
+            <a:extLst>
+              <a:ext uri="{FF2B5EF4-FFF2-40B4-BE49-F238E27FC236}">
+                <a16:creationId xmlns:a16="http://schemas.microsoft.com/office/drawing/2014/main" id="{4C3D9C4B-1A4D-78CF-3D20-19D506297CD6}"/>
+              </a:ext>
+            </a:extLst>
+          </p:cNvPr>
+          <p:cNvSpPr txBox="1"/>
+          <p:nvPr/>
+        </p:nvSpPr>
+        <p:spPr>
+          <a:xfrm>
+            <a:off x="1052513" y="4080704"/>
+            <a:ext cx="3303917" cy="375053"/>
+          </a:xfrm>
+          <a:prstGeom prst="rect">
+            <a:avLst/>
+          </a:prstGeom>
+          <a:noFill/>
+        </p:spPr>
+        <p:txBody>
+          <a:bodyPr wrap="square" rtlCol="0">
+            <a:spAutoFit/>
+          </a:bodyPr>
+          <a:lstStyle/>
+          <a:p>
+            <a:r>
+              <a:rPr lang="en-US" dirty="0"/>
+              <a:t>Test set results</a:t>
+            </a:r>
+            <a:endParaRPr lang="en-IN" dirty="0"/>
+          </a:p>
+        </p:txBody>
+      </p:sp>
       <p:pic>
         <p:nvPicPr>
-          <p:cNvPr id="9" name="Picture 8">
-            <a:extLst>
-              <a:ext uri="{FF2B5EF4-FFF2-40B4-BE49-F238E27FC236}">
-                <a16:creationId xmlns:a16="http://schemas.microsoft.com/office/drawing/2014/main" id="{35081ED4-8658-6858-3C99-485C04713369}"/>
+          <p:cNvPr id="10" name="Picture 9">
+            <a:extLst>
+              <a:ext uri="{FF2B5EF4-FFF2-40B4-BE49-F238E27FC236}">
+                <a16:creationId xmlns:a16="http://schemas.microsoft.com/office/drawing/2014/main" id="{86FA8033-4EAA-15FE-9BC3-3DBBB2B44CE2}"/>
               </a:ext>
             </a:extLst>
           </p:cNvPr>
@@ -6744,18 +7503,60 @@
         </p:blipFill>
         <p:spPr>
           <a:xfrm>
-            <a:off x="990484" y="4127144"/>
-            <a:ext cx="6670702" cy="2608866"/>
+            <a:off x="909637" y="4455757"/>
+            <a:ext cx="5863456" cy="2300609"/>
           </a:xfrm>
           <a:prstGeom prst="rect">
             <a:avLst/>
           </a:prstGeom>
         </p:spPr>
       </p:pic>
+      <p:sp>
+        <p:nvSpPr>
+          <p:cNvPr id="11" name="TextBox 10">
+            <a:extLst>
+              <a:ext uri="{FF2B5EF4-FFF2-40B4-BE49-F238E27FC236}">
+                <a16:creationId xmlns:a16="http://schemas.microsoft.com/office/drawing/2014/main" id="{4E36C15A-2C21-C693-E541-84524DCB2598}"/>
+              </a:ext>
+            </a:extLst>
+          </p:cNvPr>
+          <p:cNvSpPr txBox="1"/>
+          <p:nvPr/>
+        </p:nvSpPr>
+        <p:spPr>
+          <a:xfrm>
+            <a:off x="7008019" y="4979194"/>
+            <a:ext cx="2900362" cy="646331"/>
+          </a:xfrm>
+          <a:prstGeom prst="rect">
+            <a:avLst/>
+          </a:prstGeom>
+          <a:noFill/>
+        </p:spPr>
+        <p:txBody>
+          <a:bodyPr wrap="square" rtlCol="0">
+            <a:spAutoFit/>
+          </a:bodyPr>
+          <a:lstStyle/>
+          <a:p>
+            <a:r>
+              <a:rPr lang="en-US" dirty="0"/>
+              <a:t>Test samples: 387 </a:t>
+            </a:r>
+          </a:p>
+          <a:p>
+            <a:r>
+              <a:rPr lang="en-US" dirty="0"/>
+              <a:t>Test accuracy: 0.7907</a:t>
+            </a:r>
+            <a:endParaRPr lang="en-IN" dirty="0"/>
+          </a:p>
+        </p:txBody>
+      </p:sp>
     </p:spTree>
     <p:extLst>
       <p:ext uri="{BB962C8B-B14F-4D97-AF65-F5344CB8AC3E}">
-        <p14:creationId xmlns:p14="http://schemas.microsoft.com/office/powerpoint/2010/main" val="1661897433"/>
+        <p14:creationId xmlns:p14="http://schemas.microsoft.com/office/powerpoint/2010/main" val="3414256386"/>
       </p:ext>
     </p:extLst>
   </p:cSld>

--- a/Results_Presentation.pptx
+++ b/Results_Presentation.pptx
@@ -4,23 +4,35 @@
   <p:sldMasterIdLst>
     <p:sldMasterId id="2147483648" r:id="rId1"/>
   </p:sldMasterIdLst>
+  <p:notesMasterIdLst>
+    <p:notesMasterId r:id="rId27"/>
+  </p:notesMasterIdLst>
   <p:sldIdLst>
     <p:sldId id="256" r:id="rId2"/>
-    <p:sldId id="257" r:id="rId3"/>
-    <p:sldId id="260" r:id="rId4"/>
-    <p:sldId id="259" r:id="rId5"/>
-    <p:sldId id="258" r:id="rId6"/>
-    <p:sldId id="261" r:id="rId7"/>
-    <p:sldId id="262" r:id="rId8"/>
-    <p:sldId id="263" r:id="rId9"/>
-    <p:sldId id="266" r:id="rId10"/>
-    <p:sldId id="264" r:id="rId11"/>
-    <p:sldId id="265" r:id="rId12"/>
-    <p:sldId id="267" r:id="rId13"/>
-    <p:sldId id="268" r:id="rId14"/>
-    <p:sldId id="269" r:id="rId15"/>
-    <p:sldId id="270" r:id="rId16"/>
-    <p:sldId id="271" r:id="rId17"/>
+    <p:sldId id="273" r:id="rId3"/>
+    <p:sldId id="274" r:id="rId4"/>
+    <p:sldId id="275" r:id="rId5"/>
+    <p:sldId id="272" r:id="rId6"/>
+    <p:sldId id="276" r:id="rId7"/>
+    <p:sldId id="269" r:id="rId8"/>
+    <p:sldId id="270" r:id="rId9"/>
+    <p:sldId id="278" r:id="rId10"/>
+    <p:sldId id="279" r:id="rId11"/>
+    <p:sldId id="271" r:id="rId12"/>
+    <p:sldId id="277" r:id="rId13"/>
+    <p:sldId id="280" r:id="rId14"/>
+    <p:sldId id="257" r:id="rId15"/>
+    <p:sldId id="260" r:id="rId16"/>
+    <p:sldId id="259" r:id="rId17"/>
+    <p:sldId id="258" r:id="rId18"/>
+    <p:sldId id="261" r:id="rId19"/>
+    <p:sldId id="262" r:id="rId20"/>
+    <p:sldId id="263" r:id="rId21"/>
+    <p:sldId id="266" r:id="rId22"/>
+    <p:sldId id="264" r:id="rId23"/>
+    <p:sldId id="265" r:id="rId24"/>
+    <p:sldId id="267" r:id="rId25"/>
+    <p:sldId id="268" r:id="rId26"/>
   </p:sldIdLst>
   <p:sldSz cx="12192000" cy="6858000"/>
   <p:notesSz cx="6858000" cy="9144000"/>
@@ -127,6 +139,356 @@
 </p:presentation>
 </file>
 
+<file path=ppt/notesMasters/notesMaster1.xml><?xml version="1.0" encoding="utf-8"?>
+<p:notesMaster xmlns:a="http://schemas.openxmlformats.org/drawingml/2006/main" xmlns:r="http://schemas.openxmlformats.org/officeDocument/2006/relationships" xmlns:p="http://schemas.openxmlformats.org/presentationml/2006/main">
+  <p:cSld>
+    <p:bg>
+      <p:bgRef idx="1001">
+        <a:schemeClr val="bg1"/>
+      </p:bgRef>
+    </p:bg>
+    <p:spTree>
+      <p:nvGrpSpPr>
+        <p:cNvPr id="1" name=""/>
+        <p:cNvGrpSpPr/>
+        <p:nvPr/>
+      </p:nvGrpSpPr>
+      <p:grpSpPr>
+        <a:xfrm>
+          <a:off x="0" y="0"/>
+          <a:ext cx="0" cy="0"/>
+          <a:chOff x="0" y="0"/>
+          <a:chExt cx="0" cy="0"/>
+        </a:xfrm>
+      </p:grpSpPr>
+      <p:sp>
+        <p:nvSpPr>
+          <p:cNvPr id="2" name="Header Placeholder 1"/>
+          <p:cNvSpPr>
+            <a:spLocks noGrp="1"/>
+          </p:cNvSpPr>
+          <p:nvPr>
+            <p:ph type="hdr" sz="quarter"/>
+          </p:nvPr>
+        </p:nvSpPr>
+        <p:spPr>
+          <a:xfrm>
+            <a:off x="0" y="0"/>
+            <a:ext cx="2971800" cy="458788"/>
+          </a:xfrm>
+          <a:prstGeom prst="rect">
+            <a:avLst/>
+          </a:prstGeom>
+        </p:spPr>
+        <p:txBody>
+          <a:bodyPr vert="horz" lIns="91440" tIns="45720" rIns="91440" bIns="45720" rtlCol="0"/>
+          <a:lstStyle>
+            <a:lvl1pPr algn="l">
+              <a:defRPr sz="1200"/>
+            </a:lvl1pPr>
+          </a:lstStyle>
+          <a:p>
+            <a:endParaRPr lang="en-IN"/>
+          </a:p>
+        </p:txBody>
+      </p:sp>
+      <p:sp>
+        <p:nvSpPr>
+          <p:cNvPr id="3" name="Date Placeholder 2"/>
+          <p:cNvSpPr>
+            <a:spLocks noGrp="1"/>
+          </p:cNvSpPr>
+          <p:nvPr>
+            <p:ph type="dt" idx="1"/>
+          </p:nvPr>
+        </p:nvSpPr>
+        <p:spPr>
+          <a:xfrm>
+            <a:off x="3884613" y="0"/>
+            <a:ext cx="2971800" cy="458788"/>
+          </a:xfrm>
+          <a:prstGeom prst="rect">
+            <a:avLst/>
+          </a:prstGeom>
+        </p:spPr>
+        <p:txBody>
+          <a:bodyPr vert="horz" lIns="91440" tIns="45720" rIns="91440" bIns="45720" rtlCol="0"/>
+          <a:lstStyle>
+            <a:lvl1pPr algn="r">
+              <a:defRPr sz="1200"/>
+            </a:lvl1pPr>
+          </a:lstStyle>
+          <a:p>
+            <a:fld id="{7217DA84-0A72-4198-B6F3-6DBBB9B9356D}" type="datetimeFigureOut">
+              <a:rPr lang="en-IN" smtClean="0"/>
+              <a:t>11-10-2026</a:t>
+            </a:fld>
+            <a:endParaRPr lang="en-IN"/>
+          </a:p>
+        </p:txBody>
+      </p:sp>
+      <p:sp>
+        <p:nvSpPr>
+          <p:cNvPr id="4" name="Slide Image Placeholder 3"/>
+          <p:cNvSpPr>
+            <a:spLocks noGrp="1" noRot="1" noChangeAspect="1"/>
+          </p:cNvSpPr>
+          <p:nvPr>
+            <p:ph type="sldImg" idx="2"/>
+          </p:nvPr>
+        </p:nvSpPr>
+        <p:spPr>
+          <a:xfrm>
+            <a:off x="685800" y="1143000"/>
+            <a:ext cx="5486400" cy="3086100"/>
+          </a:xfrm>
+          <a:prstGeom prst="rect">
+            <a:avLst/>
+          </a:prstGeom>
+          <a:noFill/>
+          <a:ln w="12700">
+            <a:solidFill>
+              <a:prstClr val="black"/>
+            </a:solidFill>
+          </a:ln>
+        </p:spPr>
+        <p:txBody>
+          <a:bodyPr vert="horz" lIns="91440" tIns="45720" rIns="91440" bIns="45720" rtlCol="0" anchor="ctr"/>
+          <a:lstStyle/>
+          <a:p>
+            <a:endParaRPr lang="en-IN"/>
+          </a:p>
+        </p:txBody>
+      </p:sp>
+      <p:sp>
+        <p:nvSpPr>
+          <p:cNvPr id="5" name="Notes Placeholder 4"/>
+          <p:cNvSpPr>
+            <a:spLocks noGrp="1"/>
+          </p:cNvSpPr>
+          <p:nvPr>
+            <p:ph type="body" sz="quarter" idx="3"/>
+          </p:nvPr>
+        </p:nvSpPr>
+        <p:spPr>
+          <a:xfrm>
+            <a:off x="685800" y="4400550"/>
+            <a:ext cx="5486400" cy="3600450"/>
+          </a:xfrm>
+          <a:prstGeom prst="rect">
+            <a:avLst/>
+          </a:prstGeom>
+        </p:spPr>
+        <p:txBody>
+          <a:bodyPr vert="horz" lIns="91440" tIns="45720" rIns="91440" bIns="45720" rtlCol="0"/>
+          <a:lstStyle/>
+          <a:p>
+            <a:pPr lvl="0"/>
+            <a:r>
+              <a:rPr lang="en-US"/>
+              <a:t>Click to edit Master text styles</a:t>
+            </a:r>
+          </a:p>
+          <a:p>
+            <a:pPr lvl="1"/>
+            <a:r>
+              <a:rPr lang="en-US"/>
+              <a:t>Second level</a:t>
+            </a:r>
+          </a:p>
+          <a:p>
+            <a:pPr lvl="2"/>
+            <a:r>
+              <a:rPr lang="en-US"/>
+              <a:t>Third level</a:t>
+            </a:r>
+          </a:p>
+          <a:p>
+            <a:pPr lvl="3"/>
+            <a:r>
+              <a:rPr lang="en-US"/>
+              <a:t>Fourth level</a:t>
+            </a:r>
+          </a:p>
+          <a:p>
+            <a:pPr lvl="4"/>
+            <a:r>
+              <a:rPr lang="en-US"/>
+              <a:t>Fifth level</a:t>
+            </a:r>
+            <a:endParaRPr lang="en-IN"/>
+          </a:p>
+        </p:txBody>
+      </p:sp>
+      <p:sp>
+        <p:nvSpPr>
+          <p:cNvPr id="6" name="Footer Placeholder 5"/>
+          <p:cNvSpPr>
+            <a:spLocks noGrp="1"/>
+          </p:cNvSpPr>
+          <p:nvPr>
+            <p:ph type="ftr" sz="quarter" idx="4"/>
+          </p:nvPr>
+        </p:nvSpPr>
+        <p:spPr>
+          <a:xfrm>
+            <a:off x="0" y="8685213"/>
+            <a:ext cx="2971800" cy="458787"/>
+          </a:xfrm>
+          <a:prstGeom prst="rect">
+            <a:avLst/>
+          </a:prstGeom>
+        </p:spPr>
+        <p:txBody>
+          <a:bodyPr vert="horz" lIns="91440" tIns="45720" rIns="91440" bIns="45720" rtlCol="0" anchor="b"/>
+          <a:lstStyle>
+            <a:lvl1pPr algn="l">
+              <a:defRPr sz="1200"/>
+            </a:lvl1pPr>
+          </a:lstStyle>
+          <a:p>
+            <a:endParaRPr lang="en-IN"/>
+          </a:p>
+        </p:txBody>
+      </p:sp>
+      <p:sp>
+        <p:nvSpPr>
+          <p:cNvPr id="7" name="Slide Number Placeholder 6"/>
+          <p:cNvSpPr>
+            <a:spLocks noGrp="1"/>
+          </p:cNvSpPr>
+          <p:nvPr>
+            <p:ph type="sldNum" sz="quarter" idx="5"/>
+          </p:nvPr>
+        </p:nvSpPr>
+        <p:spPr>
+          <a:xfrm>
+            <a:off x="3884613" y="8685213"/>
+            <a:ext cx="2971800" cy="458787"/>
+          </a:xfrm>
+          <a:prstGeom prst="rect">
+            <a:avLst/>
+          </a:prstGeom>
+        </p:spPr>
+        <p:txBody>
+          <a:bodyPr vert="horz" lIns="91440" tIns="45720" rIns="91440" bIns="45720" rtlCol="0" anchor="b"/>
+          <a:lstStyle>
+            <a:lvl1pPr algn="r">
+              <a:defRPr sz="1200"/>
+            </a:lvl1pPr>
+          </a:lstStyle>
+          <a:p>
+            <a:fld id="{2B42A922-215B-4768-9496-9B3C602F87C5}" type="slidenum">
+              <a:rPr lang="en-IN" smtClean="0"/>
+              <a:t>‹#›</a:t>
+            </a:fld>
+            <a:endParaRPr lang="en-IN"/>
+          </a:p>
+        </p:txBody>
+      </p:sp>
+    </p:spTree>
+    <p:extLst>
+      <p:ext uri="{BB962C8B-B14F-4D97-AF65-F5344CB8AC3E}">
+        <p14:creationId xmlns:p14="http://schemas.microsoft.com/office/powerpoint/2010/main" val="3865965193"/>
+      </p:ext>
+    </p:extLst>
+  </p:cSld>
+  <p:clrMap bg1="lt1" tx1="dk1" bg2="lt2" tx2="dk2" accent1="accent1" accent2="accent2" accent3="accent3" accent4="accent4" accent5="accent5" accent6="accent6" hlink="hlink" folHlink="folHlink"/>
+  <p:notesStyle>
+    <a:lvl1pPr marL="0" algn="l" defTabSz="914400" rtl="0" eaLnBrk="1" latinLnBrk="0" hangingPunct="1">
+      <a:defRPr sz="1200" kern="1200">
+        <a:solidFill>
+          <a:schemeClr val="tx1"/>
+        </a:solidFill>
+        <a:latin typeface="+mn-lt"/>
+        <a:ea typeface="+mn-ea"/>
+        <a:cs typeface="+mn-cs"/>
+      </a:defRPr>
+    </a:lvl1pPr>
+    <a:lvl2pPr marL="457200" algn="l" defTabSz="914400" rtl="0" eaLnBrk="1" latinLnBrk="0" hangingPunct="1">
+      <a:defRPr sz="1200" kern="1200">
+        <a:solidFill>
+          <a:schemeClr val="tx1"/>
+        </a:solidFill>
+        <a:latin typeface="+mn-lt"/>
+        <a:ea typeface="+mn-ea"/>
+        <a:cs typeface="+mn-cs"/>
+      </a:defRPr>
+    </a:lvl2pPr>
+    <a:lvl3pPr marL="914400" algn="l" defTabSz="914400" rtl="0" eaLnBrk="1" latinLnBrk="0" hangingPunct="1">
+      <a:defRPr sz="1200" kern="1200">
+        <a:solidFill>
+          <a:schemeClr val="tx1"/>
+        </a:solidFill>
+        <a:latin typeface="+mn-lt"/>
+        <a:ea typeface="+mn-ea"/>
+        <a:cs typeface="+mn-cs"/>
+      </a:defRPr>
+    </a:lvl3pPr>
+    <a:lvl4pPr marL="1371600" algn="l" defTabSz="914400" rtl="0" eaLnBrk="1" latinLnBrk="0" hangingPunct="1">
+      <a:defRPr sz="1200" kern="1200">
+        <a:solidFill>
+          <a:schemeClr val="tx1"/>
+        </a:solidFill>
+        <a:latin typeface="+mn-lt"/>
+        <a:ea typeface="+mn-ea"/>
+        <a:cs typeface="+mn-cs"/>
+      </a:defRPr>
+    </a:lvl4pPr>
+    <a:lvl5pPr marL="1828800" algn="l" defTabSz="914400" rtl="0" eaLnBrk="1" latinLnBrk="0" hangingPunct="1">
+      <a:defRPr sz="1200" kern="1200">
+        <a:solidFill>
+          <a:schemeClr val="tx1"/>
+        </a:solidFill>
+        <a:latin typeface="+mn-lt"/>
+        <a:ea typeface="+mn-ea"/>
+        <a:cs typeface="+mn-cs"/>
+      </a:defRPr>
+    </a:lvl5pPr>
+    <a:lvl6pPr marL="2286000" algn="l" defTabSz="914400" rtl="0" eaLnBrk="1" latinLnBrk="0" hangingPunct="1">
+      <a:defRPr sz="1200" kern="1200">
+        <a:solidFill>
+          <a:schemeClr val="tx1"/>
+        </a:solidFill>
+        <a:latin typeface="+mn-lt"/>
+        <a:ea typeface="+mn-ea"/>
+        <a:cs typeface="+mn-cs"/>
+      </a:defRPr>
+    </a:lvl6pPr>
+    <a:lvl7pPr marL="2743200" algn="l" defTabSz="914400" rtl="0" eaLnBrk="1" latinLnBrk="0" hangingPunct="1">
+      <a:defRPr sz="1200" kern="1200">
+        <a:solidFill>
+          <a:schemeClr val="tx1"/>
+        </a:solidFill>
+        <a:latin typeface="+mn-lt"/>
+        <a:ea typeface="+mn-ea"/>
+        <a:cs typeface="+mn-cs"/>
+      </a:defRPr>
+    </a:lvl7pPr>
+    <a:lvl8pPr marL="3200400" algn="l" defTabSz="914400" rtl="0" eaLnBrk="1" latinLnBrk="0" hangingPunct="1">
+      <a:defRPr sz="1200" kern="1200">
+        <a:solidFill>
+          <a:schemeClr val="tx1"/>
+        </a:solidFill>
+        <a:latin typeface="+mn-lt"/>
+        <a:ea typeface="+mn-ea"/>
+        <a:cs typeface="+mn-cs"/>
+      </a:defRPr>
+    </a:lvl8pPr>
+    <a:lvl9pPr marL="3657600" algn="l" defTabSz="914400" rtl="0" eaLnBrk="1" latinLnBrk="0" hangingPunct="1">
+      <a:defRPr sz="1200" kern="1200">
+        <a:solidFill>
+          <a:schemeClr val="tx1"/>
+        </a:solidFill>
+        <a:latin typeface="+mn-lt"/>
+        <a:ea typeface="+mn-ea"/>
+        <a:cs typeface="+mn-cs"/>
+      </a:defRPr>
+    </a:lvl9pPr>
+  </p:notesStyle>
+</p:notesMaster>
+</file>
+
 <file path=ppt/slideLayouts/slideLayout1.xml><?xml version="1.0" encoding="utf-8"?>
 <p:sldLayout xmlns:a="http://schemas.openxmlformats.org/drawingml/2006/main" xmlns:r="http://schemas.openxmlformats.org/officeDocument/2006/relationships" xmlns:p="http://schemas.openxmlformats.org/presentationml/2006/main" type="title" preserve="1">
   <p:cSld name="Title Slide">
@@ -274,7 +636,7 @@
           <a:bodyPr/>
           <a:lstStyle/>
           <a:p>
-            <a:fld id="{2771BB51-21FF-49C0-8E42-BDE44188109C}" type="datetimeFigureOut">
+            <a:fld id="{9E3D0AD8-DEAE-468C-8408-9D8C8045FECD}" type="datetime1">
               <a:rPr lang="en-IN" smtClean="0"/>
               <a:t>11-10-2026</a:t>
             </a:fld>
@@ -474,7 +836,7 @@
           <a:bodyPr/>
           <a:lstStyle/>
           <a:p>
-            <a:fld id="{2771BB51-21FF-49C0-8E42-BDE44188109C}" type="datetimeFigureOut">
+            <a:fld id="{030C4D82-99D8-4F77-91F5-39498FC23A25}" type="datetime1">
               <a:rPr lang="en-IN" smtClean="0"/>
               <a:t>11-10-2026</a:t>
             </a:fld>
@@ -684,7 +1046,7 @@
           <a:bodyPr/>
           <a:lstStyle/>
           <a:p>
-            <a:fld id="{2771BB51-21FF-49C0-8E42-BDE44188109C}" type="datetimeFigureOut">
+            <a:fld id="{F6E471DD-EA23-43E7-AB9D-108EF467F7A5}" type="datetime1">
               <a:rPr lang="en-IN" smtClean="0"/>
               <a:t>11-10-2026</a:t>
             </a:fld>
@@ -884,7 +1246,7 @@
           <a:bodyPr/>
           <a:lstStyle/>
           <a:p>
-            <a:fld id="{2771BB51-21FF-49C0-8E42-BDE44188109C}" type="datetimeFigureOut">
+            <a:fld id="{246BC1A8-05C7-4D88-9081-F7ED25857EEC}" type="datetime1">
               <a:rPr lang="en-IN" smtClean="0"/>
               <a:t>11-10-2026</a:t>
             </a:fld>
@@ -1160,7 +1522,7 @@
           <a:bodyPr/>
           <a:lstStyle/>
           <a:p>
-            <a:fld id="{2771BB51-21FF-49C0-8E42-BDE44188109C}" type="datetimeFigureOut">
+            <a:fld id="{39D7F8C0-8E0D-45EF-8F18-07EABB9A2A5A}" type="datetime1">
               <a:rPr lang="en-IN" smtClean="0"/>
               <a:t>11-10-2026</a:t>
             </a:fld>
@@ -1428,7 +1790,7 @@
           <a:bodyPr/>
           <a:lstStyle/>
           <a:p>
-            <a:fld id="{2771BB51-21FF-49C0-8E42-BDE44188109C}" type="datetimeFigureOut">
+            <a:fld id="{BDA7FB3F-5A5B-4ABD-8DF3-CACA4161FC37}" type="datetime1">
               <a:rPr lang="en-IN" smtClean="0"/>
               <a:t>11-10-2026</a:t>
             </a:fld>
@@ -1843,7 +2205,7 @@
           <a:bodyPr/>
           <a:lstStyle/>
           <a:p>
-            <a:fld id="{2771BB51-21FF-49C0-8E42-BDE44188109C}" type="datetimeFigureOut">
+            <a:fld id="{348B0171-3F2B-4E91-A0AB-1820965676D5}" type="datetime1">
               <a:rPr lang="en-IN" smtClean="0"/>
               <a:t>11-10-2026</a:t>
             </a:fld>
@@ -1985,7 +2347,7 @@
           <a:bodyPr/>
           <a:lstStyle/>
           <a:p>
-            <a:fld id="{2771BB51-21FF-49C0-8E42-BDE44188109C}" type="datetimeFigureOut">
+            <a:fld id="{40694FB9-5D27-4353-A040-C3734B122DE1}" type="datetime1">
               <a:rPr lang="en-IN" smtClean="0"/>
               <a:t>11-10-2026</a:t>
             </a:fld>
@@ -2098,7 +2460,7 @@
           <a:bodyPr/>
           <a:lstStyle/>
           <a:p>
-            <a:fld id="{2771BB51-21FF-49C0-8E42-BDE44188109C}" type="datetimeFigureOut">
+            <a:fld id="{AEBA0EF6-D178-41FB-ABB1-0D427062312A}" type="datetime1">
               <a:rPr lang="en-IN" smtClean="0"/>
               <a:t>11-10-2026</a:t>
             </a:fld>
@@ -2411,7 +2773,7 @@
           <a:bodyPr/>
           <a:lstStyle/>
           <a:p>
-            <a:fld id="{2771BB51-21FF-49C0-8E42-BDE44188109C}" type="datetimeFigureOut">
+            <a:fld id="{272D7A38-F4C4-4874-B2DE-44C353BB6D7D}" type="datetime1">
               <a:rPr lang="en-IN" smtClean="0"/>
               <a:t>11-10-2026</a:t>
             </a:fld>
@@ -2700,7 +3062,7 @@
           <a:bodyPr/>
           <a:lstStyle/>
           <a:p>
-            <a:fld id="{2771BB51-21FF-49C0-8E42-BDE44188109C}" type="datetimeFigureOut">
+            <a:fld id="{543665CD-83CE-4FCC-B15F-FAF903148CF3}" type="datetime1">
               <a:rPr lang="en-IN" smtClean="0"/>
               <a:t>11-10-2026</a:t>
             </a:fld>
@@ -2943,7 +3305,7 @@
             </a:lvl1pPr>
           </a:lstStyle>
           <a:p>
-            <a:fld id="{2771BB51-21FF-49C0-8E42-BDE44188109C}" type="datetimeFigureOut">
+            <a:fld id="{FE743C1B-E0AC-4475-889D-FCCD44A90551}" type="datetime1">
               <a:rPr lang="en-IN" smtClean="0"/>
               <a:t>11-10-2026</a:t>
             </a:fld>
@@ -3062,6 +3424,7 @@
     <p:sldLayoutId id="2147483658" r:id="rId10"/>
     <p:sldLayoutId id="2147483659" r:id="rId11"/>
   </p:sldLayoutIdLst>
+  <p:hf hdr="0" ftr="0" dt="0"/>
   <p:txStyles>
     <p:titleStyle>
       <a:lvl1pPr algn="l" defTabSz="914400" rtl="0" eaLnBrk="1" latinLnBrk="0" hangingPunct="1">
@@ -3383,7 +3746,10 @@
           <a:bodyPr/>
           <a:lstStyle/>
           <a:p>
-            <a:endParaRPr lang="en-IN"/>
+            <a:r>
+              <a:rPr lang="en-IN" dirty="0"/>
+              <a:t>QLINK drug potency</a:t>
+            </a:r>
           </a:p>
         </p:txBody>
       </p:sp>
@@ -3408,6 +3774,38 @@
           <a:bodyPr/>
           <a:lstStyle/>
           <a:p>
+            <a:r>
+              <a:rPr lang="en-IN" dirty="0"/>
+              <a:t>Q-Link Screen</a:t>
+            </a:r>
+          </a:p>
+        </p:txBody>
+      </p:sp>
+      <p:sp>
+        <p:nvSpPr>
+          <p:cNvPr id="4" name="Slide Number Placeholder 3">
+            <a:extLst>
+              <a:ext uri="{FF2B5EF4-FFF2-40B4-BE49-F238E27FC236}">
+                <a16:creationId xmlns:a16="http://schemas.microsoft.com/office/drawing/2014/main" id="{C45C5640-994F-18B2-A0EC-D54D2D3D9050}"/>
+              </a:ext>
+            </a:extLst>
+          </p:cNvPr>
+          <p:cNvSpPr>
+            <a:spLocks noGrp="1"/>
+          </p:cNvSpPr>
+          <p:nvPr>
+            <p:ph type="sldNum" sz="quarter" idx="12"/>
+          </p:nvPr>
+        </p:nvSpPr>
+        <p:spPr/>
+        <p:txBody>
+          <a:bodyPr/>
+          <a:lstStyle/>
+          <a:p>
+            <a:fld id="{FAF4F8EC-53F2-4EB2-97C1-60EB836CC882}" type="slidenum">
+              <a:rPr lang="en-IN" smtClean="0"/>
+              <a:t>1</a:t>
+            </a:fld>
             <a:endParaRPr lang="en-IN"/>
           </a:p>
         </p:txBody>
@@ -3430,1046 +3828,6 @@
   <p:cSld>
     <p:spTree>
       <p:nvGrpSpPr>
-        <p:cNvPr id="1" name="">
-          <a:extLst>
-            <a:ext uri="{FF2B5EF4-FFF2-40B4-BE49-F238E27FC236}">
-              <a16:creationId xmlns:a16="http://schemas.microsoft.com/office/drawing/2014/main" id="{A9F98FB9-1567-1698-A4A4-609651791B8A}"/>
-            </a:ext>
-          </a:extLst>
-        </p:cNvPr>
-        <p:cNvGrpSpPr/>
-        <p:nvPr/>
-      </p:nvGrpSpPr>
-      <p:grpSpPr>
-        <a:xfrm>
-          <a:off x="0" y="0"/>
-          <a:ext cx="0" cy="0"/>
-          <a:chOff x="0" y="0"/>
-          <a:chExt cx="0" cy="0"/>
-        </a:xfrm>
-      </p:grpSpPr>
-      <p:sp>
-        <p:nvSpPr>
-          <p:cNvPr id="2" name="Title 1">
-            <a:extLst>
-              <a:ext uri="{FF2B5EF4-FFF2-40B4-BE49-F238E27FC236}">
-                <a16:creationId xmlns:a16="http://schemas.microsoft.com/office/drawing/2014/main" id="{6C7F720D-D504-542D-7C85-568D45EBDC81}"/>
-              </a:ext>
-            </a:extLst>
-          </p:cNvPr>
-          <p:cNvSpPr>
-            <a:spLocks noGrp="1"/>
-          </p:cNvSpPr>
-          <p:nvPr>
-            <p:ph type="title"/>
-          </p:nvPr>
-        </p:nvSpPr>
-        <p:spPr/>
-        <p:txBody>
-          <a:bodyPr/>
-          <a:lstStyle/>
-          <a:p>
-            <a:r>
-              <a:rPr lang="en-US" dirty="0"/>
-              <a:t>Hybrid QML- 3 class classification – Basic entangler 8 qubits, 2 rep</a:t>
-            </a:r>
-            <a:endParaRPr lang="en-IN" dirty="0"/>
-          </a:p>
-        </p:txBody>
-      </p:sp>
-      <p:sp>
-        <p:nvSpPr>
-          <p:cNvPr id="7" name="TextBox 6">
-            <a:extLst>
-              <a:ext uri="{FF2B5EF4-FFF2-40B4-BE49-F238E27FC236}">
-                <a16:creationId xmlns:a16="http://schemas.microsoft.com/office/drawing/2014/main" id="{848DE4A4-F699-F5A3-7FA2-4FFFDCDE3BD2}"/>
-              </a:ext>
-            </a:extLst>
-          </p:cNvPr>
-          <p:cNvSpPr txBox="1"/>
-          <p:nvPr/>
-        </p:nvSpPr>
-        <p:spPr>
-          <a:xfrm>
-            <a:off x="7661186" y="2189953"/>
-            <a:ext cx="2775833" cy="923330"/>
-          </a:xfrm>
-          <a:prstGeom prst="rect">
-            <a:avLst/>
-          </a:prstGeom>
-          <a:noFill/>
-        </p:spPr>
-        <p:txBody>
-          <a:bodyPr wrap="square" rtlCol="0">
-            <a:spAutoFit/>
-          </a:bodyPr>
-          <a:lstStyle/>
-          <a:p>
-            <a:r>
-              <a:rPr lang="en-IN" dirty="0"/>
-              <a:t>Best epoch: 19 </a:t>
-            </a:r>
-          </a:p>
-          <a:p>
-            <a:r>
-              <a:rPr lang="en-IN" dirty="0"/>
-              <a:t>Train </a:t>
-            </a:r>
-            <a:r>
-              <a:rPr lang="en-IN" dirty="0" err="1"/>
-              <a:t>acc</a:t>
-            </a:r>
-            <a:r>
-              <a:rPr lang="en-IN" dirty="0"/>
-              <a:t>: 0.8020 </a:t>
-            </a:r>
-          </a:p>
-          <a:p>
-            <a:r>
-              <a:rPr lang="en-IN" dirty="0"/>
-              <a:t>Val </a:t>
-            </a:r>
-            <a:r>
-              <a:rPr lang="en-IN" dirty="0" err="1"/>
-              <a:t>acc</a:t>
-            </a:r>
-            <a:r>
-              <a:rPr lang="en-IN" dirty="0"/>
-              <a:t>: 0.7855</a:t>
-            </a:r>
-          </a:p>
-        </p:txBody>
-      </p:sp>
-      <p:sp>
-        <p:nvSpPr>
-          <p:cNvPr id="10" name="TextBox 9">
-            <a:extLst>
-              <a:ext uri="{FF2B5EF4-FFF2-40B4-BE49-F238E27FC236}">
-                <a16:creationId xmlns:a16="http://schemas.microsoft.com/office/drawing/2014/main" id="{E7DD2D62-45BA-8BF6-5719-F86D382CC4E2}"/>
-              </a:ext>
-            </a:extLst>
-          </p:cNvPr>
-          <p:cNvSpPr txBox="1"/>
-          <p:nvPr/>
-        </p:nvSpPr>
-        <p:spPr>
-          <a:xfrm>
-            <a:off x="838200" y="3752091"/>
-            <a:ext cx="3303917" cy="375053"/>
-          </a:xfrm>
-          <a:prstGeom prst="rect">
-            <a:avLst/>
-          </a:prstGeom>
-          <a:noFill/>
-        </p:spPr>
-        <p:txBody>
-          <a:bodyPr wrap="square" rtlCol="0">
-            <a:spAutoFit/>
-          </a:bodyPr>
-          <a:lstStyle/>
-          <a:p>
-            <a:r>
-              <a:rPr lang="en-US" dirty="0"/>
-              <a:t>Test set results</a:t>
-            </a:r>
-            <a:endParaRPr lang="en-IN" dirty="0"/>
-          </a:p>
-        </p:txBody>
-      </p:sp>
-      <p:sp>
-        <p:nvSpPr>
-          <p:cNvPr id="11" name="TextBox 10">
-            <a:extLst>
-              <a:ext uri="{FF2B5EF4-FFF2-40B4-BE49-F238E27FC236}">
-                <a16:creationId xmlns:a16="http://schemas.microsoft.com/office/drawing/2014/main" id="{6D9C562A-1E31-7F87-1833-23DD509C3A48}"/>
-              </a:ext>
-            </a:extLst>
-          </p:cNvPr>
-          <p:cNvSpPr txBox="1"/>
-          <p:nvPr/>
-        </p:nvSpPr>
-        <p:spPr>
-          <a:xfrm>
-            <a:off x="7661186" y="4573483"/>
-            <a:ext cx="2191110" cy="646331"/>
-          </a:xfrm>
-          <a:prstGeom prst="rect">
-            <a:avLst/>
-          </a:prstGeom>
-          <a:noFill/>
-        </p:spPr>
-        <p:txBody>
-          <a:bodyPr wrap="square" rtlCol="0">
-            <a:spAutoFit/>
-          </a:bodyPr>
-          <a:lstStyle/>
-          <a:p>
-            <a:r>
-              <a:rPr lang="en-US" dirty="0"/>
-              <a:t>Test samples: 387 Test accuracy: 0.7390 </a:t>
-            </a:r>
-            <a:endParaRPr lang="en-IN" dirty="0"/>
-          </a:p>
-        </p:txBody>
-      </p:sp>
-      <p:pic>
-        <p:nvPicPr>
-          <p:cNvPr id="5" name="Picture 4">
-            <a:extLst>
-              <a:ext uri="{FF2B5EF4-FFF2-40B4-BE49-F238E27FC236}">
-                <a16:creationId xmlns:a16="http://schemas.microsoft.com/office/drawing/2014/main" id="{435DA6D1-0AE5-0886-329D-8CBC36210157}"/>
-              </a:ext>
-            </a:extLst>
-          </p:cNvPr>
-          <p:cNvPicPr>
-            <a:picLocks noChangeAspect="1"/>
-          </p:cNvPicPr>
-          <p:nvPr/>
-        </p:nvPicPr>
-        <p:blipFill>
-          <a:blip r:embed="rId2"/>
-          <a:stretch>
-            <a:fillRect/>
-          </a:stretch>
-        </p:blipFill>
-        <p:spPr>
-          <a:xfrm>
-            <a:off x="968526" y="1610640"/>
-            <a:ext cx="6562334" cy="2141451"/>
-          </a:xfrm>
-          <a:prstGeom prst="rect">
-            <a:avLst/>
-          </a:prstGeom>
-        </p:spPr>
-      </p:pic>
-      <p:pic>
-        <p:nvPicPr>
-          <p:cNvPr id="9" name="Picture 8">
-            <a:extLst>
-              <a:ext uri="{FF2B5EF4-FFF2-40B4-BE49-F238E27FC236}">
-                <a16:creationId xmlns:a16="http://schemas.microsoft.com/office/drawing/2014/main" id="{35081ED4-8658-6858-3C99-485C04713369}"/>
-              </a:ext>
-            </a:extLst>
-          </p:cNvPr>
-          <p:cNvPicPr>
-            <a:picLocks noChangeAspect="1"/>
-          </p:cNvPicPr>
-          <p:nvPr/>
-        </p:nvPicPr>
-        <p:blipFill>
-          <a:blip r:embed="rId3"/>
-          <a:stretch>
-            <a:fillRect/>
-          </a:stretch>
-        </p:blipFill>
-        <p:spPr>
-          <a:xfrm>
-            <a:off x="990484" y="4127144"/>
-            <a:ext cx="6670702" cy="2608866"/>
-          </a:xfrm>
-          <a:prstGeom prst="rect">
-            <a:avLst/>
-          </a:prstGeom>
-        </p:spPr>
-      </p:pic>
-    </p:spTree>
-    <p:extLst>
-      <p:ext uri="{BB962C8B-B14F-4D97-AF65-F5344CB8AC3E}">
-        <p14:creationId xmlns:p14="http://schemas.microsoft.com/office/powerpoint/2010/main" val="1661897433"/>
-      </p:ext>
-    </p:extLst>
-  </p:cSld>
-  <p:clrMapOvr>
-    <a:masterClrMapping/>
-  </p:clrMapOvr>
-</p:sld>
-</file>
-
-<file path=ppt/slides/slide11.xml><?xml version="1.0" encoding="utf-8"?>
-<p:sld xmlns:a="http://schemas.openxmlformats.org/drawingml/2006/main" xmlns:r="http://schemas.openxmlformats.org/officeDocument/2006/relationships" xmlns:p="http://schemas.openxmlformats.org/presentationml/2006/main">
-  <p:cSld>
-    <p:spTree>
-      <p:nvGrpSpPr>
-        <p:cNvPr id="1" name="">
-          <a:extLst>
-            <a:ext uri="{FF2B5EF4-FFF2-40B4-BE49-F238E27FC236}">
-              <a16:creationId xmlns:a16="http://schemas.microsoft.com/office/drawing/2014/main" id="{D6C22500-4DA6-42BB-BDDB-EBA94FF59CC9}"/>
-            </a:ext>
-          </a:extLst>
-        </p:cNvPr>
-        <p:cNvGrpSpPr/>
-        <p:nvPr/>
-      </p:nvGrpSpPr>
-      <p:grpSpPr>
-        <a:xfrm>
-          <a:off x="0" y="0"/>
-          <a:ext cx="0" cy="0"/>
-          <a:chOff x="0" y="0"/>
-          <a:chExt cx="0" cy="0"/>
-        </a:xfrm>
-      </p:grpSpPr>
-      <p:sp>
-        <p:nvSpPr>
-          <p:cNvPr id="2" name="Title 1">
-            <a:extLst>
-              <a:ext uri="{FF2B5EF4-FFF2-40B4-BE49-F238E27FC236}">
-                <a16:creationId xmlns:a16="http://schemas.microsoft.com/office/drawing/2014/main" id="{81EB342F-1D06-2842-3EAA-63D2A048B956}"/>
-              </a:ext>
-            </a:extLst>
-          </p:cNvPr>
-          <p:cNvSpPr>
-            <a:spLocks noGrp="1"/>
-          </p:cNvSpPr>
-          <p:nvPr>
-            <p:ph type="title"/>
-          </p:nvPr>
-        </p:nvSpPr>
-        <p:spPr/>
-        <p:txBody>
-          <a:bodyPr/>
-          <a:lstStyle/>
-          <a:p>
-            <a:r>
-              <a:rPr lang="en-US" dirty="0"/>
-              <a:t>Hybrid QML- 3 class classification – Basic entangler 8 qubits, 4 rep</a:t>
-            </a:r>
-            <a:endParaRPr lang="en-IN" dirty="0"/>
-          </a:p>
-        </p:txBody>
-      </p:sp>
-      <p:sp>
-        <p:nvSpPr>
-          <p:cNvPr id="7" name="TextBox 6">
-            <a:extLst>
-              <a:ext uri="{FF2B5EF4-FFF2-40B4-BE49-F238E27FC236}">
-                <a16:creationId xmlns:a16="http://schemas.microsoft.com/office/drawing/2014/main" id="{DB6C25B7-E038-1916-45FF-50FA8F4DDE32}"/>
-              </a:ext>
-            </a:extLst>
-          </p:cNvPr>
-          <p:cNvSpPr txBox="1"/>
-          <p:nvPr/>
-        </p:nvSpPr>
-        <p:spPr>
-          <a:xfrm>
-            <a:off x="7661186" y="2189953"/>
-            <a:ext cx="2775833" cy="923330"/>
-          </a:xfrm>
-          <a:prstGeom prst="rect">
-            <a:avLst/>
-          </a:prstGeom>
-          <a:noFill/>
-        </p:spPr>
-        <p:txBody>
-          <a:bodyPr wrap="square" rtlCol="0">
-            <a:spAutoFit/>
-          </a:bodyPr>
-          <a:lstStyle/>
-          <a:p>
-            <a:r>
-              <a:rPr lang="en-IN" dirty="0"/>
-              <a:t>Best epoch: 12 </a:t>
-            </a:r>
-          </a:p>
-          <a:p>
-            <a:r>
-              <a:rPr lang="en-IN" dirty="0"/>
-              <a:t>Train </a:t>
-            </a:r>
-            <a:r>
-              <a:rPr lang="en-IN" dirty="0" err="1"/>
-              <a:t>acc</a:t>
-            </a:r>
-            <a:r>
-              <a:rPr lang="en-IN" dirty="0"/>
-              <a:t>: 0.8236  </a:t>
-            </a:r>
-          </a:p>
-          <a:p>
-            <a:r>
-              <a:rPr lang="en-IN" dirty="0"/>
-              <a:t>Val </a:t>
-            </a:r>
-            <a:r>
-              <a:rPr lang="en-IN" dirty="0" err="1"/>
-              <a:t>acc</a:t>
-            </a:r>
-            <a:r>
-              <a:rPr lang="en-IN" dirty="0"/>
-              <a:t>: 0.7933</a:t>
-            </a:r>
-          </a:p>
-        </p:txBody>
-      </p:sp>
-      <p:sp>
-        <p:nvSpPr>
-          <p:cNvPr id="10" name="TextBox 9">
-            <a:extLst>
-              <a:ext uri="{FF2B5EF4-FFF2-40B4-BE49-F238E27FC236}">
-                <a16:creationId xmlns:a16="http://schemas.microsoft.com/office/drawing/2014/main" id="{5B07F22B-98BF-BC0A-005D-2296B70DBC34}"/>
-              </a:ext>
-            </a:extLst>
-          </p:cNvPr>
-          <p:cNvSpPr txBox="1"/>
-          <p:nvPr/>
-        </p:nvSpPr>
-        <p:spPr>
-          <a:xfrm>
-            <a:off x="838200" y="3752091"/>
-            <a:ext cx="3303917" cy="375053"/>
-          </a:xfrm>
-          <a:prstGeom prst="rect">
-            <a:avLst/>
-          </a:prstGeom>
-          <a:noFill/>
-        </p:spPr>
-        <p:txBody>
-          <a:bodyPr wrap="square" rtlCol="0">
-            <a:spAutoFit/>
-          </a:bodyPr>
-          <a:lstStyle/>
-          <a:p>
-            <a:r>
-              <a:rPr lang="en-US" dirty="0"/>
-              <a:t>Test set results</a:t>
-            </a:r>
-            <a:endParaRPr lang="en-IN" dirty="0"/>
-          </a:p>
-        </p:txBody>
-      </p:sp>
-      <p:sp>
-        <p:nvSpPr>
-          <p:cNvPr id="11" name="TextBox 10">
-            <a:extLst>
-              <a:ext uri="{FF2B5EF4-FFF2-40B4-BE49-F238E27FC236}">
-                <a16:creationId xmlns:a16="http://schemas.microsoft.com/office/drawing/2014/main" id="{DA643401-E27D-6C41-83F9-A5C71631E529}"/>
-              </a:ext>
-            </a:extLst>
-          </p:cNvPr>
-          <p:cNvSpPr txBox="1"/>
-          <p:nvPr/>
-        </p:nvSpPr>
-        <p:spPr>
-          <a:xfrm>
-            <a:off x="7661186" y="4573483"/>
-            <a:ext cx="2191110" cy="646331"/>
-          </a:xfrm>
-          <a:prstGeom prst="rect">
-            <a:avLst/>
-          </a:prstGeom>
-          <a:noFill/>
-        </p:spPr>
-        <p:txBody>
-          <a:bodyPr wrap="square" rtlCol="0">
-            <a:spAutoFit/>
-          </a:bodyPr>
-          <a:lstStyle/>
-          <a:p>
-            <a:r>
-              <a:rPr lang="en-US" dirty="0"/>
-              <a:t>Test samples: 387 Test accuracy: 0.7778</a:t>
-            </a:r>
-            <a:endParaRPr lang="en-IN" dirty="0"/>
-          </a:p>
-        </p:txBody>
-      </p:sp>
-      <p:pic>
-        <p:nvPicPr>
-          <p:cNvPr id="4" name="Picture 3">
-            <a:extLst>
-              <a:ext uri="{FF2B5EF4-FFF2-40B4-BE49-F238E27FC236}">
-                <a16:creationId xmlns:a16="http://schemas.microsoft.com/office/drawing/2014/main" id="{D753F2EE-A19D-769D-4612-B25AF4BD91BD}"/>
-              </a:ext>
-            </a:extLst>
-          </p:cNvPr>
-          <p:cNvPicPr>
-            <a:picLocks noChangeAspect="1"/>
-          </p:cNvPicPr>
-          <p:nvPr/>
-        </p:nvPicPr>
-        <p:blipFill>
-          <a:blip r:embed="rId2"/>
-          <a:stretch>
-            <a:fillRect/>
-          </a:stretch>
-        </p:blipFill>
-        <p:spPr>
-          <a:xfrm>
-            <a:off x="865442" y="1620226"/>
-            <a:ext cx="6553349" cy="2062784"/>
-          </a:xfrm>
-          <a:prstGeom prst="rect">
-            <a:avLst/>
-          </a:prstGeom>
-        </p:spPr>
-      </p:pic>
-      <p:pic>
-        <p:nvPicPr>
-          <p:cNvPr id="8" name="Picture 7">
-            <a:extLst>
-              <a:ext uri="{FF2B5EF4-FFF2-40B4-BE49-F238E27FC236}">
-                <a16:creationId xmlns:a16="http://schemas.microsoft.com/office/drawing/2014/main" id="{7EBF697F-7E34-A8DF-7245-A42E5DE23172}"/>
-              </a:ext>
-            </a:extLst>
-          </p:cNvPr>
-          <p:cNvPicPr>
-            <a:picLocks noChangeAspect="1"/>
-          </p:cNvPicPr>
-          <p:nvPr/>
-        </p:nvPicPr>
-        <p:blipFill>
-          <a:blip r:embed="rId3"/>
-          <a:stretch>
-            <a:fillRect/>
-          </a:stretch>
-        </p:blipFill>
-        <p:spPr>
-          <a:xfrm>
-            <a:off x="838200" y="4148537"/>
-            <a:ext cx="6092058" cy="2352965"/>
-          </a:xfrm>
-          <a:prstGeom prst="rect">
-            <a:avLst/>
-          </a:prstGeom>
-        </p:spPr>
-      </p:pic>
-    </p:spTree>
-    <p:extLst>
-      <p:ext uri="{BB962C8B-B14F-4D97-AF65-F5344CB8AC3E}">
-        <p14:creationId xmlns:p14="http://schemas.microsoft.com/office/powerpoint/2010/main" val="1623677410"/>
-      </p:ext>
-    </p:extLst>
-  </p:cSld>
-  <p:clrMapOvr>
-    <a:masterClrMapping/>
-  </p:clrMapOvr>
-</p:sld>
-</file>
-
-<file path=ppt/slides/slide12.xml><?xml version="1.0" encoding="utf-8"?>
-<p:sld xmlns:a="http://schemas.openxmlformats.org/drawingml/2006/main" xmlns:r="http://schemas.openxmlformats.org/officeDocument/2006/relationships" xmlns:p="http://schemas.openxmlformats.org/presentationml/2006/main">
-  <p:cSld>
-    <p:spTree>
-      <p:nvGrpSpPr>
-        <p:cNvPr id="1" name="">
-          <a:extLst>
-            <a:ext uri="{FF2B5EF4-FFF2-40B4-BE49-F238E27FC236}">
-              <a16:creationId xmlns:a16="http://schemas.microsoft.com/office/drawing/2014/main" id="{A4D0291C-3C23-0216-35A3-0FA4175451DA}"/>
-            </a:ext>
-          </a:extLst>
-        </p:cNvPr>
-        <p:cNvGrpSpPr/>
-        <p:nvPr/>
-      </p:nvGrpSpPr>
-      <p:grpSpPr>
-        <a:xfrm>
-          <a:off x="0" y="0"/>
-          <a:ext cx="0" cy="0"/>
-          <a:chOff x="0" y="0"/>
-          <a:chExt cx="0" cy="0"/>
-        </a:xfrm>
-      </p:grpSpPr>
-      <p:sp>
-        <p:nvSpPr>
-          <p:cNvPr id="2" name="Title 1">
-            <a:extLst>
-              <a:ext uri="{FF2B5EF4-FFF2-40B4-BE49-F238E27FC236}">
-                <a16:creationId xmlns:a16="http://schemas.microsoft.com/office/drawing/2014/main" id="{463E7538-A1A2-851E-2A17-FE216BD7B25B}"/>
-              </a:ext>
-            </a:extLst>
-          </p:cNvPr>
-          <p:cNvSpPr>
-            <a:spLocks noGrp="1"/>
-          </p:cNvSpPr>
-          <p:nvPr>
-            <p:ph type="title"/>
-          </p:nvPr>
-        </p:nvSpPr>
-        <p:spPr/>
-        <p:txBody>
-          <a:bodyPr/>
-          <a:lstStyle/>
-          <a:p>
-            <a:r>
-              <a:rPr lang="en-US" dirty="0"/>
-              <a:t>Hybrid QML- 3 class classification – Basic entangler 16 qubits, 1 rep</a:t>
-            </a:r>
-            <a:endParaRPr lang="en-IN" dirty="0"/>
-          </a:p>
-        </p:txBody>
-      </p:sp>
-      <p:sp>
-        <p:nvSpPr>
-          <p:cNvPr id="7" name="TextBox 6">
-            <a:extLst>
-              <a:ext uri="{FF2B5EF4-FFF2-40B4-BE49-F238E27FC236}">
-                <a16:creationId xmlns:a16="http://schemas.microsoft.com/office/drawing/2014/main" id="{0024F242-A09C-A861-C03E-43C6F1715AB6}"/>
-              </a:ext>
-            </a:extLst>
-          </p:cNvPr>
-          <p:cNvSpPr txBox="1"/>
-          <p:nvPr/>
-        </p:nvSpPr>
-        <p:spPr>
-          <a:xfrm>
-            <a:off x="7773188" y="2189953"/>
-            <a:ext cx="2775833" cy="923330"/>
-          </a:xfrm>
-          <a:prstGeom prst="rect">
-            <a:avLst/>
-          </a:prstGeom>
-          <a:noFill/>
-        </p:spPr>
-        <p:txBody>
-          <a:bodyPr wrap="square" rtlCol="0">
-            <a:spAutoFit/>
-          </a:bodyPr>
-          <a:lstStyle/>
-          <a:p>
-            <a:r>
-              <a:rPr lang="en-IN" dirty="0"/>
-              <a:t>Best epoch: 25 </a:t>
-            </a:r>
-          </a:p>
-          <a:p>
-            <a:r>
-              <a:rPr lang="en-IN" dirty="0"/>
-              <a:t>Train </a:t>
-            </a:r>
-            <a:r>
-              <a:rPr lang="en-IN" dirty="0" err="1"/>
-              <a:t>acc</a:t>
-            </a:r>
-            <a:r>
-              <a:rPr lang="en-IN" dirty="0"/>
-              <a:t>: 0.8486 </a:t>
-            </a:r>
-          </a:p>
-          <a:p>
-            <a:r>
-              <a:rPr lang="en-IN" dirty="0"/>
-              <a:t>Val </a:t>
-            </a:r>
-            <a:r>
-              <a:rPr lang="en-IN" dirty="0" err="1"/>
-              <a:t>acc</a:t>
-            </a:r>
-            <a:r>
-              <a:rPr lang="en-IN" dirty="0"/>
-              <a:t>: 0.7726</a:t>
-            </a:r>
-          </a:p>
-        </p:txBody>
-      </p:sp>
-      <p:sp>
-        <p:nvSpPr>
-          <p:cNvPr id="10" name="TextBox 9">
-            <a:extLst>
-              <a:ext uri="{FF2B5EF4-FFF2-40B4-BE49-F238E27FC236}">
-                <a16:creationId xmlns:a16="http://schemas.microsoft.com/office/drawing/2014/main" id="{27DAEBAD-C765-90B2-8101-C5D12D965F59}"/>
-              </a:ext>
-            </a:extLst>
-          </p:cNvPr>
-          <p:cNvSpPr txBox="1"/>
-          <p:nvPr/>
-        </p:nvSpPr>
-        <p:spPr>
-          <a:xfrm>
-            <a:off x="838200" y="3752091"/>
-            <a:ext cx="3303917" cy="375053"/>
-          </a:xfrm>
-          <a:prstGeom prst="rect">
-            <a:avLst/>
-          </a:prstGeom>
-          <a:noFill/>
-        </p:spPr>
-        <p:txBody>
-          <a:bodyPr wrap="square" rtlCol="0">
-            <a:spAutoFit/>
-          </a:bodyPr>
-          <a:lstStyle/>
-          <a:p>
-            <a:r>
-              <a:rPr lang="en-US" dirty="0"/>
-              <a:t>Test set results</a:t>
-            </a:r>
-            <a:endParaRPr lang="en-IN" dirty="0"/>
-          </a:p>
-        </p:txBody>
-      </p:sp>
-      <p:sp>
-        <p:nvSpPr>
-          <p:cNvPr id="11" name="TextBox 10">
-            <a:extLst>
-              <a:ext uri="{FF2B5EF4-FFF2-40B4-BE49-F238E27FC236}">
-                <a16:creationId xmlns:a16="http://schemas.microsoft.com/office/drawing/2014/main" id="{1AB6216A-9535-DDA0-F2F9-7B224212A0B4}"/>
-              </a:ext>
-            </a:extLst>
-          </p:cNvPr>
-          <p:cNvSpPr txBox="1"/>
-          <p:nvPr/>
-        </p:nvSpPr>
-        <p:spPr>
-          <a:xfrm>
-            <a:off x="7661186" y="4573483"/>
-            <a:ext cx="2191110" cy="646331"/>
-          </a:xfrm>
-          <a:prstGeom prst="rect">
-            <a:avLst/>
-          </a:prstGeom>
-          <a:noFill/>
-        </p:spPr>
-        <p:txBody>
-          <a:bodyPr wrap="square" rtlCol="0">
-            <a:spAutoFit/>
-          </a:bodyPr>
-          <a:lstStyle/>
-          <a:p>
-            <a:r>
-              <a:rPr lang="en-US" dirty="0"/>
-              <a:t>Test samples: 387 Test accuracy: 0.7700</a:t>
-            </a:r>
-            <a:endParaRPr lang="en-IN" dirty="0"/>
-          </a:p>
-        </p:txBody>
-      </p:sp>
-      <p:pic>
-        <p:nvPicPr>
-          <p:cNvPr id="5" name="Picture 4">
-            <a:extLst>
-              <a:ext uri="{FF2B5EF4-FFF2-40B4-BE49-F238E27FC236}">
-                <a16:creationId xmlns:a16="http://schemas.microsoft.com/office/drawing/2014/main" id="{64ACE42B-F808-33EE-1532-CDF584C61EE6}"/>
-              </a:ext>
-            </a:extLst>
-          </p:cNvPr>
-          <p:cNvPicPr>
-            <a:picLocks noChangeAspect="1"/>
-          </p:cNvPicPr>
-          <p:nvPr/>
-        </p:nvPicPr>
-        <p:blipFill>
-          <a:blip r:embed="rId2"/>
-          <a:stretch>
-            <a:fillRect/>
-          </a:stretch>
-        </p:blipFill>
-        <p:spPr>
-          <a:xfrm>
-            <a:off x="838200" y="1535710"/>
-            <a:ext cx="6934988" cy="2231816"/>
-          </a:xfrm>
-          <a:prstGeom prst="rect">
-            <a:avLst/>
-          </a:prstGeom>
-        </p:spPr>
-      </p:pic>
-      <p:pic>
-        <p:nvPicPr>
-          <p:cNvPr id="9" name="Picture 8">
-            <a:extLst>
-              <a:ext uri="{FF2B5EF4-FFF2-40B4-BE49-F238E27FC236}">
-                <a16:creationId xmlns:a16="http://schemas.microsoft.com/office/drawing/2014/main" id="{E1AE4B65-5275-ACB1-B97F-A2DB71E2A678}"/>
-              </a:ext>
-            </a:extLst>
-          </p:cNvPr>
-          <p:cNvPicPr>
-            <a:picLocks noChangeAspect="1"/>
-          </p:cNvPicPr>
-          <p:nvPr/>
-        </p:nvPicPr>
-        <p:blipFill>
-          <a:blip r:embed="rId3"/>
-          <a:stretch>
-            <a:fillRect/>
-          </a:stretch>
-        </p:blipFill>
-        <p:spPr>
-          <a:xfrm>
-            <a:off x="838200" y="4261377"/>
-            <a:ext cx="5422929" cy="2121825"/>
-          </a:xfrm>
-          <a:prstGeom prst="rect">
-            <a:avLst/>
-          </a:prstGeom>
-        </p:spPr>
-      </p:pic>
-    </p:spTree>
-    <p:extLst>
-      <p:ext uri="{BB962C8B-B14F-4D97-AF65-F5344CB8AC3E}">
-        <p14:creationId xmlns:p14="http://schemas.microsoft.com/office/powerpoint/2010/main" val="1398610178"/>
-      </p:ext>
-    </p:extLst>
-  </p:cSld>
-  <p:clrMapOvr>
-    <a:masterClrMapping/>
-  </p:clrMapOvr>
-</p:sld>
-</file>
-
-<file path=ppt/slides/slide13.xml><?xml version="1.0" encoding="utf-8"?>
-<p:sld xmlns:a="http://schemas.openxmlformats.org/drawingml/2006/main" xmlns:r="http://schemas.openxmlformats.org/officeDocument/2006/relationships" xmlns:p="http://schemas.openxmlformats.org/presentationml/2006/main">
-  <p:cSld>
-    <p:spTree>
-      <p:nvGrpSpPr>
-        <p:cNvPr id="1" name="">
-          <a:extLst>
-            <a:ext uri="{FF2B5EF4-FFF2-40B4-BE49-F238E27FC236}">
-              <a16:creationId xmlns:a16="http://schemas.microsoft.com/office/drawing/2014/main" id="{948DDCFB-B20F-2DB6-C0DC-7CC5AA1F5EAF}"/>
-            </a:ext>
-          </a:extLst>
-        </p:cNvPr>
-        <p:cNvGrpSpPr/>
-        <p:nvPr/>
-      </p:nvGrpSpPr>
-      <p:grpSpPr>
-        <a:xfrm>
-          <a:off x="0" y="0"/>
-          <a:ext cx="0" cy="0"/>
-          <a:chOff x="0" y="0"/>
-          <a:chExt cx="0" cy="0"/>
-        </a:xfrm>
-      </p:grpSpPr>
-      <p:sp>
-        <p:nvSpPr>
-          <p:cNvPr id="2" name="Title 1">
-            <a:extLst>
-              <a:ext uri="{FF2B5EF4-FFF2-40B4-BE49-F238E27FC236}">
-                <a16:creationId xmlns:a16="http://schemas.microsoft.com/office/drawing/2014/main" id="{E8AD137C-BB5E-42E1-09B3-226DDDE1B557}"/>
-              </a:ext>
-            </a:extLst>
-          </p:cNvPr>
-          <p:cNvSpPr>
-            <a:spLocks noGrp="1"/>
-          </p:cNvSpPr>
-          <p:nvPr>
-            <p:ph type="title"/>
-          </p:nvPr>
-        </p:nvSpPr>
-        <p:spPr/>
-        <p:txBody>
-          <a:bodyPr/>
-          <a:lstStyle/>
-          <a:p>
-            <a:r>
-              <a:rPr lang="en-US" dirty="0"/>
-              <a:t>Hybrid QML- 3 class classification – Strong entangler 4 qubits, 2 rep</a:t>
-            </a:r>
-            <a:endParaRPr lang="en-IN" dirty="0"/>
-          </a:p>
-        </p:txBody>
-      </p:sp>
-      <p:sp>
-        <p:nvSpPr>
-          <p:cNvPr id="7" name="TextBox 6">
-            <a:extLst>
-              <a:ext uri="{FF2B5EF4-FFF2-40B4-BE49-F238E27FC236}">
-                <a16:creationId xmlns:a16="http://schemas.microsoft.com/office/drawing/2014/main" id="{A1820359-51FA-0855-8B19-9437A866E943}"/>
-              </a:ext>
-            </a:extLst>
-          </p:cNvPr>
-          <p:cNvSpPr txBox="1"/>
-          <p:nvPr/>
-        </p:nvSpPr>
-        <p:spPr>
-          <a:xfrm>
-            <a:off x="7980356" y="2060683"/>
-            <a:ext cx="2775833" cy="923330"/>
-          </a:xfrm>
-          <a:prstGeom prst="rect">
-            <a:avLst/>
-          </a:prstGeom>
-          <a:noFill/>
-        </p:spPr>
-        <p:txBody>
-          <a:bodyPr wrap="square" rtlCol="0">
-            <a:spAutoFit/>
-          </a:bodyPr>
-          <a:lstStyle/>
-          <a:p>
-            <a:r>
-              <a:rPr lang="en-IN" dirty="0"/>
-              <a:t>Best epoch: 28 </a:t>
-            </a:r>
-          </a:p>
-          <a:p>
-            <a:r>
-              <a:rPr lang="en-IN" dirty="0"/>
-              <a:t>Train </a:t>
-            </a:r>
-            <a:r>
-              <a:rPr lang="en-IN" dirty="0" err="1"/>
-              <a:t>acc</a:t>
-            </a:r>
-            <a:r>
-              <a:rPr lang="en-IN" dirty="0"/>
-              <a:t>: 0.8688 </a:t>
-            </a:r>
-          </a:p>
-          <a:p>
-            <a:r>
-              <a:rPr lang="en-IN" dirty="0"/>
-              <a:t>Val </a:t>
-            </a:r>
-            <a:r>
-              <a:rPr lang="en-IN" dirty="0" err="1"/>
-              <a:t>acc</a:t>
-            </a:r>
-            <a:r>
-              <a:rPr lang="en-IN" dirty="0"/>
-              <a:t>: 0.7726</a:t>
-            </a:r>
-          </a:p>
-        </p:txBody>
-      </p:sp>
-      <p:sp>
-        <p:nvSpPr>
-          <p:cNvPr id="10" name="TextBox 9">
-            <a:extLst>
-              <a:ext uri="{FF2B5EF4-FFF2-40B4-BE49-F238E27FC236}">
-                <a16:creationId xmlns:a16="http://schemas.microsoft.com/office/drawing/2014/main" id="{05D8520C-FDA2-E9FC-0E10-CB2F3CD6A35F}"/>
-              </a:ext>
-            </a:extLst>
-          </p:cNvPr>
-          <p:cNvSpPr txBox="1"/>
-          <p:nvPr/>
-        </p:nvSpPr>
-        <p:spPr>
-          <a:xfrm>
-            <a:off x="838200" y="3752091"/>
-            <a:ext cx="3303917" cy="375053"/>
-          </a:xfrm>
-          <a:prstGeom prst="rect">
-            <a:avLst/>
-          </a:prstGeom>
-          <a:noFill/>
-        </p:spPr>
-        <p:txBody>
-          <a:bodyPr wrap="square" rtlCol="0">
-            <a:spAutoFit/>
-          </a:bodyPr>
-          <a:lstStyle/>
-          <a:p>
-            <a:r>
-              <a:rPr lang="en-US" dirty="0"/>
-              <a:t>Test set results</a:t>
-            </a:r>
-            <a:endParaRPr lang="en-IN" dirty="0"/>
-          </a:p>
-        </p:txBody>
-      </p:sp>
-      <p:sp>
-        <p:nvSpPr>
-          <p:cNvPr id="11" name="TextBox 10">
-            <a:extLst>
-              <a:ext uri="{FF2B5EF4-FFF2-40B4-BE49-F238E27FC236}">
-                <a16:creationId xmlns:a16="http://schemas.microsoft.com/office/drawing/2014/main" id="{6587380A-FD9C-81CB-3FCE-2E43AFB10428}"/>
-              </a:ext>
-            </a:extLst>
-          </p:cNvPr>
-          <p:cNvSpPr txBox="1"/>
-          <p:nvPr/>
-        </p:nvSpPr>
-        <p:spPr>
-          <a:xfrm>
-            <a:off x="7661186" y="4573483"/>
-            <a:ext cx="2191110" cy="646331"/>
-          </a:xfrm>
-          <a:prstGeom prst="rect">
-            <a:avLst/>
-          </a:prstGeom>
-          <a:noFill/>
-        </p:spPr>
-        <p:txBody>
-          <a:bodyPr wrap="square" rtlCol="0">
-            <a:spAutoFit/>
-          </a:bodyPr>
-          <a:lstStyle/>
-          <a:p>
-            <a:r>
-              <a:rPr lang="en-US" dirty="0"/>
-              <a:t>Test samples: 387 Test accuracy: 0.7700</a:t>
-            </a:r>
-            <a:endParaRPr lang="en-IN" dirty="0"/>
-          </a:p>
-        </p:txBody>
-      </p:sp>
-      <p:pic>
-        <p:nvPicPr>
-          <p:cNvPr id="4" name="Picture 3">
-            <a:extLst>
-              <a:ext uri="{FF2B5EF4-FFF2-40B4-BE49-F238E27FC236}">
-                <a16:creationId xmlns:a16="http://schemas.microsoft.com/office/drawing/2014/main" id="{F94DF538-36A2-6AF9-BF95-57CC458D0552}"/>
-              </a:ext>
-            </a:extLst>
-          </p:cNvPr>
-          <p:cNvPicPr>
-            <a:picLocks noChangeAspect="1"/>
-          </p:cNvPicPr>
-          <p:nvPr/>
-        </p:nvPicPr>
-        <p:blipFill>
-          <a:blip r:embed="rId2"/>
-          <a:stretch>
-            <a:fillRect/>
-          </a:stretch>
-        </p:blipFill>
-        <p:spPr>
-          <a:xfrm>
-            <a:off x="985837" y="1569106"/>
-            <a:ext cx="6675349" cy="2172717"/>
-          </a:xfrm>
-          <a:prstGeom prst="rect">
-            <a:avLst/>
-          </a:prstGeom>
-        </p:spPr>
-      </p:pic>
-      <p:pic>
-        <p:nvPicPr>
-          <p:cNvPr id="8" name="Picture 7">
-            <a:extLst>
-              <a:ext uri="{FF2B5EF4-FFF2-40B4-BE49-F238E27FC236}">
-                <a16:creationId xmlns:a16="http://schemas.microsoft.com/office/drawing/2014/main" id="{0D118DFA-CD70-7BA4-92CB-4EB36FB0A967}"/>
-              </a:ext>
-            </a:extLst>
-          </p:cNvPr>
-          <p:cNvPicPr>
-            <a:picLocks noChangeAspect="1"/>
-          </p:cNvPicPr>
-          <p:nvPr/>
-        </p:nvPicPr>
-        <p:blipFill>
-          <a:blip r:embed="rId3"/>
-          <a:stretch>
-            <a:fillRect/>
-          </a:stretch>
-        </p:blipFill>
-        <p:spPr>
-          <a:xfrm>
-            <a:off x="895350" y="4239898"/>
-            <a:ext cx="5839640" cy="2252977"/>
-          </a:xfrm>
-          <a:prstGeom prst="rect">
-            <a:avLst/>
-          </a:prstGeom>
-        </p:spPr>
-      </p:pic>
-    </p:spTree>
-    <p:extLst>
-      <p:ext uri="{BB962C8B-B14F-4D97-AF65-F5344CB8AC3E}">
-        <p14:creationId xmlns:p14="http://schemas.microsoft.com/office/powerpoint/2010/main" val="4138906995"/>
-      </p:ext>
-    </p:extLst>
-  </p:cSld>
-  <p:clrMapOvr>
-    <a:masterClrMapping/>
-  </p:clrMapOvr>
-</p:sld>
-</file>
-
-<file path=ppt/slides/slide14.xml><?xml version="1.0" encoding="utf-8"?>
-<p:sld xmlns:a="http://schemas.openxmlformats.org/drawingml/2006/main" xmlns:r="http://schemas.openxmlformats.org/officeDocument/2006/relationships" xmlns:p="http://schemas.openxmlformats.org/presentationml/2006/main">
-  <p:cSld>
-    <p:spTree>
-      <p:nvGrpSpPr>
         <p:cNvPr id="1" name=""/>
         <p:cNvGrpSpPr/>
         <p:nvPr/>
@@ -4487,7 +3845,7 @@
           <p:cNvPr id="2" name="Title 1">
             <a:extLst>
               <a:ext uri="{FF2B5EF4-FFF2-40B4-BE49-F238E27FC236}">
-                <a16:creationId xmlns:a16="http://schemas.microsoft.com/office/drawing/2014/main" id="{3B3E3282-A289-5CC2-334A-5E91635C52E4}"/>
+                <a16:creationId xmlns:a16="http://schemas.microsoft.com/office/drawing/2014/main" id="{53253E03-F307-9FB3-EFDB-3C51FCD8F96F}"/>
               </a:ext>
             </a:extLst>
           </p:cNvPr>
@@ -4505,18 +3863,29 @@
           <a:p>
             <a:r>
               <a:rPr lang="en-US" dirty="0"/>
-              <a:t>Benchmark – State vector simulator</a:t>
-            </a:r>
+              <a:t>Benchmark – </a:t>
+            </a:r>
+            <a:r>
+              <a:rPr lang="en-IN" dirty="0" err="1"/>
+              <a:t>IonQ</a:t>
+            </a:r>
+            <a:r>
+              <a:rPr lang="en-IN" dirty="0"/>
+              <a:t> forte Enterprise 1 36q</a:t>
+            </a:r>
+            <a:br>
+              <a:rPr lang="en-IN" dirty="0"/>
+            </a:br>
             <a:endParaRPr lang="en-IN" dirty="0"/>
           </a:p>
         </p:txBody>
       </p:sp>
       <p:pic>
         <p:nvPicPr>
-          <p:cNvPr id="5" name="Content Placeholder 4">
-            <a:extLst>
-              <a:ext uri="{FF2B5EF4-FFF2-40B4-BE49-F238E27FC236}">
-                <a16:creationId xmlns:a16="http://schemas.microsoft.com/office/drawing/2014/main" id="{83DCC424-1139-9FDA-4FB3-0D3363D47CEC}"/>
+          <p:cNvPr id="6" name="Content Placeholder 5">
+            <a:extLst>
+              <a:ext uri="{FF2B5EF4-FFF2-40B4-BE49-F238E27FC236}">
+                <a16:creationId xmlns:a16="http://schemas.microsoft.com/office/drawing/2014/main" id="{44561288-96E9-1426-8BC6-F6317AFD1468}"/>
               </a:ext>
             </a:extLst>
           </p:cNvPr>
@@ -4535,18 +3904,47 @@
         </p:blipFill>
         <p:spPr>
           <a:xfrm>
-            <a:off x="1135904" y="1847056"/>
-            <a:ext cx="8791479" cy="4351338"/>
+            <a:off x="1693069" y="1825625"/>
+            <a:ext cx="8182121" cy="4710424"/>
           </a:xfrm>
           <a:prstGeom prst="rect">
             <a:avLst/>
           </a:prstGeom>
         </p:spPr>
       </p:pic>
+      <p:sp>
+        <p:nvSpPr>
+          <p:cNvPr id="4" name="Slide Number Placeholder 3">
+            <a:extLst>
+              <a:ext uri="{FF2B5EF4-FFF2-40B4-BE49-F238E27FC236}">
+                <a16:creationId xmlns:a16="http://schemas.microsoft.com/office/drawing/2014/main" id="{EC3AA2CC-6B9C-3131-B9A7-9DB435551774}"/>
+              </a:ext>
+            </a:extLst>
+          </p:cNvPr>
+          <p:cNvSpPr>
+            <a:spLocks noGrp="1"/>
+          </p:cNvSpPr>
+          <p:nvPr>
+            <p:ph type="sldNum" sz="quarter" idx="12"/>
+          </p:nvPr>
+        </p:nvSpPr>
+        <p:spPr/>
+        <p:txBody>
+          <a:bodyPr/>
+          <a:lstStyle/>
+          <a:p>
+            <a:fld id="{FAF4F8EC-53F2-4EB2-97C1-60EB836CC882}" type="slidenum">
+              <a:rPr lang="en-IN" smtClean="0"/>
+              <a:t>10</a:t>
+            </a:fld>
+            <a:endParaRPr lang="en-IN"/>
+          </a:p>
+        </p:txBody>
+      </p:sp>
     </p:spTree>
     <p:extLst>
       <p:ext uri="{BB962C8B-B14F-4D97-AF65-F5344CB8AC3E}">
-        <p14:creationId xmlns:p14="http://schemas.microsoft.com/office/powerpoint/2010/main" val="2503977742"/>
+        <p14:creationId xmlns:p14="http://schemas.microsoft.com/office/powerpoint/2010/main" val="2008749821"/>
       </p:ext>
     </p:extLst>
   </p:cSld>
@@ -4556,96 +3954,7 @@
 </p:sld>
 </file>
 
-<file path=ppt/slides/slide15.xml><?xml version="1.0" encoding="utf-8"?>
-<p:sld xmlns:a="http://schemas.openxmlformats.org/drawingml/2006/main" xmlns:r="http://schemas.openxmlformats.org/officeDocument/2006/relationships" xmlns:p="http://schemas.openxmlformats.org/presentationml/2006/main">
-  <p:cSld>
-    <p:spTree>
-      <p:nvGrpSpPr>
-        <p:cNvPr id="1" name=""/>
-        <p:cNvGrpSpPr/>
-        <p:nvPr/>
-      </p:nvGrpSpPr>
-      <p:grpSpPr>
-        <a:xfrm>
-          <a:off x="0" y="0"/>
-          <a:ext cx="0" cy="0"/>
-          <a:chOff x="0" y="0"/>
-          <a:chExt cx="0" cy="0"/>
-        </a:xfrm>
-      </p:grpSpPr>
-      <p:sp>
-        <p:nvSpPr>
-          <p:cNvPr id="2" name="Title 1">
-            <a:extLst>
-              <a:ext uri="{FF2B5EF4-FFF2-40B4-BE49-F238E27FC236}">
-                <a16:creationId xmlns:a16="http://schemas.microsoft.com/office/drawing/2014/main" id="{2F6ED2F8-19F1-50F5-B2C8-90154A4B2396}"/>
-              </a:ext>
-            </a:extLst>
-          </p:cNvPr>
-          <p:cNvSpPr>
-            <a:spLocks noGrp="1"/>
-          </p:cNvSpPr>
-          <p:nvPr>
-            <p:ph type="title"/>
-          </p:nvPr>
-        </p:nvSpPr>
-        <p:spPr/>
-        <p:txBody>
-          <a:bodyPr/>
-          <a:lstStyle/>
-          <a:p>
-            <a:r>
-              <a:rPr lang="en-US" dirty="0"/>
-              <a:t>Benchmark – Sampling based simulator</a:t>
-            </a:r>
-            <a:endParaRPr lang="en-IN" dirty="0"/>
-          </a:p>
-        </p:txBody>
-      </p:sp>
-      <p:pic>
-        <p:nvPicPr>
-          <p:cNvPr id="5" name="Picture 4">
-            <a:extLst>
-              <a:ext uri="{FF2B5EF4-FFF2-40B4-BE49-F238E27FC236}">
-                <a16:creationId xmlns:a16="http://schemas.microsoft.com/office/drawing/2014/main" id="{A30FEE24-7E85-72A4-3E15-4B908D37859A}"/>
-              </a:ext>
-            </a:extLst>
-          </p:cNvPr>
-          <p:cNvPicPr>
-            <a:picLocks noChangeAspect="1"/>
-          </p:cNvPicPr>
-          <p:nvPr/>
-        </p:nvPicPr>
-        <p:blipFill>
-          <a:blip r:embed="rId2"/>
-          <a:stretch>
-            <a:fillRect/>
-          </a:stretch>
-        </p:blipFill>
-        <p:spPr>
-          <a:xfrm>
-            <a:off x="838200" y="1818481"/>
-            <a:ext cx="9421540" cy="4582164"/>
-          </a:xfrm>
-          <a:prstGeom prst="rect">
-            <a:avLst/>
-          </a:prstGeom>
-        </p:spPr>
-      </p:pic>
-    </p:spTree>
-    <p:extLst>
-      <p:ext uri="{BB962C8B-B14F-4D97-AF65-F5344CB8AC3E}">
-        <p14:creationId xmlns:p14="http://schemas.microsoft.com/office/powerpoint/2010/main" val="3712610399"/>
-      </p:ext>
-    </p:extLst>
-  </p:cSld>
-  <p:clrMapOvr>
-    <a:masterClrMapping/>
-  </p:clrMapOvr>
-</p:sld>
-</file>
-
-<file path=ppt/slides/slide16.xml><?xml version="1.0" encoding="utf-8"?>
+<file path=ppt/slides/slide11.xml><?xml version="1.0" encoding="utf-8"?>
 <p:sld xmlns:a="http://schemas.openxmlformats.org/drawingml/2006/main" xmlns:r="http://schemas.openxmlformats.org/officeDocument/2006/relationships" xmlns:p="http://schemas.openxmlformats.org/presentationml/2006/main">
   <p:cSld>
     <p:spTree>
@@ -4723,6 +4032,35 @@
           </a:prstGeom>
         </p:spPr>
       </p:pic>
+      <p:sp>
+        <p:nvSpPr>
+          <p:cNvPr id="3" name="Slide Number Placeholder 2">
+            <a:extLst>
+              <a:ext uri="{FF2B5EF4-FFF2-40B4-BE49-F238E27FC236}">
+                <a16:creationId xmlns:a16="http://schemas.microsoft.com/office/drawing/2014/main" id="{F0F565B7-F93A-B573-D86E-B43AC2BEB656}"/>
+              </a:ext>
+            </a:extLst>
+          </p:cNvPr>
+          <p:cNvSpPr>
+            <a:spLocks noGrp="1"/>
+          </p:cNvSpPr>
+          <p:nvPr>
+            <p:ph type="sldNum" sz="quarter" idx="12"/>
+          </p:nvPr>
+        </p:nvSpPr>
+        <p:spPr/>
+        <p:txBody>
+          <a:bodyPr/>
+          <a:lstStyle/>
+          <a:p>
+            <a:fld id="{FAF4F8EC-53F2-4EB2-97C1-60EB836CC882}" type="slidenum">
+              <a:rPr lang="en-IN" smtClean="0"/>
+              <a:t>11</a:t>
+            </a:fld>
+            <a:endParaRPr lang="en-IN"/>
+          </a:p>
+        </p:txBody>
+      </p:sp>
     </p:spTree>
     <p:extLst>
       <p:ext uri="{BB962C8B-B14F-4D97-AF65-F5344CB8AC3E}">
@@ -4736,7 +4074,402 @@
 </p:sld>
 </file>
 
-<file path=ppt/slides/slide2.xml><?xml version="1.0" encoding="utf-8"?>
+<file path=ppt/slides/slide12.xml><?xml version="1.0" encoding="utf-8"?>
+<p:sld xmlns:a="http://schemas.openxmlformats.org/drawingml/2006/main" xmlns:r="http://schemas.openxmlformats.org/officeDocument/2006/relationships" xmlns:p="http://schemas.openxmlformats.org/presentationml/2006/main">
+  <p:cSld>
+    <p:spTree>
+      <p:nvGrpSpPr>
+        <p:cNvPr id="1" name=""/>
+        <p:cNvGrpSpPr/>
+        <p:nvPr/>
+      </p:nvGrpSpPr>
+      <p:grpSpPr>
+        <a:xfrm>
+          <a:off x="0" y="0"/>
+          <a:ext cx="0" cy="0"/>
+          <a:chOff x="0" y="0"/>
+          <a:chExt cx="0" cy="0"/>
+        </a:xfrm>
+      </p:grpSpPr>
+      <p:sp>
+        <p:nvSpPr>
+          <p:cNvPr id="2" name="Title 1">
+            <a:extLst>
+              <a:ext uri="{FF2B5EF4-FFF2-40B4-BE49-F238E27FC236}">
+                <a16:creationId xmlns:a16="http://schemas.microsoft.com/office/drawing/2014/main" id="{6F782E94-5DC9-8FF0-B370-DB92E7E1D38A}"/>
+              </a:ext>
+            </a:extLst>
+          </p:cNvPr>
+          <p:cNvSpPr>
+            <a:spLocks noGrp="1"/>
+          </p:cNvSpPr>
+          <p:nvPr>
+            <p:ph type="title"/>
+          </p:nvPr>
+        </p:nvSpPr>
+        <p:spPr/>
+        <p:txBody>
+          <a:bodyPr/>
+          <a:lstStyle/>
+          <a:p>
+            <a:r>
+              <a:rPr lang="en-US" dirty="0"/>
+              <a:t>References</a:t>
+            </a:r>
+            <a:endParaRPr lang="en-IN" dirty="0"/>
+          </a:p>
+        </p:txBody>
+      </p:sp>
+      <p:sp>
+        <p:nvSpPr>
+          <p:cNvPr id="3" name="Content Placeholder 2">
+            <a:extLst>
+              <a:ext uri="{FF2B5EF4-FFF2-40B4-BE49-F238E27FC236}">
+                <a16:creationId xmlns:a16="http://schemas.microsoft.com/office/drawing/2014/main" id="{3A606ED2-CD06-9AB7-6B7E-CF55024E490E}"/>
+              </a:ext>
+            </a:extLst>
+          </p:cNvPr>
+          <p:cNvSpPr>
+            <a:spLocks noGrp="1"/>
+          </p:cNvSpPr>
+          <p:nvPr>
+            <p:ph idx="1"/>
+          </p:nvPr>
+        </p:nvSpPr>
+        <p:spPr/>
+        <p:txBody>
+          <a:bodyPr>
+            <a:normAutofit/>
+          </a:bodyPr>
+          <a:lstStyle/>
+          <a:p>
+            <a:r>
+              <a:rPr lang="en-IN" sz="1800" dirty="0" err="1"/>
+              <a:t>Dataprofessor</a:t>
+            </a:r>
+            <a:r>
+              <a:rPr lang="en-IN" sz="1800" dirty="0"/>
+              <a:t>. (n.d.). </a:t>
+            </a:r>
+            <a:r>
+              <a:rPr lang="en-IN" sz="1800" dirty="0" err="1"/>
+              <a:t>Dataprofessor</a:t>
+            </a:r>
+            <a:r>
+              <a:rPr lang="en-IN" sz="1800" dirty="0"/>
+              <a:t>/</a:t>
+            </a:r>
+            <a:r>
+              <a:rPr lang="en-IN" sz="1800" dirty="0" err="1"/>
+              <a:t>bioinformatics_freecodecamp</a:t>
+            </a:r>
+            <a:r>
+              <a:rPr lang="en-IN" sz="1800" dirty="0"/>
+              <a:t>. GitHub. https://github.com/dataprofessor/bioinformatics_freecodecamp.git</a:t>
+            </a:r>
+          </a:p>
+          <a:p>
+            <a:r>
+              <a:rPr lang="fi-FI" sz="1800" dirty="0"/>
+              <a:t>Qiskit. (n.d.). https://qiskit.org/</a:t>
+            </a:r>
+          </a:p>
+          <a:p>
+            <a:r>
+              <a:rPr lang="en-US" sz="1800" dirty="0" err="1"/>
+              <a:t>Rdkit</a:t>
+            </a:r>
+            <a:r>
+              <a:rPr lang="en-US" sz="1800" dirty="0"/>
+              <a:t>. (n.d.). </a:t>
+            </a:r>
+            <a:r>
+              <a:rPr lang="en-US" sz="1800" dirty="0" err="1"/>
+              <a:t>Rdkit</a:t>
+            </a:r>
+            <a:r>
+              <a:rPr lang="en-US" sz="1800" dirty="0"/>
+              <a:t>/</a:t>
+            </a:r>
+            <a:r>
+              <a:rPr lang="en-US" sz="1800" dirty="0" err="1"/>
+              <a:t>rdkit</a:t>
+            </a:r>
+            <a:r>
+              <a:rPr lang="en-US" sz="1800" dirty="0"/>
+              <a:t>: The official sources for the </a:t>
+            </a:r>
+            <a:r>
+              <a:rPr lang="en-US" sz="1800" dirty="0" err="1"/>
+              <a:t>RDKit</a:t>
+            </a:r>
+            <a:r>
+              <a:rPr lang="en-US" sz="1800" dirty="0"/>
+              <a:t> Library. GitHub. https://github.com/rdkit/rdkit.git</a:t>
+            </a:r>
+          </a:p>
+          <a:p>
+            <a:r>
+              <a:rPr lang="en-IN" sz="1800" dirty="0"/>
+              <a:t>Pennylane. PennyLane. (n.d.). https://pennylane.ai/</a:t>
+            </a:r>
+          </a:p>
+          <a:p>
+            <a:r>
+              <a:rPr lang="en-IN" sz="1800" dirty="0" err="1">
+                <a:hlinkClick r:id="rId2">
+                  <a:extLst>
+                    <a:ext uri="{A12FA001-AC4F-418D-AE19-62706E023703}">
+                      <ahyp:hlinkClr xmlns:ahyp="http://schemas.microsoft.com/office/drawing/2018/hyperlinkcolor" val="tx"/>
+                    </a:ext>
+                  </a:extLst>
+                </a:hlinkClick>
+              </a:rPr>
+              <a:t>ChEMBL</a:t>
+            </a:r>
+            <a:r>
+              <a:rPr lang="en-IN" sz="1800" dirty="0">
+                <a:hlinkClick r:id="rId2">
+                  <a:extLst>
+                    <a:ext uri="{A12FA001-AC4F-418D-AE19-62706E023703}">
+                      <ahyp:hlinkClr xmlns:ahyp="http://schemas.microsoft.com/office/drawing/2018/hyperlinkcolor" val="tx"/>
+                    </a:ext>
+                  </a:extLst>
+                </a:hlinkClick>
+              </a:rPr>
+              <a:t> - </a:t>
+            </a:r>
+            <a:r>
+              <a:rPr lang="en-IN" sz="1800" dirty="0" err="1">
+                <a:hlinkClick r:id="rId2">
+                  <a:extLst>
+                    <a:ext uri="{A12FA001-AC4F-418D-AE19-62706E023703}">
+                      <ahyp:hlinkClr xmlns:ahyp="http://schemas.microsoft.com/office/drawing/2018/hyperlinkcolor" val="tx"/>
+                    </a:ext>
+                  </a:extLst>
+                </a:hlinkClick>
+              </a:rPr>
+              <a:t>ChEMBL</a:t>
+            </a:r>
+            <a:endParaRPr lang="en-US" sz="1800" dirty="0"/>
+          </a:p>
+          <a:p>
+            <a:r>
+              <a:rPr lang="en-IN" sz="1800" dirty="0"/>
+              <a:t>https://qollab.xyz/</a:t>
+            </a:r>
+          </a:p>
+          <a:p>
+            <a:r>
+              <a:rPr lang="en-US" sz="1800" dirty="0">
+                <a:hlinkClick r:id="rId3">
+                  <a:extLst>
+                    <a:ext uri="{A12FA001-AC4F-418D-AE19-62706E023703}">
+                      <ahyp:hlinkClr xmlns:ahyp="http://schemas.microsoft.com/office/drawing/2018/hyperlinkcolor" val="tx"/>
+                    </a:ext>
+                  </a:extLst>
+                </a:hlinkClick>
+              </a:rPr>
+              <a:t>Working process of </a:t>
+            </a:r>
+            <a:r>
+              <a:rPr lang="en-US" sz="1800" dirty="0" err="1">
+                <a:hlinkClick r:id="rId3">
+                  <a:extLst>
+                    <a:ext uri="{A12FA001-AC4F-418D-AE19-62706E023703}">
+                      <ahyp:hlinkClr xmlns:ahyp="http://schemas.microsoft.com/office/drawing/2018/hyperlinkcolor" val="tx"/>
+                    </a:ext>
+                  </a:extLst>
+                </a:hlinkClick>
+              </a:rPr>
+              <a:t>qml</a:t>
+            </a:r>
+            <a:r>
+              <a:rPr lang="en-US" sz="1800" dirty="0">
+                <a:hlinkClick r:id="rId3">
+                  <a:extLst>
+                    <a:ext uri="{A12FA001-AC4F-418D-AE19-62706E023703}">
+                      <ahyp:hlinkClr xmlns:ahyp="http://schemas.microsoft.com/office/drawing/2018/hyperlinkcolor" val="tx"/>
+                    </a:ext>
+                  </a:extLst>
+                </a:hlinkClick>
+              </a:rPr>
+              <a:t> models. | Download Scientific Diagram</a:t>
+            </a:r>
+            <a:endParaRPr lang="en-US" sz="1800" dirty="0"/>
+          </a:p>
+          <a:p>
+            <a:r>
+              <a:rPr lang="en-US" sz="1800" dirty="0">
+                <a:hlinkClick r:id="rId4">
+                  <a:extLst>
+                    <a:ext uri="{A12FA001-AC4F-418D-AE19-62706E023703}">
+                      <ahyp:hlinkClr xmlns:ahyp="http://schemas.microsoft.com/office/drawing/2018/hyperlinkcolor" val="tx"/>
+                    </a:ext>
+                  </a:extLst>
+                </a:hlinkClick>
+              </a:rPr>
+              <a:t>Tutorial to SMILES and canonical SMILES explained with examples | by </a:t>
+            </a:r>
+            <a:r>
+              <a:rPr lang="en-US" sz="1800" dirty="0" err="1">
+                <a:hlinkClick r:id="rId4">
+                  <a:extLst>
+                    <a:ext uri="{A12FA001-AC4F-418D-AE19-62706E023703}">
+                      <ahyp:hlinkClr xmlns:ahyp="http://schemas.microsoft.com/office/drawing/2018/hyperlinkcolor" val="tx"/>
+                    </a:ext>
+                  </a:extLst>
+                </a:hlinkClick>
+              </a:rPr>
+              <a:t>thatbiochemistryguy</a:t>
+            </a:r>
+            <a:r>
+              <a:rPr lang="en-US" sz="1800" dirty="0">
+                <a:hlinkClick r:id="rId4">
+                  <a:extLst>
+                    <a:ext uri="{A12FA001-AC4F-418D-AE19-62706E023703}">
+                      <ahyp:hlinkClr xmlns:ahyp="http://schemas.microsoft.com/office/drawing/2018/hyperlinkcolor" val="tx"/>
+                    </a:ext>
+                  </a:extLst>
+                </a:hlinkClick>
+              </a:rPr>
+              <a:t> | Medium</a:t>
+            </a:r>
+            <a:endParaRPr lang="en-IN" sz="1800" dirty="0"/>
+          </a:p>
+        </p:txBody>
+      </p:sp>
+      <p:sp>
+        <p:nvSpPr>
+          <p:cNvPr id="4" name="Slide Number Placeholder 3">
+            <a:extLst>
+              <a:ext uri="{FF2B5EF4-FFF2-40B4-BE49-F238E27FC236}">
+                <a16:creationId xmlns:a16="http://schemas.microsoft.com/office/drawing/2014/main" id="{78A8C186-07B1-84FF-635F-C96A2A4AE76E}"/>
+              </a:ext>
+            </a:extLst>
+          </p:cNvPr>
+          <p:cNvSpPr>
+            <a:spLocks noGrp="1"/>
+          </p:cNvSpPr>
+          <p:nvPr>
+            <p:ph type="sldNum" sz="quarter" idx="12"/>
+          </p:nvPr>
+        </p:nvSpPr>
+        <p:spPr/>
+        <p:txBody>
+          <a:bodyPr/>
+          <a:lstStyle/>
+          <a:p>
+            <a:fld id="{FAF4F8EC-53F2-4EB2-97C1-60EB836CC882}" type="slidenum">
+              <a:rPr lang="en-IN" smtClean="0"/>
+              <a:t>12</a:t>
+            </a:fld>
+            <a:endParaRPr lang="en-IN"/>
+          </a:p>
+        </p:txBody>
+      </p:sp>
+    </p:spTree>
+    <p:extLst>
+      <p:ext uri="{BB962C8B-B14F-4D97-AF65-F5344CB8AC3E}">
+        <p14:creationId xmlns:p14="http://schemas.microsoft.com/office/powerpoint/2010/main" val="2826713424"/>
+      </p:ext>
+    </p:extLst>
+  </p:cSld>
+  <p:clrMapOvr>
+    <a:masterClrMapping/>
+  </p:clrMapOvr>
+</p:sld>
+</file>
+
+<file path=ppt/slides/slide13.xml><?xml version="1.0" encoding="utf-8"?>
+<p:sld xmlns:a="http://schemas.openxmlformats.org/drawingml/2006/main" xmlns:r="http://schemas.openxmlformats.org/officeDocument/2006/relationships" xmlns:p="http://schemas.openxmlformats.org/presentationml/2006/main">
+  <p:cSld>
+    <p:spTree>
+      <p:nvGrpSpPr>
+        <p:cNvPr id="1" name=""/>
+        <p:cNvGrpSpPr/>
+        <p:nvPr/>
+      </p:nvGrpSpPr>
+      <p:grpSpPr>
+        <a:xfrm>
+          <a:off x="0" y="0"/>
+          <a:ext cx="0" cy="0"/>
+          <a:chOff x="0" y="0"/>
+          <a:chExt cx="0" cy="0"/>
+        </a:xfrm>
+      </p:grpSpPr>
+      <p:sp>
+        <p:nvSpPr>
+          <p:cNvPr id="2" name="Title 1">
+            <a:extLst>
+              <a:ext uri="{FF2B5EF4-FFF2-40B4-BE49-F238E27FC236}">
+                <a16:creationId xmlns:a16="http://schemas.microsoft.com/office/drawing/2014/main" id="{6C82A5C7-FED3-4921-E9FE-87C9930DB86F}"/>
+              </a:ext>
+            </a:extLst>
+          </p:cNvPr>
+          <p:cNvSpPr>
+            <a:spLocks noGrp="1"/>
+          </p:cNvSpPr>
+          <p:nvPr>
+            <p:ph type="title"/>
+          </p:nvPr>
+        </p:nvSpPr>
+        <p:spPr/>
+        <p:txBody>
+          <a:bodyPr/>
+          <a:lstStyle/>
+          <a:p>
+            <a:r>
+              <a:rPr lang="en-US" dirty="0"/>
+              <a:t>Backup slides</a:t>
+            </a:r>
+            <a:endParaRPr lang="en-IN" dirty="0"/>
+          </a:p>
+        </p:txBody>
+      </p:sp>
+      <p:sp>
+        <p:nvSpPr>
+          <p:cNvPr id="4" name="Slide Number Placeholder 3">
+            <a:extLst>
+              <a:ext uri="{FF2B5EF4-FFF2-40B4-BE49-F238E27FC236}">
+                <a16:creationId xmlns:a16="http://schemas.microsoft.com/office/drawing/2014/main" id="{3F817325-0305-A70A-6080-0A631D9E5A73}"/>
+              </a:ext>
+            </a:extLst>
+          </p:cNvPr>
+          <p:cNvSpPr>
+            <a:spLocks noGrp="1"/>
+          </p:cNvSpPr>
+          <p:nvPr>
+            <p:ph type="sldNum" sz="quarter" idx="12"/>
+          </p:nvPr>
+        </p:nvSpPr>
+        <p:spPr/>
+        <p:txBody>
+          <a:bodyPr/>
+          <a:lstStyle/>
+          <a:p>
+            <a:fld id="{FAF4F8EC-53F2-4EB2-97C1-60EB836CC882}" type="slidenum">
+              <a:rPr lang="en-IN" smtClean="0"/>
+              <a:t>13</a:t>
+            </a:fld>
+            <a:endParaRPr lang="en-IN"/>
+          </a:p>
+        </p:txBody>
+      </p:sp>
+    </p:spTree>
+    <p:extLst>
+      <p:ext uri="{BB962C8B-B14F-4D97-AF65-F5344CB8AC3E}">
+        <p14:creationId xmlns:p14="http://schemas.microsoft.com/office/powerpoint/2010/main" val="562458958"/>
+      </p:ext>
+    </p:extLst>
+  </p:cSld>
+  <p:clrMapOvr>
+    <a:masterClrMapping/>
+  </p:clrMapOvr>
+</p:sld>
+</file>
+
+<file path=ppt/slides/slide14.xml><?xml version="1.0" encoding="utf-8"?>
 <p:sld xmlns:a="http://schemas.openxmlformats.org/drawingml/2006/main" xmlns:r="http://schemas.openxmlformats.org/officeDocument/2006/relationships" xmlns:p="http://schemas.openxmlformats.org/presentationml/2006/main">
   <p:cSld>
     <p:spTree>
@@ -5249,6 +4982,35 @@
           </a:graphicData>
         </a:graphic>
       </p:graphicFrame>
+      <p:sp>
+        <p:nvSpPr>
+          <p:cNvPr id="3" name="Slide Number Placeholder 2">
+            <a:extLst>
+              <a:ext uri="{FF2B5EF4-FFF2-40B4-BE49-F238E27FC236}">
+                <a16:creationId xmlns:a16="http://schemas.microsoft.com/office/drawing/2014/main" id="{40DB0D07-6671-A66B-6026-EE212EAB6F40}"/>
+              </a:ext>
+            </a:extLst>
+          </p:cNvPr>
+          <p:cNvSpPr>
+            <a:spLocks noGrp="1"/>
+          </p:cNvSpPr>
+          <p:nvPr>
+            <p:ph type="sldNum" sz="quarter" idx="12"/>
+          </p:nvPr>
+        </p:nvSpPr>
+        <p:spPr/>
+        <p:txBody>
+          <a:bodyPr/>
+          <a:lstStyle/>
+          <a:p>
+            <a:fld id="{FAF4F8EC-53F2-4EB2-97C1-60EB836CC882}" type="slidenum">
+              <a:rPr lang="en-IN" smtClean="0"/>
+              <a:t>14</a:t>
+            </a:fld>
+            <a:endParaRPr lang="en-IN"/>
+          </a:p>
+        </p:txBody>
+      </p:sp>
     </p:spTree>
     <p:extLst>
       <p:ext uri="{BB962C8B-B14F-4D97-AF65-F5344CB8AC3E}">
@@ -5262,7 +5024,7 @@
 </p:sld>
 </file>
 
-<file path=ppt/slides/slide3.xml><?xml version="1.0" encoding="utf-8"?>
+<file path=ppt/slides/slide15.xml><?xml version="1.0" encoding="utf-8"?>
 <p:sld xmlns:a="http://schemas.openxmlformats.org/drawingml/2006/main" xmlns:r="http://schemas.openxmlformats.org/officeDocument/2006/relationships" xmlns:p="http://schemas.openxmlformats.org/presentationml/2006/main">
   <p:cSld>
     <p:spTree>
@@ -5739,6 +5501,35 @@
           </a:graphicData>
         </a:graphic>
       </p:graphicFrame>
+      <p:sp>
+        <p:nvSpPr>
+          <p:cNvPr id="3" name="Slide Number Placeholder 2">
+            <a:extLst>
+              <a:ext uri="{FF2B5EF4-FFF2-40B4-BE49-F238E27FC236}">
+                <a16:creationId xmlns:a16="http://schemas.microsoft.com/office/drawing/2014/main" id="{606748AE-36BE-82F3-393A-36136C754254}"/>
+              </a:ext>
+            </a:extLst>
+          </p:cNvPr>
+          <p:cNvSpPr>
+            <a:spLocks noGrp="1"/>
+          </p:cNvSpPr>
+          <p:nvPr>
+            <p:ph type="sldNum" sz="quarter" idx="12"/>
+          </p:nvPr>
+        </p:nvSpPr>
+        <p:spPr/>
+        <p:txBody>
+          <a:bodyPr/>
+          <a:lstStyle/>
+          <a:p>
+            <a:fld id="{FAF4F8EC-53F2-4EB2-97C1-60EB836CC882}" type="slidenum">
+              <a:rPr lang="en-IN" smtClean="0"/>
+              <a:t>15</a:t>
+            </a:fld>
+            <a:endParaRPr lang="en-IN"/>
+          </a:p>
+        </p:txBody>
+      </p:sp>
     </p:spTree>
     <p:extLst>
       <p:ext uri="{BB962C8B-B14F-4D97-AF65-F5344CB8AC3E}">
@@ -5752,7 +5543,7 @@
 </p:sld>
 </file>
 
-<file path=ppt/slides/slide4.xml><?xml version="1.0" encoding="utf-8"?>
+<file path=ppt/slides/slide16.xml><?xml version="1.0" encoding="utf-8"?>
 <p:sld xmlns:a="http://schemas.openxmlformats.org/drawingml/2006/main" xmlns:r="http://schemas.openxmlformats.org/officeDocument/2006/relationships" xmlns:p="http://schemas.openxmlformats.org/presentationml/2006/main">
   <p:cSld>
     <p:spTree>
@@ -6229,10 +6020,3304 @@
           </a:graphicData>
         </a:graphic>
       </p:graphicFrame>
+      <p:sp>
+        <p:nvSpPr>
+          <p:cNvPr id="3" name="Slide Number Placeholder 2">
+            <a:extLst>
+              <a:ext uri="{FF2B5EF4-FFF2-40B4-BE49-F238E27FC236}">
+                <a16:creationId xmlns:a16="http://schemas.microsoft.com/office/drawing/2014/main" id="{3180A19B-6111-4AAA-8DC9-015802BD7722}"/>
+              </a:ext>
+            </a:extLst>
+          </p:cNvPr>
+          <p:cNvSpPr>
+            <a:spLocks noGrp="1"/>
+          </p:cNvSpPr>
+          <p:nvPr>
+            <p:ph type="sldNum" sz="quarter" idx="12"/>
+          </p:nvPr>
+        </p:nvSpPr>
+        <p:spPr/>
+        <p:txBody>
+          <a:bodyPr/>
+          <a:lstStyle/>
+          <a:p>
+            <a:fld id="{FAF4F8EC-53F2-4EB2-97C1-60EB836CC882}" type="slidenum">
+              <a:rPr lang="en-IN" smtClean="0"/>
+              <a:t>16</a:t>
+            </a:fld>
+            <a:endParaRPr lang="en-IN"/>
+          </a:p>
+        </p:txBody>
+      </p:sp>
     </p:spTree>
     <p:extLst>
       <p:ext uri="{BB962C8B-B14F-4D97-AF65-F5344CB8AC3E}">
         <p14:creationId xmlns:p14="http://schemas.microsoft.com/office/powerpoint/2010/main" val="2474524544"/>
+      </p:ext>
+    </p:extLst>
+  </p:cSld>
+  <p:clrMapOvr>
+    <a:masterClrMapping/>
+  </p:clrMapOvr>
+</p:sld>
+</file>
+
+<file path=ppt/slides/slide17.xml><?xml version="1.0" encoding="utf-8"?>
+<p:sld xmlns:a="http://schemas.openxmlformats.org/drawingml/2006/main" xmlns:r="http://schemas.openxmlformats.org/officeDocument/2006/relationships" xmlns:p="http://schemas.openxmlformats.org/presentationml/2006/main">
+  <p:cSld>
+    <p:spTree>
+      <p:nvGrpSpPr>
+        <p:cNvPr id="1" name=""/>
+        <p:cNvGrpSpPr/>
+        <p:nvPr/>
+      </p:nvGrpSpPr>
+      <p:grpSpPr>
+        <a:xfrm>
+          <a:off x="0" y="0"/>
+          <a:ext cx="0" cy="0"/>
+          <a:chOff x="0" y="0"/>
+          <a:chExt cx="0" cy="0"/>
+        </a:xfrm>
+      </p:grpSpPr>
+      <p:sp>
+        <p:nvSpPr>
+          <p:cNvPr id="2" name="Title 1">
+            <a:extLst>
+              <a:ext uri="{FF2B5EF4-FFF2-40B4-BE49-F238E27FC236}">
+                <a16:creationId xmlns:a16="http://schemas.microsoft.com/office/drawing/2014/main" id="{2BDD4831-613C-80B6-7BC3-7F2072369A24}"/>
+              </a:ext>
+            </a:extLst>
+          </p:cNvPr>
+          <p:cNvSpPr>
+            <a:spLocks noGrp="1"/>
+          </p:cNvSpPr>
+          <p:nvPr>
+            <p:ph type="title"/>
+          </p:nvPr>
+        </p:nvSpPr>
+        <p:spPr/>
+        <p:txBody>
+          <a:bodyPr/>
+          <a:lstStyle/>
+          <a:p>
+            <a:r>
+              <a:rPr lang="en-US" dirty="0"/>
+              <a:t>Classical DNN – Multi-class classification</a:t>
+            </a:r>
+            <a:endParaRPr lang="en-IN" dirty="0"/>
+          </a:p>
+        </p:txBody>
+      </p:sp>
+      <p:pic>
+        <p:nvPicPr>
+          <p:cNvPr id="6" name="Picture 5">
+            <a:extLst>
+              <a:ext uri="{FF2B5EF4-FFF2-40B4-BE49-F238E27FC236}">
+                <a16:creationId xmlns:a16="http://schemas.microsoft.com/office/drawing/2014/main" id="{220932A1-0AF5-3804-5BD9-B8416A752D8F}"/>
+              </a:ext>
+            </a:extLst>
+          </p:cNvPr>
+          <p:cNvPicPr>
+            <a:picLocks noChangeAspect="1"/>
+          </p:cNvPicPr>
+          <p:nvPr/>
+        </p:nvPicPr>
+        <p:blipFill>
+          <a:blip r:embed="rId2"/>
+          <a:stretch>
+            <a:fillRect/>
+          </a:stretch>
+        </p:blipFill>
+        <p:spPr>
+          <a:xfrm>
+            <a:off x="838200" y="1298382"/>
+            <a:ext cx="7362451" cy="2398233"/>
+          </a:xfrm>
+          <a:prstGeom prst="rect">
+            <a:avLst/>
+          </a:prstGeom>
+        </p:spPr>
+      </p:pic>
+      <p:sp>
+        <p:nvSpPr>
+          <p:cNvPr id="7" name="TextBox 6">
+            <a:extLst>
+              <a:ext uri="{FF2B5EF4-FFF2-40B4-BE49-F238E27FC236}">
+                <a16:creationId xmlns:a16="http://schemas.microsoft.com/office/drawing/2014/main" id="{DA560149-96EB-5461-932D-EB259877F9BE}"/>
+              </a:ext>
+            </a:extLst>
+          </p:cNvPr>
+          <p:cNvSpPr txBox="1"/>
+          <p:nvPr/>
+        </p:nvSpPr>
+        <p:spPr>
+          <a:xfrm>
+            <a:off x="8635042" y="1854680"/>
+            <a:ext cx="2718758" cy="923330"/>
+          </a:xfrm>
+          <a:prstGeom prst="rect">
+            <a:avLst/>
+          </a:prstGeom>
+          <a:noFill/>
+        </p:spPr>
+        <p:txBody>
+          <a:bodyPr wrap="square" rtlCol="0">
+            <a:spAutoFit/>
+          </a:bodyPr>
+          <a:lstStyle/>
+          <a:p>
+            <a:r>
+              <a:rPr lang="en-IN" dirty="0"/>
+              <a:t>Best epoch: 52 </a:t>
+            </a:r>
+          </a:p>
+          <a:p>
+            <a:r>
+              <a:rPr lang="en-IN" dirty="0"/>
+              <a:t>Train </a:t>
+            </a:r>
+            <a:r>
+              <a:rPr lang="en-IN" dirty="0" err="1"/>
+              <a:t>acc</a:t>
+            </a:r>
+            <a:r>
+              <a:rPr lang="en-IN" dirty="0"/>
+              <a:t>: 0.9395 </a:t>
+            </a:r>
+          </a:p>
+          <a:p>
+            <a:r>
+              <a:rPr lang="en-IN" dirty="0"/>
+              <a:t>Val </a:t>
+            </a:r>
+            <a:r>
+              <a:rPr lang="en-IN" dirty="0" err="1"/>
+              <a:t>acc</a:t>
+            </a:r>
+            <a:r>
+              <a:rPr lang="en-IN" dirty="0"/>
+              <a:t>: 0.8501</a:t>
+            </a:r>
+          </a:p>
+        </p:txBody>
+      </p:sp>
+      <p:pic>
+        <p:nvPicPr>
+          <p:cNvPr id="9" name="Picture 8">
+            <a:extLst>
+              <a:ext uri="{FF2B5EF4-FFF2-40B4-BE49-F238E27FC236}">
+                <a16:creationId xmlns:a16="http://schemas.microsoft.com/office/drawing/2014/main" id="{F69E6E37-9075-A149-89AA-B0C1AE54D618}"/>
+              </a:ext>
+            </a:extLst>
+          </p:cNvPr>
+          <p:cNvPicPr>
+            <a:picLocks noChangeAspect="1"/>
+          </p:cNvPicPr>
+          <p:nvPr/>
+        </p:nvPicPr>
+        <p:blipFill>
+          <a:blip r:embed="rId3"/>
+          <a:stretch>
+            <a:fillRect/>
+          </a:stretch>
+        </p:blipFill>
+        <p:spPr>
+          <a:xfrm>
+            <a:off x="838200" y="4167786"/>
+            <a:ext cx="3384307" cy="2622027"/>
+          </a:xfrm>
+          <a:prstGeom prst="rect">
+            <a:avLst/>
+          </a:prstGeom>
+        </p:spPr>
+      </p:pic>
+      <p:sp>
+        <p:nvSpPr>
+          <p:cNvPr id="10" name="TextBox 9">
+            <a:extLst>
+              <a:ext uri="{FF2B5EF4-FFF2-40B4-BE49-F238E27FC236}">
+                <a16:creationId xmlns:a16="http://schemas.microsoft.com/office/drawing/2014/main" id="{99500484-1C7B-F1F9-EEA1-6F10AD1A1F7D}"/>
+              </a:ext>
+            </a:extLst>
+          </p:cNvPr>
+          <p:cNvSpPr txBox="1"/>
+          <p:nvPr/>
+        </p:nvSpPr>
+        <p:spPr>
+          <a:xfrm>
+            <a:off x="1104181" y="3696615"/>
+            <a:ext cx="3303917" cy="375053"/>
+          </a:xfrm>
+          <a:prstGeom prst="rect">
+            <a:avLst/>
+          </a:prstGeom>
+          <a:noFill/>
+        </p:spPr>
+        <p:txBody>
+          <a:bodyPr wrap="square" rtlCol="0">
+            <a:spAutoFit/>
+          </a:bodyPr>
+          <a:lstStyle/>
+          <a:p>
+            <a:r>
+              <a:rPr lang="en-US" dirty="0"/>
+              <a:t>Test set results</a:t>
+            </a:r>
+            <a:endParaRPr lang="en-IN" dirty="0"/>
+          </a:p>
+        </p:txBody>
+      </p:sp>
+      <p:pic>
+        <p:nvPicPr>
+          <p:cNvPr id="12" name="Picture 11">
+            <a:extLst>
+              <a:ext uri="{FF2B5EF4-FFF2-40B4-BE49-F238E27FC236}">
+                <a16:creationId xmlns:a16="http://schemas.microsoft.com/office/drawing/2014/main" id="{CE680300-765A-3345-548C-CDC63E292131}"/>
+              </a:ext>
+            </a:extLst>
+          </p:cNvPr>
+          <p:cNvPicPr>
+            <a:picLocks noChangeAspect="1"/>
+          </p:cNvPicPr>
+          <p:nvPr/>
+        </p:nvPicPr>
+        <p:blipFill>
+          <a:blip r:embed="rId4"/>
+          <a:stretch>
+            <a:fillRect/>
+          </a:stretch>
+        </p:blipFill>
+        <p:spPr>
+          <a:xfrm>
+            <a:off x="4408098" y="4167786"/>
+            <a:ext cx="2785020" cy="2444406"/>
+          </a:xfrm>
+          <a:prstGeom prst="rect">
+            <a:avLst/>
+          </a:prstGeom>
+        </p:spPr>
+      </p:pic>
+      <p:sp>
+        <p:nvSpPr>
+          <p:cNvPr id="13" name="TextBox 12">
+            <a:extLst>
+              <a:ext uri="{FF2B5EF4-FFF2-40B4-BE49-F238E27FC236}">
+                <a16:creationId xmlns:a16="http://schemas.microsoft.com/office/drawing/2014/main" id="{495C6DD1-5652-5949-7F5F-2DDD8EDFAA8D}"/>
+              </a:ext>
+            </a:extLst>
+          </p:cNvPr>
+          <p:cNvSpPr txBox="1"/>
+          <p:nvPr/>
+        </p:nvSpPr>
+        <p:spPr>
+          <a:xfrm>
+            <a:off x="7332453" y="4304581"/>
+            <a:ext cx="2553419" cy="646331"/>
+          </a:xfrm>
+          <a:prstGeom prst="rect">
+            <a:avLst/>
+          </a:prstGeom>
+          <a:noFill/>
+        </p:spPr>
+        <p:txBody>
+          <a:bodyPr wrap="square" rtlCol="0">
+            <a:spAutoFit/>
+          </a:bodyPr>
+          <a:lstStyle/>
+          <a:p>
+            <a:r>
+              <a:rPr lang="en-US" dirty="0"/>
+              <a:t>Test samples: 387 </a:t>
+            </a:r>
+          </a:p>
+          <a:p>
+            <a:r>
+              <a:rPr lang="en-US" dirty="0"/>
+              <a:t>Test accuracy: 0.8036</a:t>
+            </a:r>
+            <a:endParaRPr lang="en-IN" dirty="0"/>
+          </a:p>
+        </p:txBody>
+      </p:sp>
+      <p:sp>
+        <p:nvSpPr>
+          <p:cNvPr id="3" name="Slide Number Placeholder 2">
+            <a:extLst>
+              <a:ext uri="{FF2B5EF4-FFF2-40B4-BE49-F238E27FC236}">
+                <a16:creationId xmlns:a16="http://schemas.microsoft.com/office/drawing/2014/main" id="{81120CBB-55B7-03AF-3CBD-D41006FF414B}"/>
+              </a:ext>
+            </a:extLst>
+          </p:cNvPr>
+          <p:cNvSpPr>
+            <a:spLocks noGrp="1"/>
+          </p:cNvSpPr>
+          <p:nvPr>
+            <p:ph type="sldNum" sz="quarter" idx="12"/>
+          </p:nvPr>
+        </p:nvSpPr>
+        <p:spPr/>
+        <p:txBody>
+          <a:bodyPr/>
+          <a:lstStyle/>
+          <a:p>
+            <a:fld id="{FAF4F8EC-53F2-4EB2-97C1-60EB836CC882}" type="slidenum">
+              <a:rPr lang="en-IN" smtClean="0"/>
+              <a:t>17</a:t>
+            </a:fld>
+            <a:endParaRPr lang="en-IN"/>
+          </a:p>
+        </p:txBody>
+      </p:sp>
+    </p:spTree>
+    <p:extLst>
+      <p:ext uri="{BB962C8B-B14F-4D97-AF65-F5344CB8AC3E}">
+        <p14:creationId xmlns:p14="http://schemas.microsoft.com/office/powerpoint/2010/main" val="1978811724"/>
+      </p:ext>
+    </p:extLst>
+  </p:cSld>
+  <p:clrMapOvr>
+    <a:masterClrMapping/>
+  </p:clrMapOvr>
+</p:sld>
+</file>
+
+<file path=ppt/slides/slide18.xml><?xml version="1.0" encoding="utf-8"?>
+<p:sld xmlns:a="http://schemas.openxmlformats.org/drawingml/2006/main" xmlns:r="http://schemas.openxmlformats.org/officeDocument/2006/relationships" xmlns:p="http://schemas.openxmlformats.org/presentationml/2006/main">
+  <p:cSld>
+    <p:spTree>
+      <p:nvGrpSpPr>
+        <p:cNvPr id="1" name=""/>
+        <p:cNvGrpSpPr/>
+        <p:nvPr/>
+      </p:nvGrpSpPr>
+      <p:grpSpPr>
+        <a:xfrm>
+          <a:off x="0" y="0"/>
+          <a:ext cx="0" cy="0"/>
+          <a:chOff x="0" y="0"/>
+          <a:chExt cx="0" cy="0"/>
+        </a:xfrm>
+      </p:grpSpPr>
+      <p:sp>
+        <p:nvSpPr>
+          <p:cNvPr id="2" name="Title 1">
+            <a:extLst>
+              <a:ext uri="{FF2B5EF4-FFF2-40B4-BE49-F238E27FC236}">
+                <a16:creationId xmlns:a16="http://schemas.microsoft.com/office/drawing/2014/main" id="{B6B8FCC8-F3E8-5685-D222-F2F5DE26AA30}"/>
+              </a:ext>
+            </a:extLst>
+          </p:cNvPr>
+          <p:cNvSpPr>
+            <a:spLocks noGrp="1"/>
+          </p:cNvSpPr>
+          <p:nvPr>
+            <p:ph type="title"/>
+          </p:nvPr>
+        </p:nvSpPr>
+        <p:spPr/>
+        <p:txBody>
+          <a:bodyPr/>
+          <a:lstStyle/>
+          <a:p>
+            <a:r>
+              <a:rPr lang="en-US" dirty="0"/>
+              <a:t>Hybrid QML- 3 class classification – Basic entangler 4 qubits, 2 rep</a:t>
+            </a:r>
+            <a:endParaRPr lang="en-IN" dirty="0"/>
+          </a:p>
+        </p:txBody>
+      </p:sp>
+      <p:pic>
+        <p:nvPicPr>
+          <p:cNvPr id="6" name="Picture 5">
+            <a:extLst>
+              <a:ext uri="{FF2B5EF4-FFF2-40B4-BE49-F238E27FC236}">
+                <a16:creationId xmlns:a16="http://schemas.microsoft.com/office/drawing/2014/main" id="{BCE7E419-FE52-CA49-8B01-0025923944B5}"/>
+              </a:ext>
+            </a:extLst>
+          </p:cNvPr>
+          <p:cNvPicPr>
+            <a:picLocks noChangeAspect="1"/>
+          </p:cNvPicPr>
+          <p:nvPr/>
+        </p:nvPicPr>
+        <p:blipFill>
+          <a:blip r:embed="rId2"/>
+          <a:stretch>
+            <a:fillRect/>
+          </a:stretch>
+        </p:blipFill>
+        <p:spPr>
+          <a:xfrm>
+            <a:off x="838200" y="1618874"/>
+            <a:ext cx="6252713" cy="2073658"/>
+          </a:xfrm>
+          <a:prstGeom prst="rect">
+            <a:avLst/>
+          </a:prstGeom>
+        </p:spPr>
+      </p:pic>
+      <p:sp>
+        <p:nvSpPr>
+          <p:cNvPr id="7" name="TextBox 6">
+            <a:extLst>
+              <a:ext uri="{FF2B5EF4-FFF2-40B4-BE49-F238E27FC236}">
+                <a16:creationId xmlns:a16="http://schemas.microsoft.com/office/drawing/2014/main" id="{E7C2CF0F-5AB9-75AB-E9A0-CEDE422A5E02}"/>
+              </a:ext>
+            </a:extLst>
+          </p:cNvPr>
+          <p:cNvSpPr txBox="1"/>
+          <p:nvPr/>
+        </p:nvSpPr>
+        <p:spPr>
+          <a:xfrm>
+            <a:off x="7349706" y="1923690"/>
+            <a:ext cx="2251495" cy="923330"/>
+          </a:xfrm>
+          <a:prstGeom prst="rect">
+            <a:avLst/>
+          </a:prstGeom>
+          <a:noFill/>
+        </p:spPr>
+        <p:txBody>
+          <a:bodyPr wrap="square" rtlCol="0">
+            <a:spAutoFit/>
+          </a:bodyPr>
+          <a:lstStyle/>
+          <a:p>
+            <a:r>
+              <a:rPr lang="en-IN" dirty="0"/>
+              <a:t>Best epoch: 52 </a:t>
+            </a:r>
+          </a:p>
+          <a:p>
+            <a:r>
+              <a:rPr lang="en-IN" dirty="0"/>
+              <a:t>Train </a:t>
+            </a:r>
+            <a:r>
+              <a:rPr lang="en-IN" dirty="0" err="1"/>
+              <a:t>acc</a:t>
+            </a:r>
+            <a:r>
+              <a:rPr lang="en-IN" dirty="0"/>
+              <a:t>: 0.9395 </a:t>
+            </a:r>
+          </a:p>
+          <a:p>
+            <a:r>
+              <a:rPr lang="en-IN" dirty="0"/>
+              <a:t>Val </a:t>
+            </a:r>
+            <a:r>
+              <a:rPr lang="en-IN" dirty="0" err="1"/>
+              <a:t>acc</a:t>
+            </a:r>
+            <a:r>
+              <a:rPr lang="en-IN" dirty="0"/>
+              <a:t>: 0.8501</a:t>
+            </a:r>
+          </a:p>
+        </p:txBody>
+      </p:sp>
+      <p:pic>
+        <p:nvPicPr>
+          <p:cNvPr id="9" name="Picture 8">
+            <a:extLst>
+              <a:ext uri="{FF2B5EF4-FFF2-40B4-BE49-F238E27FC236}">
+                <a16:creationId xmlns:a16="http://schemas.microsoft.com/office/drawing/2014/main" id="{48C3B45E-3051-3F10-5B19-744E14ADF229}"/>
+              </a:ext>
+            </a:extLst>
+          </p:cNvPr>
+          <p:cNvPicPr>
+            <a:picLocks noChangeAspect="1"/>
+          </p:cNvPicPr>
+          <p:nvPr/>
+        </p:nvPicPr>
+        <p:blipFill>
+          <a:blip r:embed="rId3"/>
+          <a:stretch>
+            <a:fillRect/>
+          </a:stretch>
+        </p:blipFill>
+        <p:spPr>
+          <a:xfrm>
+            <a:off x="838200" y="4186704"/>
+            <a:ext cx="6328206" cy="2469794"/>
+          </a:xfrm>
+          <a:prstGeom prst="rect">
+            <a:avLst/>
+          </a:prstGeom>
+        </p:spPr>
+      </p:pic>
+      <p:sp>
+        <p:nvSpPr>
+          <p:cNvPr id="10" name="TextBox 9">
+            <a:extLst>
+              <a:ext uri="{FF2B5EF4-FFF2-40B4-BE49-F238E27FC236}">
+                <a16:creationId xmlns:a16="http://schemas.microsoft.com/office/drawing/2014/main" id="{4D8B371D-EECC-52FD-F15F-99037214DA2E}"/>
+              </a:ext>
+            </a:extLst>
+          </p:cNvPr>
+          <p:cNvSpPr txBox="1"/>
+          <p:nvPr/>
+        </p:nvSpPr>
+        <p:spPr>
+          <a:xfrm>
+            <a:off x="838200" y="3752091"/>
+            <a:ext cx="3303917" cy="375053"/>
+          </a:xfrm>
+          <a:prstGeom prst="rect">
+            <a:avLst/>
+          </a:prstGeom>
+          <a:noFill/>
+        </p:spPr>
+        <p:txBody>
+          <a:bodyPr wrap="square" rtlCol="0">
+            <a:spAutoFit/>
+          </a:bodyPr>
+          <a:lstStyle/>
+          <a:p>
+            <a:r>
+              <a:rPr lang="en-US" dirty="0"/>
+              <a:t>Test set results</a:t>
+            </a:r>
+            <a:endParaRPr lang="en-IN" dirty="0"/>
+          </a:p>
+        </p:txBody>
+      </p:sp>
+      <p:sp>
+        <p:nvSpPr>
+          <p:cNvPr id="11" name="TextBox 10">
+            <a:extLst>
+              <a:ext uri="{FF2B5EF4-FFF2-40B4-BE49-F238E27FC236}">
+                <a16:creationId xmlns:a16="http://schemas.microsoft.com/office/drawing/2014/main" id="{EE741BA0-154F-4F49-8C97-834DEC9FB3D2}"/>
+              </a:ext>
+            </a:extLst>
+          </p:cNvPr>
+          <p:cNvSpPr txBox="1"/>
+          <p:nvPr/>
+        </p:nvSpPr>
+        <p:spPr>
+          <a:xfrm>
+            <a:off x="7530860" y="4580626"/>
+            <a:ext cx="2191110" cy="646331"/>
+          </a:xfrm>
+          <a:prstGeom prst="rect">
+            <a:avLst/>
+          </a:prstGeom>
+          <a:noFill/>
+        </p:spPr>
+        <p:txBody>
+          <a:bodyPr wrap="square" rtlCol="0">
+            <a:spAutoFit/>
+          </a:bodyPr>
+          <a:lstStyle/>
+          <a:p>
+            <a:r>
+              <a:rPr lang="en-US" dirty="0"/>
+              <a:t>Test samples: 387 Test accuracy: 0.8036</a:t>
+            </a:r>
+            <a:endParaRPr lang="en-IN" dirty="0"/>
+          </a:p>
+        </p:txBody>
+      </p:sp>
+      <p:sp>
+        <p:nvSpPr>
+          <p:cNvPr id="3" name="Slide Number Placeholder 2">
+            <a:extLst>
+              <a:ext uri="{FF2B5EF4-FFF2-40B4-BE49-F238E27FC236}">
+                <a16:creationId xmlns:a16="http://schemas.microsoft.com/office/drawing/2014/main" id="{3875AD6F-8139-06AF-A383-E451E73EB543}"/>
+              </a:ext>
+            </a:extLst>
+          </p:cNvPr>
+          <p:cNvSpPr>
+            <a:spLocks noGrp="1"/>
+          </p:cNvSpPr>
+          <p:nvPr>
+            <p:ph type="sldNum" sz="quarter" idx="12"/>
+          </p:nvPr>
+        </p:nvSpPr>
+        <p:spPr/>
+        <p:txBody>
+          <a:bodyPr/>
+          <a:lstStyle/>
+          <a:p>
+            <a:fld id="{FAF4F8EC-53F2-4EB2-97C1-60EB836CC882}" type="slidenum">
+              <a:rPr lang="en-IN" smtClean="0"/>
+              <a:t>18</a:t>
+            </a:fld>
+            <a:endParaRPr lang="en-IN"/>
+          </a:p>
+        </p:txBody>
+      </p:sp>
+    </p:spTree>
+    <p:extLst>
+      <p:ext uri="{BB962C8B-B14F-4D97-AF65-F5344CB8AC3E}">
+        <p14:creationId xmlns:p14="http://schemas.microsoft.com/office/powerpoint/2010/main" val="402914566"/>
+      </p:ext>
+    </p:extLst>
+  </p:cSld>
+  <p:clrMapOvr>
+    <a:masterClrMapping/>
+  </p:clrMapOvr>
+</p:sld>
+</file>
+
+<file path=ppt/slides/slide19.xml><?xml version="1.0" encoding="utf-8"?>
+<p:sld xmlns:a="http://schemas.openxmlformats.org/drawingml/2006/main" xmlns:r="http://schemas.openxmlformats.org/officeDocument/2006/relationships" xmlns:p="http://schemas.openxmlformats.org/presentationml/2006/main">
+  <p:cSld>
+    <p:spTree>
+      <p:nvGrpSpPr>
+        <p:cNvPr id="1" name="">
+          <a:extLst>
+            <a:ext uri="{FF2B5EF4-FFF2-40B4-BE49-F238E27FC236}">
+              <a16:creationId xmlns:a16="http://schemas.microsoft.com/office/drawing/2014/main" id="{F267C0FA-3211-E229-31E7-CE1D741889E7}"/>
+            </a:ext>
+          </a:extLst>
+        </p:cNvPr>
+        <p:cNvGrpSpPr/>
+        <p:nvPr/>
+      </p:nvGrpSpPr>
+      <p:grpSpPr>
+        <a:xfrm>
+          <a:off x="0" y="0"/>
+          <a:ext cx="0" cy="0"/>
+          <a:chOff x="0" y="0"/>
+          <a:chExt cx="0" cy="0"/>
+        </a:xfrm>
+      </p:grpSpPr>
+      <p:sp>
+        <p:nvSpPr>
+          <p:cNvPr id="2" name="Title 1">
+            <a:extLst>
+              <a:ext uri="{FF2B5EF4-FFF2-40B4-BE49-F238E27FC236}">
+                <a16:creationId xmlns:a16="http://schemas.microsoft.com/office/drawing/2014/main" id="{E12D5F3E-2134-59F8-14E2-5AD873584216}"/>
+              </a:ext>
+            </a:extLst>
+          </p:cNvPr>
+          <p:cNvSpPr>
+            <a:spLocks noGrp="1"/>
+          </p:cNvSpPr>
+          <p:nvPr>
+            <p:ph type="title"/>
+          </p:nvPr>
+        </p:nvSpPr>
+        <p:spPr/>
+        <p:txBody>
+          <a:bodyPr/>
+          <a:lstStyle/>
+          <a:p>
+            <a:r>
+              <a:rPr lang="en-US" dirty="0"/>
+              <a:t>Hybrid QML- 3 class classification – Basic entangler 4 qubits, 4 rep</a:t>
+            </a:r>
+            <a:endParaRPr lang="en-IN" dirty="0"/>
+          </a:p>
+        </p:txBody>
+      </p:sp>
+      <p:sp>
+        <p:nvSpPr>
+          <p:cNvPr id="7" name="TextBox 6">
+            <a:extLst>
+              <a:ext uri="{FF2B5EF4-FFF2-40B4-BE49-F238E27FC236}">
+                <a16:creationId xmlns:a16="http://schemas.microsoft.com/office/drawing/2014/main" id="{309FF1B8-232B-69C9-1F62-4649D5A4D1E1}"/>
+              </a:ext>
+            </a:extLst>
+          </p:cNvPr>
+          <p:cNvSpPr txBox="1"/>
+          <p:nvPr/>
+        </p:nvSpPr>
+        <p:spPr>
+          <a:xfrm>
+            <a:off x="8006931" y="1973696"/>
+            <a:ext cx="2251495" cy="923330"/>
+          </a:xfrm>
+          <a:prstGeom prst="rect">
+            <a:avLst/>
+          </a:prstGeom>
+          <a:noFill/>
+        </p:spPr>
+        <p:txBody>
+          <a:bodyPr wrap="square" rtlCol="0">
+            <a:spAutoFit/>
+          </a:bodyPr>
+          <a:lstStyle/>
+          <a:p>
+            <a:r>
+              <a:rPr lang="en-IN" dirty="0"/>
+              <a:t>Best epoch: 35 </a:t>
+            </a:r>
+          </a:p>
+          <a:p>
+            <a:r>
+              <a:rPr lang="en-IN" dirty="0"/>
+              <a:t>Train </a:t>
+            </a:r>
+            <a:r>
+              <a:rPr lang="en-IN" dirty="0" err="1"/>
+              <a:t>acc</a:t>
+            </a:r>
+            <a:r>
+              <a:rPr lang="en-IN" dirty="0"/>
+              <a:t>: 0.8192 </a:t>
+            </a:r>
+          </a:p>
+          <a:p>
+            <a:r>
+              <a:rPr lang="en-IN" dirty="0"/>
+              <a:t>Val </a:t>
+            </a:r>
+            <a:r>
+              <a:rPr lang="en-IN" dirty="0" err="1"/>
+              <a:t>acc</a:t>
+            </a:r>
+            <a:r>
+              <a:rPr lang="en-IN" dirty="0"/>
+              <a:t>: 0.7649</a:t>
+            </a:r>
+          </a:p>
+        </p:txBody>
+      </p:sp>
+      <p:sp>
+        <p:nvSpPr>
+          <p:cNvPr id="10" name="TextBox 9">
+            <a:extLst>
+              <a:ext uri="{FF2B5EF4-FFF2-40B4-BE49-F238E27FC236}">
+                <a16:creationId xmlns:a16="http://schemas.microsoft.com/office/drawing/2014/main" id="{0403ED6F-21B3-7B92-A4FF-1C019D198EAF}"/>
+              </a:ext>
+            </a:extLst>
+          </p:cNvPr>
+          <p:cNvSpPr txBox="1"/>
+          <p:nvPr/>
+        </p:nvSpPr>
+        <p:spPr>
+          <a:xfrm>
+            <a:off x="838200" y="3752091"/>
+            <a:ext cx="3303917" cy="375053"/>
+          </a:xfrm>
+          <a:prstGeom prst="rect">
+            <a:avLst/>
+          </a:prstGeom>
+          <a:noFill/>
+        </p:spPr>
+        <p:txBody>
+          <a:bodyPr wrap="square" rtlCol="0">
+            <a:spAutoFit/>
+          </a:bodyPr>
+          <a:lstStyle/>
+          <a:p>
+            <a:r>
+              <a:rPr lang="en-US" dirty="0"/>
+              <a:t>Test set results</a:t>
+            </a:r>
+            <a:endParaRPr lang="en-IN" dirty="0"/>
+          </a:p>
+        </p:txBody>
+      </p:sp>
+      <p:sp>
+        <p:nvSpPr>
+          <p:cNvPr id="11" name="TextBox 10">
+            <a:extLst>
+              <a:ext uri="{FF2B5EF4-FFF2-40B4-BE49-F238E27FC236}">
+                <a16:creationId xmlns:a16="http://schemas.microsoft.com/office/drawing/2014/main" id="{A83FD581-A033-EF2A-B974-DC46DB8DD83F}"/>
+              </a:ext>
+            </a:extLst>
+          </p:cNvPr>
+          <p:cNvSpPr txBox="1"/>
+          <p:nvPr/>
+        </p:nvSpPr>
+        <p:spPr>
+          <a:xfrm>
+            <a:off x="7530860" y="4580626"/>
+            <a:ext cx="2191110" cy="646331"/>
+          </a:xfrm>
+          <a:prstGeom prst="rect">
+            <a:avLst/>
+          </a:prstGeom>
+          <a:noFill/>
+        </p:spPr>
+        <p:txBody>
+          <a:bodyPr wrap="square" rtlCol="0">
+            <a:spAutoFit/>
+          </a:bodyPr>
+          <a:lstStyle/>
+          <a:p>
+            <a:r>
+              <a:rPr lang="en-US" dirty="0"/>
+              <a:t>Test samples: 387 Test accuracy: 0.8036</a:t>
+            </a:r>
+            <a:endParaRPr lang="en-IN" dirty="0"/>
+          </a:p>
+        </p:txBody>
+      </p:sp>
+      <p:pic>
+        <p:nvPicPr>
+          <p:cNvPr id="4" name="Picture 3">
+            <a:extLst>
+              <a:ext uri="{FF2B5EF4-FFF2-40B4-BE49-F238E27FC236}">
+                <a16:creationId xmlns:a16="http://schemas.microsoft.com/office/drawing/2014/main" id="{996BAC2D-61F1-F2D8-0C4D-DF801178A95E}"/>
+              </a:ext>
+            </a:extLst>
+          </p:cNvPr>
+          <p:cNvPicPr>
+            <a:picLocks noChangeAspect="1"/>
+          </p:cNvPicPr>
+          <p:nvPr/>
+        </p:nvPicPr>
+        <p:blipFill>
+          <a:blip r:embed="rId2"/>
+          <a:stretch>
+            <a:fillRect/>
+          </a:stretch>
+        </p:blipFill>
+        <p:spPr>
+          <a:xfrm>
+            <a:off x="838199" y="1521124"/>
+            <a:ext cx="6950543" cy="2230967"/>
+          </a:xfrm>
+          <a:prstGeom prst="rect">
+            <a:avLst/>
+          </a:prstGeom>
+        </p:spPr>
+      </p:pic>
+      <p:pic>
+        <p:nvPicPr>
+          <p:cNvPr id="8" name="Picture 7">
+            <a:extLst>
+              <a:ext uri="{FF2B5EF4-FFF2-40B4-BE49-F238E27FC236}">
+                <a16:creationId xmlns:a16="http://schemas.microsoft.com/office/drawing/2014/main" id="{AE40E8CD-FB47-77CB-624C-95C9D528E250}"/>
+              </a:ext>
+            </a:extLst>
+          </p:cNvPr>
+          <p:cNvPicPr>
+            <a:picLocks noChangeAspect="1"/>
+          </p:cNvPicPr>
+          <p:nvPr/>
+        </p:nvPicPr>
+        <p:blipFill>
+          <a:blip r:embed="rId3"/>
+          <a:stretch>
+            <a:fillRect/>
+          </a:stretch>
+        </p:blipFill>
+        <p:spPr>
+          <a:xfrm>
+            <a:off x="925827" y="4075280"/>
+            <a:ext cx="6432580" cy="2523191"/>
+          </a:xfrm>
+          <a:prstGeom prst="rect">
+            <a:avLst/>
+          </a:prstGeom>
+        </p:spPr>
+      </p:pic>
+      <p:sp>
+        <p:nvSpPr>
+          <p:cNvPr id="3" name="Slide Number Placeholder 2">
+            <a:extLst>
+              <a:ext uri="{FF2B5EF4-FFF2-40B4-BE49-F238E27FC236}">
+                <a16:creationId xmlns:a16="http://schemas.microsoft.com/office/drawing/2014/main" id="{58A1530E-5217-2146-40B9-3627218BEE50}"/>
+              </a:ext>
+            </a:extLst>
+          </p:cNvPr>
+          <p:cNvSpPr>
+            <a:spLocks noGrp="1"/>
+          </p:cNvSpPr>
+          <p:nvPr>
+            <p:ph type="sldNum" sz="quarter" idx="12"/>
+          </p:nvPr>
+        </p:nvSpPr>
+        <p:spPr/>
+        <p:txBody>
+          <a:bodyPr/>
+          <a:lstStyle/>
+          <a:p>
+            <a:fld id="{FAF4F8EC-53F2-4EB2-97C1-60EB836CC882}" type="slidenum">
+              <a:rPr lang="en-IN" smtClean="0"/>
+              <a:t>19</a:t>
+            </a:fld>
+            <a:endParaRPr lang="en-IN"/>
+          </a:p>
+        </p:txBody>
+      </p:sp>
+    </p:spTree>
+    <p:extLst>
+      <p:ext uri="{BB962C8B-B14F-4D97-AF65-F5344CB8AC3E}">
+        <p14:creationId xmlns:p14="http://schemas.microsoft.com/office/powerpoint/2010/main" val="2892183383"/>
+      </p:ext>
+    </p:extLst>
+  </p:cSld>
+  <p:clrMapOvr>
+    <a:masterClrMapping/>
+  </p:clrMapOvr>
+</p:sld>
+</file>
+
+<file path=ppt/slides/slide2.xml><?xml version="1.0" encoding="utf-8"?>
+<p:sld xmlns:a="http://schemas.openxmlformats.org/drawingml/2006/main" xmlns:r="http://schemas.openxmlformats.org/officeDocument/2006/relationships" xmlns:p="http://schemas.openxmlformats.org/presentationml/2006/main">
+  <p:cSld>
+    <p:spTree>
+      <p:nvGrpSpPr>
+        <p:cNvPr id="1" name=""/>
+        <p:cNvGrpSpPr/>
+        <p:nvPr/>
+      </p:nvGrpSpPr>
+      <p:grpSpPr>
+        <a:xfrm>
+          <a:off x="0" y="0"/>
+          <a:ext cx="0" cy="0"/>
+          <a:chOff x="0" y="0"/>
+          <a:chExt cx="0" cy="0"/>
+        </a:xfrm>
+      </p:grpSpPr>
+      <p:sp>
+        <p:nvSpPr>
+          <p:cNvPr id="2" name="Title 1">
+            <a:extLst>
+              <a:ext uri="{FF2B5EF4-FFF2-40B4-BE49-F238E27FC236}">
+                <a16:creationId xmlns:a16="http://schemas.microsoft.com/office/drawing/2014/main" id="{02A32E5A-E0F6-964F-5806-5D7C0A68D37E}"/>
+              </a:ext>
+            </a:extLst>
+          </p:cNvPr>
+          <p:cNvSpPr>
+            <a:spLocks noGrp="1"/>
+          </p:cNvSpPr>
+          <p:nvPr>
+            <p:ph type="title"/>
+          </p:nvPr>
+        </p:nvSpPr>
+        <p:spPr>
+          <a:xfrm>
+            <a:off x="838200" y="136525"/>
+            <a:ext cx="10515600" cy="1325563"/>
+          </a:xfrm>
+        </p:spPr>
+        <p:txBody>
+          <a:bodyPr/>
+          <a:lstStyle/>
+          <a:p>
+            <a:r>
+              <a:rPr lang="en-US" dirty="0"/>
+              <a:t>Dataset and pre-processing</a:t>
+            </a:r>
+            <a:endParaRPr lang="en-IN" dirty="0"/>
+          </a:p>
+        </p:txBody>
+      </p:sp>
+      <p:sp>
+        <p:nvSpPr>
+          <p:cNvPr id="3" name="Content Placeholder 2">
+            <a:extLst>
+              <a:ext uri="{FF2B5EF4-FFF2-40B4-BE49-F238E27FC236}">
+                <a16:creationId xmlns:a16="http://schemas.microsoft.com/office/drawing/2014/main" id="{95AF3766-7BC0-ECDC-C389-3D77ADD6AB33}"/>
+              </a:ext>
+            </a:extLst>
+          </p:cNvPr>
+          <p:cNvSpPr>
+            <a:spLocks noGrp="1"/>
+          </p:cNvSpPr>
+          <p:nvPr>
+            <p:ph idx="1"/>
+          </p:nvPr>
+        </p:nvSpPr>
+        <p:spPr>
+          <a:xfrm>
+            <a:off x="838200" y="1371600"/>
+            <a:ext cx="9073461" cy="5121275"/>
+          </a:xfrm>
+        </p:spPr>
+        <p:txBody>
+          <a:bodyPr>
+            <a:normAutofit lnSpcReduction="10000"/>
+          </a:bodyPr>
+          <a:lstStyle/>
+          <a:p>
+            <a:r>
+              <a:rPr lang="en-US" dirty="0"/>
+              <a:t>We have </a:t>
+            </a:r>
+            <a:r>
+              <a:rPr lang="en-US" dirty="0" err="1"/>
+              <a:t>ChEMBL</a:t>
+            </a:r>
+            <a:r>
+              <a:rPr lang="en-US" dirty="0"/>
+              <a:t> drug molecule dataset which are specifically targeting the HIV protein inhibitors.</a:t>
+            </a:r>
+          </a:p>
+          <a:p>
+            <a:r>
+              <a:rPr lang="en-IN" dirty="0" err="1"/>
+              <a:t>ChEMBL</a:t>
+            </a:r>
+            <a:r>
+              <a:rPr lang="en-IN" dirty="0"/>
+              <a:t> dataset is in Canonical SMILES format.</a:t>
+            </a:r>
+          </a:p>
+          <a:p>
+            <a:endParaRPr lang="en-US" dirty="0"/>
+          </a:p>
+          <a:p>
+            <a:r>
+              <a:rPr lang="en-IN" dirty="0"/>
+              <a:t>The pre-processing steps involves</a:t>
+            </a:r>
+          </a:p>
+          <a:p>
+            <a:pPr lvl="1"/>
+            <a:r>
+              <a:rPr lang="en-IN" dirty="0"/>
+              <a:t>Converting the bioactivity value IC50 (which measures potency) to classes</a:t>
+            </a:r>
+          </a:p>
+          <a:p>
+            <a:pPr lvl="2"/>
+            <a:r>
+              <a:rPr lang="en-IN" dirty="0"/>
+              <a:t>IC50 &lt; 1000nM – active.</a:t>
+            </a:r>
+          </a:p>
+          <a:p>
+            <a:pPr lvl="2"/>
+            <a:r>
+              <a:rPr lang="en-IN" dirty="0"/>
+              <a:t>IC50 &gt; 10000nM – inactive.</a:t>
+            </a:r>
+          </a:p>
+          <a:p>
+            <a:pPr lvl="2"/>
+            <a:r>
+              <a:rPr lang="en-IN" dirty="0"/>
+              <a:t>IC50 between 1000nM and 10000nM – intermediate.</a:t>
+            </a:r>
+          </a:p>
+          <a:p>
+            <a:pPr lvl="1"/>
+            <a:r>
+              <a:rPr lang="en-IN" dirty="0"/>
+              <a:t>Converting SMILES to </a:t>
+            </a:r>
+            <a:r>
+              <a:rPr lang="en-IN" dirty="0" err="1"/>
+              <a:t>PaDEL</a:t>
+            </a:r>
+            <a:r>
+              <a:rPr lang="en-IN" dirty="0"/>
+              <a:t> descriptors (molecular descriptors like -</a:t>
+            </a:r>
+            <a:r>
+              <a:rPr lang="en-US" dirty="0"/>
+              <a:t>such as topological indices, constitutional descriptors, geometric properties, and electronic states)</a:t>
+            </a:r>
+            <a:r>
+              <a:rPr lang="en-IN" dirty="0"/>
+              <a:t>.</a:t>
+            </a:r>
+          </a:p>
+        </p:txBody>
+      </p:sp>
+      <p:sp>
+        <p:nvSpPr>
+          <p:cNvPr id="4" name="Slide Number Placeholder 3">
+            <a:extLst>
+              <a:ext uri="{FF2B5EF4-FFF2-40B4-BE49-F238E27FC236}">
+                <a16:creationId xmlns:a16="http://schemas.microsoft.com/office/drawing/2014/main" id="{D5866B0D-B0F3-CF53-4805-E1B1407CAC15}"/>
+              </a:ext>
+            </a:extLst>
+          </p:cNvPr>
+          <p:cNvSpPr>
+            <a:spLocks noGrp="1"/>
+          </p:cNvSpPr>
+          <p:nvPr>
+            <p:ph type="sldNum" sz="quarter" idx="12"/>
+          </p:nvPr>
+        </p:nvSpPr>
+        <p:spPr/>
+        <p:txBody>
+          <a:bodyPr/>
+          <a:lstStyle/>
+          <a:p>
+            <a:fld id="{FAF4F8EC-53F2-4EB2-97C1-60EB836CC882}" type="slidenum">
+              <a:rPr lang="en-IN" smtClean="0"/>
+              <a:t>2</a:t>
+            </a:fld>
+            <a:endParaRPr lang="en-IN"/>
+          </a:p>
+        </p:txBody>
+      </p:sp>
+      <p:pic>
+        <p:nvPicPr>
+          <p:cNvPr id="1028" name="Picture 4">
+            <a:extLst>
+              <a:ext uri="{FF2B5EF4-FFF2-40B4-BE49-F238E27FC236}">
+                <a16:creationId xmlns:a16="http://schemas.microsoft.com/office/drawing/2014/main" id="{87E2B2A5-2C51-337E-2028-142AACA356ED}"/>
+              </a:ext>
+            </a:extLst>
+          </p:cNvPr>
+          <p:cNvPicPr>
+            <a:picLocks noChangeAspect="1" noChangeArrowheads="1"/>
+          </p:cNvPicPr>
+          <p:nvPr/>
+        </p:nvPicPr>
+        <p:blipFill>
+          <a:blip r:embed="rId2">
+            <a:extLst>
+              <a:ext uri="{28A0092B-C50C-407E-A947-70E740481C1C}">
+                <a14:useLocalDpi xmlns:a14="http://schemas.microsoft.com/office/drawing/2010/main" val="0"/>
+              </a:ext>
+            </a:extLst>
+          </a:blip>
+          <a:srcRect/>
+          <a:stretch>
+            <a:fillRect/>
+          </a:stretch>
+        </p:blipFill>
+        <p:spPr bwMode="auto">
+          <a:xfrm>
+            <a:off x="1583529" y="2577317"/>
+            <a:ext cx="3083200" cy="537358"/>
+          </a:xfrm>
+          <a:prstGeom prst="rect">
+            <a:avLst/>
+          </a:prstGeom>
+          <a:noFill/>
+          <a:extLst>
+            <a:ext uri="{909E8E84-426E-40DD-AFC4-6F175D3DCCD1}">
+              <a14:hiddenFill xmlns:a14="http://schemas.microsoft.com/office/drawing/2010/main">
+                <a:solidFill>
+                  <a:srgbClr val="FFFFFF"/>
+                </a:solidFill>
+              </a14:hiddenFill>
+            </a:ext>
+          </a:extLst>
+        </p:spPr>
+      </p:pic>
+    </p:spTree>
+    <p:extLst>
+      <p:ext uri="{BB962C8B-B14F-4D97-AF65-F5344CB8AC3E}">
+        <p14:creationId xmlns:p14="http://schemas.microsoft.com/office/powerpoint/2010/main" val="1619011933"/>
+      </p:ext>
+    </p:extLst>
+  </p:cSld>
+  <p:clrMapOvr>
+    <a:masterClrMapping/>
+  </p:clrMapOvr>
+</p:sld>
+</file>
+
+<file path=ppt/slides/slide20.xml><?xml version="1.0" encoding="utf-8"?>
+<p:sld xmlns:a="http://schemas.openxmlformats.org/drawingml/2006/main" xmlns:r="http://schemas.openxmlformats.org/officeDocument/2006/relationships" xmlns:p="http://schemas.openxmlformats.org/presentationml/2006/main">
+  <p:cSld>
+    <p:spTree>
+      <p:nvGrpSpPr>
+        <p:cNvPr id="1" name="">
+          <a:extLst>
+            <a:ext uri="{FF2B5EF4-FFF2-40B4-BE49-F238E27FC236}">
+              <a16:creationId xmlns:a16="http://schemas.microsoft.com/office/drawing/2014/main" id="{DEEDA080-D4CF-B6F4-03C7-C661FA8654B8}"/>
+            </a:ext>
+          </a:extLst>
+        </p:cNvPr>
+        <p:cNvGrpSpPr/>
+        <p:nvPr/>
+      </p:nvGrpSpPr>
+      <p:grpSpPr>
+        <a:xfrm>
+          <a:off x="0" y="0"/>
+          <a:ext cx="0" cy="0"/>
+          <a:chOff x="0" y="0"/>
+          <a:chExt cx="0" cy="0"/>
+        </a:xfrm>
+      </p:grpSpPr>
+      <p:sp>
+        <p:nvSpPr>
+          <p:cNvPr id="2" name="Title 1">
+            <a:extLst>
+              <a:ext uri="{FF2B5EF4-FFF2-40B4-BE49-F238E27FC236}">
+                <a16:creationId xmlns:a16="http://schemas.microsoft.com/office/drawing/2014/main" id="{98BF376A-E4B1-874D-9792-444C9886505F}"/>
+              </a:ext>
+            </a:extLst>
+          </p:cNvPr>
+          <p:cNvSpPr>
+            <a:spLocks noGrp="1"/>
+          </p:cNvSpPr>
+          <p:nvPr>
+            <p:ph type="title"/>
+          </p:nvPr>
+        </p:nvSpPr>
+        <p:spPr/>
+        <p:txBody>
+          <a:bodyPr/>
+          <a:lstStyle/>
+          <a:p>
+            <a:r>
+              <a:rPr lang="en-US" dirty="0"/>
+              <a:t>Hybrid QML- 3 class classification – Basic entangler 4 qubits, 8 rep</a:t>
+            </a:r>
+            <a:endParaRPr lang="en-IN" dirty="0"/>
+          </a:p>
+        </p:txBody>
+      </p:sp>
+      <p:sp>
+        <p:nvSpPr>
+          <p:cNvPr id="7" name="TextBox 6">
+            <a:extLst>
+              <a:ext uri="{FF2B5EF4-FFF2-40B4-BE49-F238E27FC236}">
+                <a16:creationId xmlns:a16="http://schemas.microsoft.com/office/drawing/2014/main" id="{F8C0D608-941C-2C87-DFBB-46D52AE4D788}"/>
+              </a:ext>
+            </a:extLst>
+          </p:cNvPr>
+          <p:cNvSpPr txBox="1"/>
+          <p:nvPr/>
+        </p:nvSpPr>
+        <p:spPr>
+          <a:xfrm>
+            <a:off x="7349706" y="2212327"/>
+            <a:ext cx="2251495" cy="923330"/>
+          </a:xfrm>
+          <a:prstGeom prst="rect">
+            <a:avLst/>
+          </a:prstGeom>
+          <a:noFill/>
+        </p:spPr>
+        <p:txBody>
+          <a:bodyPr wrap="square" rtlCol="0">
+            <a:spAutoFit/>
+          </a:bodyPr>
+          <a:lstStyle/>
+          <a:p>
+            <a:r>
+              <a:rPr lang="en-IN" dirty="0"/>
+              <a:t>Best epoch: 10 </a:t>
+            </a:r>
+          </a:p>
+          <a:p>
+            <a:r>
+              <a:rPr lang="en-IN" dirty="0"/>
+              <a:t>Train </a:t>
+            </a:r>
+            <a:r>
+              <a:rPr lang="en-IN" dirty="0" err="1"/>
+              <a:t>acc</a:t>
+            </a:r>
+            <a:r>
+              <a:rPr lang="en-IN" dirty="0"/>
+              <a:t>: 0.8552 </a:t>
+            </a:r>
+          </a:p>
+          <a:p>
+            <a:r>
+              <a:rPr lang="en-IN" dirty="0"/>
+              <a:t>Val </a:t>
+            </a:r>
+            <a:r>
+              <a:rPr lang="en-IN" dirty="0" err="1"/>
+              <a:t>acc</a:t>
+            </a:r>
+            <a:r>
+              <a:rPr lang="en-IN" dirty="0"/>
+              <a:t>: 0.8114</a:t>
+            </a:r>
+          </a:p>
+        </p:txBody>
+      </p:sp>
+      <p:sp>
+        <p:nvSpPr>
+          <p:cNvPr id="10" name="TextBox 9">
+            <a:extLst>
+              <a:ext uri="{FF2B5EF4-FFF2-40B4-BE49-F238E27FC236}">
+                <a16:creationId xmlns:a16="http://schemas.microsoft.com/office/drawing/2014/main" id="{F36D0318-3103-DD39-910B-1701314BFED9}"/>
+              </a:ext>
+            </a:extLst>
+          </p:cNvPr>
+          <p:cNvSpPr txBox="1"/>
+          <p:nvPr/>
+        </p:nvSpPr>
+        <p:spPr>
+          <a:xfrm>
+            <a:off x="838200" y="3752091"/>
+            <a:ext cx="3303917" cy="375053"/>
+          </a:xfrm>
+          <a:prstGeom prst="rect">
+            <a:avLst/>
+          </a:prstGeom>
+          <a:noFill/>
+        </p:spPr>
+        <p:txBody>
+          <a:bodyPr wrap="square" rtlCol="0">
+            <a:spAutoFit/>
+          </a:bodyPr>
+          <a:lstStyle/>
+          <a:p>
+            <a:r>
+              <a:rPr lang="en-US" dirty="0"/>
+              <a:t>Test set results</a:t>
+            </a:r>
+            <a:endParaRPr lang="en-IN" dirty="0"/>
+          </a:p>
+        </p:txBody>
+      </p:sp>
+      <p:sp>
+        <p:nvSpPr>
+          <p:cNvPr id="11" name="TextBox 10">
+            <a:extLst>
+              <a:ext uri="{FF2B5EF4-FFF2-40B4-BE49-F238E27FC236}">
+                <a16:creationId xmlns:a16="http://schemas.microsoft.com/office/drawing/2014/main" id="{6CDA8E5C-1A20-CA56-66C2-836A69FA1E48}"/>
+              </a:ext>
+            </a:extLst>
+          </p:cNvPr>
+          <p:cNvSpPr txBox="1"/>
+          <p:nvPr/>
+        </p:nvSpPr>
+        <p:spPr>
+          <a:xfrm>
+            <a:off x="7530860" y="4580626"/>
+            <a:ext cx="2191110" cy="646331"/>
+          </a:xfrm>
+          <a:prstGeom prst="rect">
+            <a:avLst/>
+          </a:prstGeom>
+          <a:noFill/>
+        </p:spPr>
+        <p:txBody>
+          <a:bodyPr wrap="square" rtlCol="0">
+            <a:spAutoFit/>
+          </a:bodyPr>
+          <a:lstStyle/>
+          <a:p>
+            <a:r>
+              <a:rPr lang="en-US" dirty="0"/>
+              <a:t>Test samples: 387 Test accuracy: 0.7494</a:t>
+            </a:r>
+            <a:endParaRPr lang="en-IN" dirty="0"/>
+          </a:p>
+        </p:txBody>
+      </p:sp>
+      <p:pic>
+        <p:nvPicPr>
+          <p:cNvPr id="4" name="Picture 3">
+            <a:extLst>
+              <a:ext uri="{FF2B5EF4-FFF2-40B4-BE49-F238E27FC236}">
+                <a16:creationId xmlns:a16="http://schemas.microsoft.com/office/drawing/2014/main" id="{6D0CE648-4BE5-A24B-5536-A363E6999757}"/>
+              </a:ext>
+            </a:extLst>
+          </p:cNvPr>
+          <p:cNvPicPr>
+            <a:picLocks noChangeAspect="1"/>
+          </p:cNvPicPr>
+          <p:nvPr/>
+        </p:nvPicPr>
+        <p:blipFill>
+          <a:blip r:embed="rId2"/>
+          <a:stretch>
+            <a:fillRect/>
+          </a:stretch>
+        </p:blipFill>
+        <p:spPr>
+          <a:xfrm>
+            <a:off x="838200" y="1690687"/>
+            <a:ext cx="6511506" cy="2082583"/>
+          </a:xfrm>
+          <a:prstGeom prst="rect">
+            <a:avLst/>
+          </a:prstGeom>
+        </p:spPr>
+      </p:pic>
+      <p:pic>
+        <p:nvPicPr>
+          <p:cNvPr id="6" name="Picture 5">
+            <a:extLst>
+              <a:ext uri="{FF2B5EF4-FFF2-40B4-BE49-F238E27FC236}">
+                <a16:creationId xmlns:a16="http://schemas.microsoft.com/office/drawing/2014/main" id="{55F350C3-F9B8-C6FB-AA0F-E23167F769BA}"/>
+              </a:ext>
+            </a:extLst>
+          </p:cNvPr>
+          <p:cNvPicPr>
+            <a:picLocks noChangeAspect="1"/>
+          </p:cNvPicPr>
+          <p:nvPr/>
+        </p:nvPicPr>
+        <p:blipFill>
+          <a:blip r:embed="rId3"/>
+          <a:stretch>
+            <a:fillRect/>
+          </a:stretch>
+        </p:blipFill>
+        <p:spPr>
+          <a:xfrm>
+            <a:off x="950343" y="4127144"/>
+            <a:ext cx="6511506" cy="2577251"/>
+          </a:xfrm>
+          <a:prstGeom prst="rect">
+            <a:avLst/>
+          </a:prstGeom>
+        </p:spPr>
+      </p:pic>
+      <p:sp>
+        <p:nvSpPr>
+          <p:cNvPr id="3" name="Slide Number Placeholder 2">
+            <a:extLst>
+              <a:ext uri="{FF2B5EF4-FFF2-40B4-BE49-F238E27FC236}">
+                <a16:creationId xmlns:a16="http://schemas.microsoft.com/office/drawing/2014/main" id="{DC8E9790-48CD-84C3-408E-7C7ABE1DB017}"/>
+              </a:ext>
+            </a:extLst>
+          </p:cNvPr>
+          <p:cNvSpPr>
+            <a:spLocks noGrp="1"/>
+          </p:cNvSpPr>
+          <p:nvPr>
+            <p:ph type="sldNum" sz="quarter" idx="12"/>
+          </p:nvPr>
+        </p:nvSpPr>
+        <p:spPr/>
+        <p:txBody>
+          <a:bodyPr/>
+          <a:lstStyle/>
+          <a:p>
+            <a:fld id="{FAF4F8EC-53F2-4EB2-97C1-60EB836CC882}" type="slidenum">
+              <a:rPr lang="en-IN" smtClean="0"/>
+              <a:t>20</a:t>
+            </a:fld>
+            <a:endParaRPr lang="en-IN"/>
+          </a:p>
+        </p:txBody>
+      </p:sp>
+    </p:spTree>
+    <p:extLst>
+      <p:ext uri="{BB962C8B-B14F-4D97-AF65-F5344CB8AC3E}">
+        <p14:creationId xmlns:p14="http://schemas.microsoft.com/office/powerpoint/2010/main" val="53803434"/>
+      </p:ext>
+    </p:extLst>
+  </p:cSld>
+  <p:clrMapOvr>
+    <a:masterClrMapping/>
+  </p:clrMapOvr>
+</p:sld>
+</file>
+
+<file path=ppt/slides/slide21.xml><?xml version="1.0" encoding="utf-8"?>
+<p:sld xmlns:a="http://schemas.openxmlformats.org/drawingml/2006/main" xmlns:r="http://schemas.openxmlformats.org/officeDocument/2006/relationships" xmlns:p="http://schemas.openxmlformats.org/presentationml/2006/main">
+  <p:cSld>
+    <p:spTree>
+      <p:nvGrpSpPr>
+        <p:cNvPr id="1" name=""/>
+        <p:cNvGrpSpPr/>
+        <p:nvPr/>
+      </p:nvGrpSpPr>
+      <p:grpSpPr>
+        <a:xfrm>
+          <a:off x="0" y="0"/>
+          <a:ext cx="0" cy="0"/>
+          <a:chOff x="0" y="0"/>
+          <a:chExt cx="0" cy="0"/>
+        </a:xfrm>
+      </p:grpSpPr>
+      <p:sp>
+        <p:nvSpPr>
+          <p:cNvPr id="2" name="Title 1">
+            <a:extLst>
+              <a:ext uri="{FF2B5EF4-FFF2-40B4-BE49-F238E27FC236}">
+                <a16:creationId xmlns:a16="http://schemas.microsoft.com/office/drawing/2014/main" id="{44F76F41-2AC2-92E4-3306-F7919242080B}"/>
+              </a:ext>
+            </a:extLst>
+          </p:cNvPr>
+          <p:cNvSpPr>
+            <a:spLocks noGrp="1"/>
+          </p:cNvSpPr>
+          <p:nvPr>
+            <p:ph type="title"/>
+          </p:nvPr>
+        </p:nvSpPr>
+        <p:spPr/>
+        <p:txBody>
+          <a:bodyPr/>
+          <a:lstStyle/>
+          <a:p>
+            <a:r>
+              <a:rPr lang="en-US" dirty="0"/>
+              <a:t>Hybrid QML- 3 class classification – Basic entangler 8 qubits, 1 rep</a:t>
+            </a:r>
+            <a:endParaRPr lang="en-IN" dirty="0"/>
+          </a:p>
+        </p:txBody>
+      </p:sp>
+      <p:pic>
+        <p:nvPicPr>
+          <p:cNvPr id="6" name="Picture 5">
+            <a:extLst>
+              <a:ext uri="{FF2B5EF4-FFF2-40B4-BE49-F238E27FC236}">
+                <a16:creationId xmlns:a16="http://schemas.microsoft.com/office/drawing/2014/main" id="{4407D620-3DC7-D5FB-E867-8A32FD42E8E8}"/>
+              </a:ext>
+            </a:extLst>
+          </p:cNvPr>
+          <p:cNvPicPr>
+            <a:picLocks noChangeAspect="1"/>
+          </p:cNvPicPr>
+          <p:nvPr/>
+        </p:nvPicPr>
+        <p:blipFill>
+          <a:blip r:embed="rId2"/>
+          <a:stretch>
+            <a:fillRect/>
+          </a:stretch>
+        </p:blipFill>
+        <p:spPr>
+          <a:xfrm>
+            <a:off x="838200" y="1509837"/>
+            <a:ext cx="8256578" cy="2684612"/>
+          </a:xfrm>
+          <a:prstGeom prst="rect">
+            <a:avLst/>
+          </a:prstGeom>
+        </p:spPr>
+      </p:pic>
+      <p:sp>
+        <p:nvSpPr>
+          <p:cNvPr id="7" name="TextBox 6">
+            <a:extLst>
+              <a:ext uri="{FF2B5EF4-FFF2-40B4-BE49-F238E27FC236}">
+                <a16:creationId xmlns:a16="http://schemas.microsoft.com/office/drawing/2014/main" id="{52F1D253-159B-9E8F-E86B-5F1D741A2287}"/>
+              </a:ext>
+            </a:extLst>
+          </p:cNvPr>
+          <p:cNvSpPr txBox="1"/>
+          <p:nvPr/>
+        </p:nvSpPr>
+        <p:spPr>
+          <a:xfrm>
+            <a:off x="9279731" y="1928813"/>
+            <a:ext cx="2586038" cy="923330"/>
+          </a:xfrm>
+          <a:prstGeom prst="rect">
+            <a:avLst/>
+          </a:prstGeom>
+          <a:noFill/>
+        </p:spPr>
+        <p:txBody>
+          <a:bodyPr wrap="square" rtlCol="0">
+            <a:spAutoFit/>
+          </a:bodyPr>
+          <a:lstStyle/>
+          <a:p>
+            <a:r>
+              <a:rPr lang="en-IN" dirty="0"/>
+              <a:t>Best epoch: 20 </a:t>
+            </a:r>
+          </a:p>
+          <a:p>
+            <a:r>
+              <a:rPr lang="en-IN" dirty="0"/>
+              <a:t>Train </a:t>
+            </a:r>
+            <a:r>
+              <a:rPr lang="en-IN" dirty="0" err="1"/>
+              <a:t>acc</a:t>
+            </a:r>
+            <a:r>
+              <a:rPr lang="en-IN" dirty="0"/>
+              <a:t>: 0.8403  </a:t>
+            </a:r>
+          </a:p>
+          <a:p>
+            <a:r>
+              <a:rPr lang="en-IN" dirty="0"/>
+              <a:t>Val </a:t>
+            </a:r>
+            <a:r>
+              <a:rPr lang="en-IN" dirty="0" err="1"/>
+              <a:t>acc</a:t>
+            </a:r>
+            <a:r>
+              <a:rPr lang="en-IN" dirty="0"/>
+              <a:t>: 0.8036</a:t>
+            </a:r>
+          </a:p>
+        </p:txBody>
+      </p:sp>
+      <p:sp>
+        <p:nvSpPr>
+          <p:cNvPr id="8" name="TextBox 7">
+            <a:extLst>
+              <a:ext uri="{FF2B5EF4-FFF2-40B4-BE49-F238E27FC236}">
+                <a16:creationId xmlns:a16="http://schemas.microsoft.com/office/drawing/2014/main" id="{4C3D9C4B-1A4D-78CF-3D20-19D506297CD6}"/>
+              </a:ext>
+            </a:extLst>
+          </p:cNvPr>
+          <p:cNvSpPr txBox="1"/>
+          <p:nvPr/>
+        </p:nvSpPr>
+        <p:spPr>
+          <a:xfrm>
+            <a:off x="1052513" y="4080704"/>
+            <a:ext cx="3303917" cy="375053"/>
+          </a:xfrm>
+          <a:prstGeom prst="rect">
+            <a:avLst/>
+          </a:prstGeom>
+          <a:noFill/>
+        </p:spPr>
+        <p:txBody>
+          <a:bodyPr wrap="square" rtlCol="0">
+            <a:spAutoFit/>
+          </a:bodyPr>
+          <a:lstStyle/>
+          <a:p>
+            <a:r>
+              <a:rPr lang="en-US" dirty="0"/>
+              <a:t>Test set results</a:t>
+            </a:r>
+            <a:endParaRPr lang="en-IN" dirty="0"/>
+          </a:p>
+        </p:txBody>
+      </p:sp>
+      <p:pic>
+        <p:nvPicPr>
+          <p:cNvPr id="10" name="Picture 9">
+            <a:extLst>
+              <a:ext uri="{FF2B5EF4-FFF2-40B4-BE49-F238E27FC236}">
+                <a16:creationId xmlns:a16="http://schemas.microsoft.com/office/drawing/2014/main" id="{86FA8033-4EAA-15FE-9BC3-3DBBB2B44CE2}"/>
+              </a:ext>
+            </a:extLst>
+          </p:cNvPr>
+          <p:cNvPicPr>
+            <a:picLocks noChangeAspect="1"/>
+          </p:cNvPicPr>
+          <p:nvPr/>
+        </p:nvPicPr>
+        <p:blipFill>
+          <a:blip r:embed="rId3"/>
+          <a:stretch>
+            <a:fillRect/>
+          </a:stretch>
+        </p:blipFill>
+        <p:spPr>
+          <a:xfrm>
+            <a:off x="909637" y="4455757"/>
+            <a:ext cx="5863456" cy="2300609"/>
+          </a:xfrm>
+          <a:prstGeom prst="rect">
+            <a:avLst/>
+          </a:prstGeom>
+        </p:spPr>
+      </p:pic>
+      <p:sp>
+        <p:nvSpPr>
+          <p:cNvPr id="11" name="TextBox 10">
+            <a:extLst>
+              <a:ext uri="{FF2B5EF4-FFF2-40B4-BE49-F238E27FC236}">
+                <a16:creationId xmlns:a16="http://schemas.microsoft.com/office/drawing/2014/main" id="{4E36C15A-2C21-C693-E541-84524DCB2598}"/>
+              </a:ext>
+            </a:extLst>
+          </p:cNvPr>
+          <p:cNvSpPr txBox="1"/>
+          <p:nvPr/>
+        </p:nvSpPr>
+        <p:spPr>
+          <a:xfrm>
+            <a:off x="7008019" y="4979194"/>
+            <a:ext cx="2900362" cy="646331"/>
+          </a:xfrm>
+          <a:prstGeom prst="rect">
+            <a:avLst/>
+          </a:prstGeom>
+          <a:noFill/>
+        </p:spPr>
+        <p:txBody>
+          <a:bodyPr wrap="square" rtlCol="0">
+            <a:spAutoFit/>
+          </a:bodyPr>
+          <a:lstStyle/>
+          <a:p>
+            <a:r>
+              <a:rPr lang="en-US" dirty="0"/>
+              <a:t>Test samples: 387 </a:t>
+            </a:r>
+          </a:p>
+          <a:p>
+            <a:r>
+              <a:rPr lang="en-US" dirty="0"/>
+              <a:t>Test accuracy: 0.7907</a:t>
+            </a:r>
+            <a:endParaRPr lang="en-IN" dirty="0"/>
+          </a:p>
+        </p:txBody>
+      </p:sp>
+      <p:sp>
+        <p:nvSpPr>
+          <p:cNvPr id="3" name="Slide Number Placeholder 2">
+            <a:extLst>
+              <a:ext uri="{FF2B5EF4-FFF2-40B4-BE49-F238E27FC236}">
+                <a16:creationId xmlns:a16="http://schemas.microsoft.com/office/drawing/2014/main" id="{F24C29DB-821D-88A0-FA90-5886C278FC70}"/>
+              </a:ext>
+            </a:extLst>
+          </p:cNvPr>
+          <p:cNvSpPr>
+            <a:spLocks noGrp="1"/>
+          </p:cNvSpPr>
+          <p:nvPr>
+            <p:ph type="sldNum" sz="quarter" idx="12"/>
+          </p:nvPr>
+        </p:nvSpPr>
+        <p:spPr/>
+        <p:txBody>
+          <a:bodyPr/>
+          <a:lstStyle/>
+          <a:p>
+            <a:fld id="{FAF4F8EC-53F2-4EB2-97C1-60EB836CC882}" type="slidenum">
+              <a:rPr lang="en-IN" smtClean="0"/>
+              <a:t>21</a:t>
+            </a:fld>
+            <a:endParaRPr lang="en-IN"/>
+          </a:p>
+        </p:txBody>
+      </p:sp>
+    </p:spTree>
+    <p:extLst>
+      <p:ext uri="{BB962C8B-B14F-4D97-AF65-F5344CB8AC3E}">
+        <p14:creationId xmlns:p14="http://schemas.microsoft.com/office/powerpoint/2010/main" val="3414256386"/>
+      </p:ext>
+    </p:extLst>
+  </p:cSld>
+  <p:clrMapOvr>
+    <a:masterClrMapping/>
+  </p:clrMapOvr>
+</p:sld>
+</file>
+
+<file path=ppt/slides/slide22.xml><?xml version="1.0" encoding="utf-8"?>
+<p:sld xmlns:a="http://schemas.openxmlformats.org/drawingml/2006/main" xmlns:r="http://schemas.openxmlformats.org/officeDocument/2006/relationships" xmlns:p="http://schemas.openxmlformats.org/presentationml/2006/main">
+  <p:cSld>
+    <p:spTree>
+      <p:nvGrpSpPr>
+        <p:cNvPr id="1" name="">
+          <a:extLst>
+            <a:ext uri="{FF2B5EF4-FFF2-40B4-BE49-F238E27FC236}">
+              <a16:creationId xmlns:a16="http://schemas.microsoft.com/office/drawing/2014/main" id="{A9F98FB9-1567-1698-A4A4-609651791B8A}"/>
+            </a:ext>
+          </a:extLst>
+        </p:cNvPr>
+        <p:cNvGrpSpPr/>
+        <p:nvPr/>
+      </p:nvGrpSpPr>
+      <p:grpSpPr>
+        <a:xfrm>
+          <a:off x="0" y="0"/>
+          <a:ext cx="0" cy="0"/>
+          <a:chOff x="0" y="0"/>
+          <a:chExt cx="0" cy="0"/>
+        </a:xfrm>
+      </p:grpSpPr>
+      <p:sp>
+        <p:nvSpPr>
+          <p:cNvPr id="2" name="Title 1">
+            <a:extLst>
+              <a:ext uri="{FF2B5EF4-FFF2-40B4-BE49-F238E27FC236}">
+                <a16:creationId xmlns:a16="http://schemas.microsoft.com/office/drawing/2014/main" id="{6C7F720D-D504-542D-7C85-568D45EBDC81}"/>
+              </a:ext>
+            </a:extLst>
+          </p:cNvPr>
+          <p:cNvSpPr>
+            <a:spLocks noGrp="1"/>
+          </p:cNvSpPr>
+          <p:nvPr>
+            <p:ph type="title"/>
+          </p:nvPr>
+        </p:nvSpPr>
+        <p:spPr/>
+        <p:txBody>
+          <a:bodyPr/>
+          <a:lstStyle/>
+          <a:p>
+            <a:r>
+              <a:rPr lang="en-US" dirty="0"/>
+              <a:t>Hybrid QML- 3 class classification – Basic entangler 8 qubits, 2 rep</a:t>
+            </a:r>
+            <a:endParaRPr lang="en-IN" dirty="0"/>
+          </a:p>
+        </p:txBody>
+      </p:sp>
+      <p:sp>
+        <p:nvSpPr>
+          <p:cNvPr id="7" name="TextBox 6">
+            <a:extLst>
+              <a:ext uri="{FF2B5EF4-FFF2-40B4-BE49-F238E27FC236}">
+                <a16:creationId xmlns:a16="http://schemas.microsoft.com/office/drawing/2014/main" id="{848DE4A4-F699-F5A3-7FA2-4FFFDCDE3BD2}"/>
+              </a:ext>
+            </a:extLst>
+          </p:cNvPr>
+          <p:cNvSpPr txBox="1"/>
+          <p:nvPr/>
+        </p:nvSpPr>
+        <p:spPr>
+          <a:xfrm>
+            <a:off x="7661186" y="2189953"/>
+            <a:ext cx="2775833" cy="923330"/>
+          </a:xfrm>
+          <a:prstGeom prst="rect">
+            <a:avLst/>
+          </a:prstGeom>
+          <a:noFill/>
+        </p:spPr>
+        <p:txBody>
+          <a:bodyPr wrap="square" rtlCol="0">
+            <a:spAutoFit/>
+          </a:bodyPr>
+          <a:lstStyle/>
+          <a:p>
+            <a:r>
+              <a:rPr lang="en-IN" dirty="0"/>
+              <a:t>Best epoch: 19 </a:t>
+            </a:r>
+          </a:p>
+          <a:p>
+            <a:r>
+              <a:rPr lang="en-IN" dirty="0"/>
+              <a:t>Train </a:t>
+            </a:r>
+            <a:r>
+              <a:rPr lang="en-IN" dirty="0" err="1"/>
+              <a:t>acc</a:t>
+            </a:r>
+            <a:r>
+              <a:rPr lang="en-IN" dirty="0"/>
+              <a:t>: 0.8020 </a:t>
+            </a:r>
+          </a:p>
+          <a:p>
+            <a:r>
+              <a:rPr lang="en-IN" dirty="0"/>
+              <a:t>Val </a:t>
+            </a:r>
+            <a:r>
+              <a:rPr lang="en-IN" dirty="0" err="1"/>
+              <a:t>acc</a:t>
+            </a:r>
+            <a:r>
+              <a:rPr lang="en-IN" dirty="0"/>
+              <a:t>: 0.7855</a:t>
+            </a:r>
+          </a:p>
+        </p:txBody>
+      </p:sp>
+      <p:sp>
+        <p:nvSpPr>
+          <p:cNvPr id="10" name="TextBox 9">
+            <a:extLst>
+              <a:ext uri="{FF2B5EF4-FFF2-40B4-BE49-F238E27FC236}">
+                <a16:creationId xmlns:a16="http://schemas.microsoft.com/office/drawing/2014/main" id="{E7DD2D62-45BA-8BF6-5719-F86D382CC4E2}"/>
+              </a:ext>
+            </a:extLst>
+          </p:cNvPr>
+          <p:cNvSpPr txBox="1"/>
+          <p:nvPr/>
+        </p:nvSpPr>
+        <p:spPr>
+          <a:xfrm>
+            <a:off x="838200" y="3752091"/>
+            <a:ext cx="3303917" cy="375053"/>
+          </a:xfrm>
+          <a:prstGeom prst="rect">
+            <a:avLst/>
+          </a:prstGeom>
+          <a:noFill/>
+        </p:spPr>
+        <p:txBody>
+          <a:bodyPr wrap="square" rtlCol="0">
+            <a:spAutoFit/>
+          </a:bodyPr>
+          <a:lstStyle/>
+          <a:p>
+            <a:r>
+              <a:rPr lang="en-US" dirty="0"/>
+              <a:t>Test set results</a:t>
+            </a:r>
+            <a:endParaRPr lang="en-IN" dirty="0"/>
+          </a:p>
+        </p:txBody>
+      </p:sp>
+      <p:sp>
+        <p:nvSpPr>
+          <p:cNvPr id="11" name="TextBox 10">
+            <a:extLst>
+              <a:ext uri="{FF2B5EF4-FFF2-40B4-BE49-F238E27FC236}">
+                <a16:creationId xmlns:a16="http://schemas.microsoft.com/office/drawing/2014/main" id="{6D9C562A-1E31-7F87-1833-23DD509C3A48}"/>
+              </a:ext>
+            </a:extLst>
+          </p:cNvPr>
+          <p:cNvSpPr txBox="1"/>
+          <p:nvPr/>
+        </p:nvSpPr>
+        <p:spPr>
+          <a:xfrm>
+            <a:off x="7661186" y="4573483"/>
+            <a:ext cx="2191110" cy="646331"/>
+          </a:xfrm>
+          <a:prstGeom prst="rect">
+            <a:avLst/>
+          </a:prstGeom>
+          <a:noFill/>
+        </p:spPr>
+        <p:txBody>
+          <a:bodyPr wrap="square" rtlCol="0">
+            <a:spAutoFit/>
+          </a:bodyPr>
+          <a:lstStyle/>
+          <a:p>
+            <a:r>
+              <a:rPr lang="en-US" dirty="0"/>
+              <a:t>Test samples: 387 Test accuracy: 0.7390 </a:t>
+            </a:r>
+            <a:endParaRPr lang="en-IN" dirty="0"/>
+          </a:p>
+        </p:txBody>
+      </p:sp>
+      <p:pic>
+        <p:nvPicPr>
+          <p:cNvPr id="5" name="Picture 4">
+            <a:extLst>
+              <a:ext uri="{FF2B5EF4-FFF2-40B4-BE49-F238E27FC236}">
+                <a16:creationId xmlns:a16="http://schemas.microsoft.com/office/drawing/2014/main" id="{435DA6D1-0AE5-0886-329D-8CBC36210157}"/>
+              </a:ext>
+            </a:extLst>
+          </p:cNvPr>
+          <p:cNvPicPr>
+            <a:picLocks noChangeAspect="1"/>
+          </p:cNvPicPr>
+          <p:nvPr/>
+        </p:nvPicPr>
+        <p:blipFill>
+          <a:blip r:embed="rId2"/>
+          <a:stretch>
+            <a:fillRect/>
+          </a:stretch>
+        </p:blipFill>
+        <p:spPr>
+          <a:xfrm>
+            <a:off x="968526" y="1610640"/>
+            <a:ext cx="6562334" cy="2141451"/>
+          </a:xfrm>
+          <a:prstGeom prst="rect">
+            <a:avLst/>
+          </a:prstGeom>
+        </p:spPr>
+      </p:pic>
+      <p:pic>
+        <p:nvPicPr>
+          <p:cNvPr id="9" name="Picture 8">
+            <a:extLst>
+              <a:ext uri="{FF2B5EF4-FFF2-40B4-BE49-F238E27FC236}">
+                <a16:creationId xmlns:a16="http://schemas.microsoft.com/office/drawing/2014/main" id="{35081ED4-8658-6858-3C99-485C04713369}"/>
+              </a:ext>
+            </a:extLst>
+          </p:cNvPr>
+          <p:cNvPicPr>
+            <a:picLocks noChangeAspect="1"/>
+          </p:cNvPicPr>
+          <p:nvPr/>
+        </p:nvPicPr>
+        <p:blipFill>
+          <a:blip r:embed="rId3"/>
+          <a:stretch>
+            <a:fillRect/>
+          </a:stretch>
+        </p:blipFill>
+        <p:spPr>
+          <a:xfrm>
+            <a:off x="990484" y="4127144"/>
+            <a:ext cx="6670702" cy="2608866"/>
+          </a:xfrm>
+          <a:prstGeom prst="rect">
+            <a:avLst/>
+          </a:prstGeom>
+        </p:spPr>
+      </p:pic>
+      <p:sp>
+        <p:nvSpPr>
+          <p:cNvPr id="3" name="Slide Number Placeholder 2">
+            <a:extLst>
+              <a:ext uri="{FF2B5EF4-FFF2-40B4-BE49-F238E27FC236}">
+                <a16:creationId xmlns:a16="http://schemas.microsoft.com/office/drawing/2014/main" id="{8D373835-0D55-11DC-7B3F-00E605129A9A}"/>
+              </a:ext>
+            </a:extLst>
+          </p:cNvPr>
+          <p:cNvSpPr>
+            <a:spLocks noGrp="1"/>
+          </p:cNvSpPr>
+          <p:nvPr>
+            <p:ph type="sldNum" sz="quarter" idx="12"/>
+          </p:nvPr>
+        </p:nvSpPr>
+        <p:spPr/>
+        <p:txBody>
+          <a:bodyPr/>
+          <a:lstStyle/>
+          <a:p>
+            <a:fld id="{FAF4F8EC-53F2-4EB2-97C1-60EB836CC882}" type="slidenum">
+              <a:rPr lang="en-IN" smtClean="0"/>
+              <a:t>22</a:t>
+            </a:fld>
+            <a:endParaRPr lang="en-IN"/>
+          </a:p>
+        </p:txBody>
+      </p:sp>
+    </p:spTree>
+    <p:extLst>
+      <p:ext uri="{BB962C8B-B14F-4D97-AF65-F5344CB8AC3E}">
+        <p14:creationId xmlns:p14="http://schemas.microsoft.com/office/powerpoint/2010/main" val="1661897433"/>
+      </p:ext>
+    </p:extLst>
+  </p:cSld>
+  <p:clrMapOvr>
+    <a:masterClrMapping/>
+  </p:clrMapOvr>
+</p:sld>
+</file>
+
+<file path=ppt/slides/slide23.xml><?xml version="1.0" encoding="utf-8"?>
+<p:sld xmlns:a="http://schemas.openxmlformats.org/drawingml/2006/main" xmlns:r="http://schemas.openxmlformats.org/officeDocument/2006/relationships" xmlns:p="http://schemas.openxmlformats.org/presentationml/2006/main">
+  <p:cSld>
+    <p:spTree>
+      <p:nvGrpSpPr>
+        <p:cNvPr id="1" name="">
+          <a:extLst>
+            <a:ext uri="{FF2B5EF4-FFF2-40B4-BE49-F238E27FC236}">
+              <a16:creationId xmlns:a16="http://schemas.microsoft.com/office/drawing/2014/main" id="{D6C22500-4DA6-42BB-BDDB-EBA94FF59CC9}"/>
+            </a:ext>
+          </a:extLst>
+        </p:cNvPr>
+        <p:cNvGrpSpPr/>
+        <p:nvPr/>
+      </p:nvGrpSpPr>
+      <p:grpSpPr>
+        <a:xfrm>
+          <a:off x="0" y="0"/>
+          <a:ext cx="0" cy="0"/>
+          <a:chOff x="0" y="0"/>
+          <a:chExt cx="0" cy="0"/>
+        </a:xfrm>
+      </p:grpSpPr>
+      <p:sp>
+        <p:nvSpPr>
+          <p:cNvPr id="2" name="Title 1">
+            <a:extLst>
+              <a:ext uri="{FF2B5EF4-FFF2-40B4-BE49-F238E27FC236}">
+                <a16:creationId xmlns:a16="http://schemas.microsoft.com/office/drawing/2014/main" id="{81EB342F-1D06-2842-3EAA-63D2A048B956}"/>
+              </a:ext>
+            </a:extLst>
+          </p:cNvPr>
+          <p:cNvSpPr>
+            <a:spLocks noGrp="1"/>
+          </p:cNvSpPr>
+          <p:nvPr>
+            <p:ph type="title"/>
+          </p:nvPr>
+        </p:nvSpPr>
+        <p:spPr/>
+        <p:txBody>
+          <a:bodyPr/>
+          <a:lstStyle/>
+          <a:p>
+            <a:r>
+              <a:rPr lang="en-US" dirty="0"/>
+              <a:t>Hybrid QML- 3 class classification – Basic entangler 8 qubits, 4 rep</a:t>
+            </a:r>
+            <a:endParaRPr lang="en-IN" dirty="0"/>
+          </a:p>
+        </p:txBody>
+      </p:sp>
+      <p:sp>
+        <p:nvSpPr>
+          <p:cNvPr id="7" name="TextBox 6">
+            <a:extLst>
+              <a:ext uri="{FF2B5EF4-FFF2-40B4-BE49-F238E27FC236}">
+                <a16:creationId xmlns:a16="http://schemas.microsoft.com/office/drawing/2014/main" id="{DB6C25B7-E038-1916-45FF-50FA8F4DDE32}"/>
+              </a:ext>
+            </a:extLst>
+          </p:cNvPr>
+          <p:cNvSpPr txBox="1"/>
+          <p:nvPr/>
+        </p:nvSpPr>
+        <p:spPr>
+          <a:xfrm>
+            <a:off x="7661186" y="2189953"/>
+            <a:ext cx="2775833" cy="923330"/>
+          </a:xfrm>
+          <a:prstGeom prst="rect">
+            <a:avLst/>
+          </a:prstGeom>
+          <a:noFill/>
+        </p:spPr>
+        <p:txBody>
+          <a:bodyPr wrap="square" rtlCol="0">
+            <a:spAutoFit/>
+          </a:bodyPr>
+          <a:lstStyle/>
+          <a:p>
+            <a:r>
+              <a:rPr lang="en-IN" dirty="0"/>
+              <a:t>Best epoch: 12 </a:t>
+            </a:r>
+          </a:p>
+          <a:p>
+            <a:r>
+              <a:rPr lang="en-IN" dirty="0"/>
+              <a:t>Train </a:t>
+            </a:r>
+            <a:r>
+              <a:rPr lang="en-IN" dirty="0" err="1"/>
+              <a:t>acc</a:t>
+            </a:r>
+            <a:r>
+              <a:rPr lang="en-IN" dirty="0"/>
+              <a:t>: 0.8236  </a:t>
+            </a:r>
+          </a:p>
+          <a:p>
+            <a:r>
+              <a:rPr lang="en-IN" dirty="0"/>
+              <a:t>Val </a:t>
+            </a:r>
+            <a:r>
+              <a:rPr lang="en-IN" dirty="0" err="1"/>
+              <a:t>acc</a:t>
+            </a:r>
+            <a:r>
+              <a:rPr lang="en-IN" dirty="0"/>
+              <a:t>: 0.7933</a:t>
+            </a:r>
+          </a:p>
+        </p:txBody>
+      </p:sp>
+      <p:sp>
+        <p:nvSpPr>
+          <p:cNvPr id="10" name="TextBox 9">
+            <a:extLst>
+              <a:ext uri="{FF2B5EF4-FFF2-40B4-BE49-F238E27FC236}">
+                <a16:creationId xmlns:a16="http://schemas.microsoft.com/office/drawing/2014/main" id="{5B07F22B-98BF-BC0A-005D-2296B70DBC34}"/>
+              </a:ext>
+            </a:extLst>
+          </p:cNvPr>
+          <p:cNvSpPr txBox="1"/>
+          <p:nvPr/>
+        </p:nvSpPr>
+        <p:spPr>
+          <a:xfrm>
+            <a:off x="838200" y="3752091"/>
+            <a:ext cx="3303917" cy="375053"/>
+          </a:xfrm>
+          <a:prstGeom prst="rect">
+            <a:avLst/>
+          </a:prstGeom>
+          <a:noFill/>
+        </p:spPr>
+        <p:txBody>
+          <a:bodyPr wrap="square" rtlCol="0">
+            <a:spAutoFit/>
+          </a:bodyPr>
+          <a:lstStyle/>
+          <a:p>
+            <a:r>
+              <a:rPr lang="en-US" dirty="0"/>
+              <a:t>Test set results</a:t>
+            </a:r>
+            <a:endParaRPr lang="en-IN" dirty="0"/>
+          </a:p>
+        </p:txBody>
+      </p:sp>
+      <p:sp>
+        <p:nvSpPr>
+          <p:cNvPr id="11" name="TextBox 10">
+            <a:extLst>
+              <a:ext uri="{FF2B5EF4-FFF2-40B4-BE49-F238E27FC236}">
+                <a16:creationId xmlns:a16="http://schemas.microsoft.com/office/drawing/2014/main" id="{DA643401-E27D-6C41-83F9-A5C71631E529}"/>
+              </a:ext>
+            </a:extLst>
+          </p:cNvPr>
+          <p:cNvSpPr txBox="1"/>
+          <p:nvPr/>
+        </p:nvSpPr>
+        <p:spPr>
+          <a:xfrm>
+            <a:off x="7661186" y="4573483"/>
+            <a:ext cx="2191110" cy="646331"/>
+          </a:xfrm>
+          <a:prstGeom prst="rect">
+            <a:avLst/>
+          </a:prstGeom>
+          <a:noFill/>
+        </p:spPr>
+        <p:txBody>
+          <a:bodyPr wrap="square" rtlCol="0">
+            <a:spAutoFit/>
+          </a:bodyPr>
+          <a:lstStyle/>
+          <a:p>
+            <a:r>
+              <a:rPr lang="en-US" dirty="0"/>
+              <a:t>Test samples: 387 Test accuracy: 0.7778</a:t>
+            </a:r>
+            <a:endParaRPr lang="en-IN" dirty="0"/>
+          </a:p>
+        </p:txBody>
+      </p:sp>
+      <p:pic>
+        <p:nvPicPr>
+          <p:cNvPr id="4" name="Picture 3">
+            <a:extLst>
+              <a:ext uri="{FF2B5EF4-FFF2-40B4-BE49-F238E27FC236}">
+                <a16:creationId xmlns:a16="http://schemas.microsoft.com/office/drawing/2014/main" id="{D753F2EE-A19D-769D-4612-B25AF4BD91BD}"/>
+              </a:ext>
+            </a:extLst>
+          </p:cNvPr>
+          <p:cNvPicPr>
+            <a:picLocks noChangeAspect="1"/>
+          </p:cNvPicPr>
+          <p:nvPr/>
+        </p:nvPicPr>
+        <p:blipFill>
+          <a:blip r:embed="rId2"/>
+          <a:stretch>
+            <a:fillRect/>
+          </a:stretch>
+        </p:blipFill>
+        <p:spPr>
+          <a:xfrm>
+            <a:off x="865442" y="1620226"/>
+            <a:ext cx="6553349" cy="2062784"/>
+          </a:xfrm>
+          <a:prstGeom prst="rect">
+            <a:avLst/>
+          </a:prstGeom>
+        </p:spPr>
+      </p:pic>
+      <p:pic>
+        <p:nvPicPr>
+          <p:cNvPr id="8" name="Picture 7">
+            <a:extLst>
+              <a:ext uri="{FF2B5EF4-FFF2-40B4-BE49-F238E27FC236}">
+                <a16:creationId xmlns:a16="http://schemas.microsoft.com/office/drawing/2014/main" id="{7EBF697F-7E34-A8DF-7245-A42E5DE23172}"/>
+              </a:ext>
+            </a:extLst>
+          </p:cNvPr>
+          <p:cNvPicPr>
+            <a:picLocks noChangeAspect="1"/>
+          </p:cNvPicPr>
+          <p:nvPr/>
+        </p:nvPicPr>
+        <p:blipFill>
+          <a:blip r:embed="rId3"/>
+          <a:stretch>
+            <a:fillRect/>
+          </a:stretch>
+        </p:blipFill>
+        <p:spPr>
+          <a:xfrm>
+            <a:off x="838200" y="4148537"/>
+            <a:ext cx="6092058" cy="2352965"/>
+          </a:xfrm>
+          <a:prstGeom prst="rect">
+            <a:avLst/>
+          </a:prstGeom>
+        </p:spPr>
+      </p:pic>
+      <p:sp>
+        <p:nvSpPr>
+          <p:cNvPr id="3" name="Slide Number Placeholder 2">
+            <a:extLst>
+              <a:ext uri="{FF2B5EF4-FFF2-40B4-BE49-F238E27FC236}">
+                <a16:creationId xmlns:a16="http://schemas.microsoft.com/office/drawing/2014/main" id="{34675767-4D84-E276-94B6-F2CA5494FEA3}"/>
+              </a:ext>
+            </a:extLst>
+          </p:cNvPr>
+          <p:cNvSpPr>
+            <a:spLocks noGrp="1"/>
+          </p:cNvSpPr>
+          <p:nvPr>
+            <p:ph type="sldNum" sz="quarter" idx="12"/>
+          </p:nvPr>
+        </p:nvSpPr>
+        <p:spPr/>
+        <p:txBody>
+          <a:bodyPr/>
+          <a:lstStyle/>
+          <a:p>
+            <a:fld id="{FAF4F8EC-53F2-4EB2-97C1-60EB836CC882}" type="slidenum">
+              <a:rPr lang="en-IN" smtClean="0"/>
+              <a:t>23</a:t>
+            </a:fld>
+            <a:endParaRPr lang="en-IN"/>
+          </a:p>
+        </p:txBody>
+      </p:sp>
+    </p:spTree>
+    <p:extLst>
+      <p:ext uri="{BB962C8B-B14F-4D97-AF65-F5344CB8AC3E}">
+        <p14:creationId xmlns:p14="http://schemas.microsoft.com/office/powerpoint/2010/main" val="1623677410"/>
+      </p:ext>
+    </p:extLst>
+  </p:cSld>
+  <p:clrMapOvr>
+    <a:masterClrMapping/>
+  </p:clrMapOvr>
+</p:sld>
+</file>
+
+<file path=ppt/slides/slide24.xml><?xml version="1.0" encoding="utf-8"?>
+<p:sld xmlns:a="http://schemas.openxmlformats.org/drawingml/2006/main" xmlns:r="http://schemas.openxmlformats.org/officeDocument/2006/relationships" xmlns:p="http://schemas.openxmlformats.org/presentationml/2006/main">
+  <p:cSld>
+    <p:spTree>
+      <p:nvGrpSpPr>
+        <p:cNvPr id="1" name="">
+          <a:extLst>
+            <a:ext uri="{FF2B5EF4-FFF2-40B4-BE49-F238E27FC236}">
+              <a16:creationId xmlns:a16="http://schemas.microsoft.com/office/drawing/2014/main" id="{A4D0291C-3C23-0216-35A3-0FA4175451DA}"/>
+            </a:ext>
+          </a:extLst>
+        </p:cNvPr>
+        <p:cNvGrpSpPr/>
+        <p:nvPr/>
+      </p:nvGrpSpPr>
+      <p:grpSpPr>
+        <a:xfrm>
+          <a:off x="0" y="0"/>
+          <a:ext cx="0" cy="0"/>
+          <a:chOff x="0" y="0"/>
+          <a:chExt cx="0" cy="0"/>
+        </a:xfrm>
+      </p:grpSpPr>
+      <p:sp>
+        <p:nvSpPr>
+          <p:cNvPr id="2" name="Title 1">
+            <a:extLst>
+              <a:ext uri="{FF2B5EF4-FFF2-40B4-BE49-F238E27FC236}">
+                <a16:creationId xmlns:a16="http://schemas.microsoft.com/office/drawing/2014/main" id="{463E7538-A1A2-851E-2A17-FE216BD7B25B}"/>
+              </a:ext>
+            </a:extLst>
+          </p:cNvPr>
+          <p:cNvSpPr>
+            <a:spLocks noGrp="1"/>
+          </p:cNvSpPr>
+          <p:nvPr>
+            <p:ph type="title"/>
+          </p:nvPr>
+        </p:nvSpPr>
+        <p:spPr/>
+        <p:txBody>
+          <a:bodyPr/>
+          <a:lstStyle/>
+          <a:p>
+            <a:r>
+              <a:rPr lang="en-US" dirty="0"/>
+              <a:t>Hybrid QML- 3 class classification – Basic entangler 16 qubits, 1 rep</a:t>
+            </a:r>
+            <a:endParaRPr lang="en-IN" dirty="0"/>
+          </a:p>
+        </p:txBody>
+      </p:sp>
+      <p:sp>
+        <p:nvSpPr>
+          <p:cNvPr id="7" name="TextBox 6">
+            <a:extLst>
+              <a:ext uri="{FF2B5EF4-FFF2-40B4-BE49-F238E27FC236}">
+                <a16:creationId xmlns:a16="http://schemas.microsoft.com/office/drawing/2014/main" id="{0024F242-A09C-A861-C03E-43C6F1715AB6}"/>
+              </a:ext>
+            </a:extLst>
+          </p:cNvPr>
+          <p:cNvSpPr txBox="1"/>
+          <p:nvPr/>
+        </p:nvSpPr>
+        <p:spPr>
+          <a:xfrm>
+            <a:off x="7773188" y="2189953"/>
+            <a:ext cx="2775833" cy="923330"/>
+          </a:xfrm>
+          <a:prstGeom prst="rect">
+            <a:avLst/>
+          </a:prstGeom>
+          <a:noFill/>
+        </p:spPr>
+        <p:txBody>
+          <a:bodyPr wrap="square" rtlCol="0">
+            <a:spAutoFit/>
+          </a:bodyPr>
+          <a:lstStyle/>
+          <a:p>
+            <a:r>
+              <a:rPr lang="en-IN" dirty="0"/>
+              <a:t>Best epoch: 25 </a:t>
+            </a:r>
+          </a:p>
+          <a:p>
+            <a:r>
+              <a:rPr lang="en-IN" dirty="0"/>
+              <a:t>Train </a:t>
+            </a:r>
+            <a:r>
+              <a:rPr lang="en-IN" dirty="0" err="1"/>
+              <a:t>acc</a:t>
+            </a:r>
+            <a:r>
+              <a:rPr lang="en-IN" dirty="0"/>
+              <a:t>: 0.8486 </a:t>
+            </a:r>
+          </a:p>
+          <a:p>
+            <a:r>
+              <a:rPr lang="en-IN" dirty="0"/>
+              <a:t>Val </a:t>
+            </a:r>
+            <a:r>
+              <a:rPr lang="en-IN" dirty="0" err="1"/>
+              <a:t>acc</a:t>
+            </a:r>
+            <a:r>
+              <a:rPr lang="en-IN" dirty="0"/>
+              <a:t>: 0.7726</a:t>
+            </a:r>
+          </a:p>
+        </p:txBody>
+      </p:sp>
+      <p:sp>
+        <p:nvSpPr>
+          <p:cNvPr id="10" name="TextBox 9">
+            <a:extLst>
+              <a:ext uri="{FF2B5EF4-FFF2-40B4-BE49-F238E27FC236}">
+                <a16:creationId xmlns:a16="http://schemas.microsoft.com/office/drawing/2014/main" id="{27DAEBAD-C765-90B2-8101-C5D12D965F59}"/>
+              </a:ext>
+            </a:extLst>
+          </p:cNvPr>
+          <p:cNvSpPr txBox="1"/>
+          <p:nvPr/>
+        </p:nvSpPr>
+        <p:spPr>
+          <a:xfrm>
+            <a:off x="838200" y="3752091"/>
+            <a:ext cx="3303917" cy="375053"/>
+          </a:xfrm>
+          <a:prstGeom prst="rect">
+            <a:avLst/>
+          </a:prstGeom>
+          <a:noFill/>
+        </p:spPr>
+        <p:txBody>
+          <a:bodyPr wrap="square" rtlCol="0">
+            <a:spAutoFit/>
+          </a:bodyPr>
+          <a:lstStyle/>
+          <a:p>
+            <a:r>
+              <a:rPr lang="en-US" dirty="0"/>
+              <a:t>Test set results</a:t>
+            </a:r>
+            <a:endParaRPr lang="en-IN" dirty="0"/>
+          </a:p>
+        </p:txBody>
+      </p:sp>
+      <p:sp>
+        <p:nvSpPr>
+          <p:cNvPr id="11" name="TextBox 10">
+            <a:extLst>
+              <a:ext uri="{FF2B5EF4-FFF2-40B4-BE49-F238E27FC236}">
+                <a16:creationId xmlns:a16="http://schemas.microsoft.com/office/drawing/2014/main" id="{1AB6216A-9535-DDA0-F2F9-7B224212A0B4}"/>
+              </a:ext>
+            </a:extLst>
+          </p:cNvPr>
+          <p:cNvSpPr txBox="1"/>
+          <p:nvPr/>
+        </p:nvSpPr>
+        <p:spPr>
+          <a:xfrm>
+            <a:off x="7661186" y="4573483"/>
+            <a:ext cx="2191110" cy="646331"/>
+          </a:xfrm>
+          <a:prstGeom prst="rect">
+            <a:avLst/>
+          </a:prstGeom>
+          <a:noFill/>
+        </p:spPr>
+        <p:txBody>
+          <a:bodyPr wrap="square" rtlCol="0">
+            <a:spAutoFit/>
+          </a:bodyPr>
+          <a:lstStyle/>
+          <a:p>
+            <a:r>
+              <a:rPr lang="en-US" dirty="0"/>
+              <a:t>Test samples: 387 Test accuracy: 0.7700</a:t>
+            </a:r>
+            <a:endParaRPr lang="en-IN" dirty="0"/>
+          </a:p>
+        </p:txBody>
+      </p:sp>
+      <p:pic>
+        <p:nvPicPr>
+          <p:cNvPr id="5" name="Picture 4">
+            <a:extLst>
+              <a:ext uri="{FF2B5EF4-FFF2-40B4-BE49-F238E27FC236}">
+                <a16:creationId xmlns:a16="http://schemas.microsoft.com/office/drawing/2014/main" id="{64ACE42B-F808-33EE-1532-CDF584C61EE6}"/>
+              </a:ext>
+            </a:extLst>
+          </p:cNvPr>
+          <p:cNvPicPr>
+            <a:picLocks noChangeAspect="1"/>
+          </p:cNvPicPr>
+          <p:nvPr/>
+        </p:nvPicPr>
+        <p:blipFill>
+          <a:blip r:embed="rId2"/>
+          <a:stretch>
+            <a:fillRect/>
+          </a:stretch>
+        </p:blipFill>
+        <p:spPr>
+          <a:xfrm>
+            <a:off x="838200" y="1535710"/>
+            <a:ext cx="6934988" cy="2231816"/>
+          </a:xfrm>
+          <a:prstGeom prst="rect">
+            <a:avLst/>
+          </a:prstGeom>
+        </p:spPr>
+      </p:pic>
+      <p:pic>
+        <p:nvPicPr>
+          <p:cNvPr id="9" name="Picture 8">
+            <a:extLst>
+              <a:ext uri="{FF2B5EF4-FFF2-40B4-BE49-F238E27FC236}">
+                <a16:creationId xmlns:a16="http://schemas.microsoft.com/office/drawing/2014/main" id="{E1AE4B65-5275-ACB1-B97F-A2DB71E2A678}"/>
+              </a:ext>
+            </a:extLst>
+          </p:cNvPr>
+          <p:cNvPicPr>
+            <a:picLocks noChangeAspect="1"/>
+          </p:cNvPicPr>
+          <p:nvPr/>
+        </p:nvPicPr>
+        <p:blipFill>
+          <a:blip r:embed="rId3"/>
+          <a:stretch>
+            <a:fillRect/>
+          </a:stretch>
+        </p:blipFill>
+        <p:spPr>
+          <a:xfrm>
+            <a:off x="838200" y="4261377"/>
+            <a:ext cx="5422929" cy="2121825"/>
+          </a:xfrm>
+          <a:prstGeom prst="rect">
+            <a:avLst/>
+          </a:prstGeom>
+        </p:spPr>
+      </p:pic>
+      <p:sp>
+        <p:nvSpPr>
+          <p:cNvPr id="3" name="Slide Number Placeholder 2">
+            <a:extLst>
+              <a:ext uri="{FF2B5EF4-FFF2-40B4-BE49-F238E27FC236}">
+                <a16:creationId xmlns:a16="http://schemas.microsoft.com/office/drawing/2014/main" id="{8AAB8937-374C-E13E-87A1-F8207F372FD5}"/>
+              </a:ext>
+            </a:extLst>
+          </p:cNvPr>
+          <p:cNvSpPr>
+            <a:spLocks noGrp="1"/>
+          </p:cNvSpPr>
+          <p:nvPr>
+            <p:ph type="sldNum" sz="quarter" idx="12"/>
+          </p:nvPr>
+        </p:nvSpPr>
+        <p:spPr/>
+        <p:txBody>
+          <a:bodyPr/>
+          <a:lstStyle/>
+          <a:p>
+            <a:fld id="{FAF4F8EC-53F2-4EB2-97C1-60EB836CC882}" type="slidenum">
+              <a:rPr lang="en-IN" smtClean="0"/>
+              <a:t>24</a:t>
+            </a:fld>
+            <a:endParaRPr lang="en-IN"/>
+          </a:p>
+        </p:txBody>
+      </p:sp>
+    </p:spTree>
+    <p:extLst>
+      <p:ext uri="{BB962C8B-B14F-4D97-AF65-F5344CB8AC3E}">
+        <p14:creationId xmlns:p14="http://schemas.microsoft.com/office/powerpoint/2010/main" val="1398610178"/>
+      </p:ext>
+    </p:extLst>
+  </p:cSld>
+  <p:clrMapOvr>
+    <a:masterClrMapping/>
+  </p:clrMapOvr>
+</p:sld>
+</file>
+
+<file path=ppt/slides/slide25.xml><?xml version="1.0" encoding="utf-8"?>
+<p:sld xmlns:a="http://schemas.openxmlformats.org/drawingml/2006/main" xmlns:r="http://schemas.openxmlformats.org/officeDocument/2006/relationships" xmlns:p="http://schemas.openxmlformats.org/presentationml/2006/main">
+  <p:cSld>
+    <p:spTree>
+      <p:nvGrpSpPr>
+        <p:cNvPr id="1" name="">
+          <a:extLst>
+            <a:ext uri="{FF2B5EF4-FFF2-40B4-BE49-F238E27FC236}">
+              <a16:creationId xmlns:a16="http://schemas.microsoft.com/office/drawing/2014/main" id="{948DDCFB-B20F-2DB6-C0DC-7CC5AA1F5EAF}"/>
+            </a:ext>
+          </a:extLst>
+        </p:cNvPr>
+        <p:cNvGrpSpPr/>
+        <p:nvPr/>
+      </p:nvGrpSpPr>
+      <p:grpSpPr>
+        <a:xfrm>
+          <a:off x="0" y="0"/>
+          <a:ext cx="0" cy="0"/>
+          <a:chOff x="0" y="0"/>
+          <a:chExt cx="0" cy="0"/>
+        </a:xfrm>
+      </p:grpSpPr>
+      <p:sp>
+        <p:nvSpPr>
+          <p:cNvPr id="2" name="Title 1">
+            <a:extLst>
+              <a:ext uri="{FF2B5EF4-FFF2-40B4-BE49-F238E27FC236}">
+                <a16:creationId xmlns:a16="http://schemas.microsoft.com/office/drawing/2014/main" id="{E8AD137C-BB5E-42E1-09B3-226DDDE1B557}"/>
+              </a:ext>
+            </a:extLst>
+          </p:cNvPr>
+          <p:cNvSpPr>
+            <a:spLocks noGrp="1"/>
+          </p:cNvSpPr>
+          <p:nvPr>
+            <p:ph type="title"/>
+          </p:nvPr>
+        </p:nvSpPr>
+        <p:spPr/>
+        <p:txBody>
+          <a:bodyPr/>
+          <a:lstStyle/>
+          <a:p>
+            <a:r>
+              <a:rPr lang="en-US" dirty="0"/>
+              <a:t>Hybrid QML- 3 class classification – Strong entangler 4 qubits, 2 rep</a:t>
+            </a:r>
+            <a:endParaRPr lang="en-IN" dirty="0"/>
+          </a:p>
+        </p:txBody>
+      </p:sp>
+      <p:sp>
+        <p:nvSpPr>
+          <p:cNvPr id="7" name="TextBox 6">
+            <a:extLst>
+              <a:ext uri="{FF2B5EF4-FFF2-40B4-BE49-F238E27FC236}">
+                <a16:creationId xmlns:a16="http://schemas.microsoft.com/office/drawing/2014/main" id="{A1820359-51FA-0855-8B19-9437A866E943}"/>
+              </a:ext>
+            </a:extLst>
+          </p:cNvPr>
+          <p:cNvSpPr txBox="1"/>
+          <p:nvPr/>
+        </p:nvSpPr>
+        <p:spPr>
+          <a:xfrm>
+            <a:off x="7980356" y="2060683"/>
+            <a:ext cx="2775833" cy="923330"/>
+          </a:xfrm>
+          <a:prstGeom prst="rect">
+            <a:avLst/>
+          </a:prstGeom>
+          <a:noFill/>
+        </p:spPr>
+        <p:txBody>
+          <a:bodyPr wrap="square" rtlCol="0">
+            <a:spAutoFit/>
+          </a:bodyPr>
+          <a:lstStyle/>
+          <a:p>
+            <a:r>
+              <a:rPr lang="en-IN" dirty="0"/>
+              <a:t>Best epoch: 28 </a:t>
+            </a:r>
+          </a:p>
+          <a:p>
+            <a:r>
+              <a:rPr lang="en-IN" dirty="0"/>
+              <a:t>Train </a:t>
+            </a:r>
+            <a:r>
+              <a:rPr lang="en-IN" dirty="0" err="1"/>
+              <a:t>acc</a:t>
+            </a:r>
+            <a:r>
+              <a:rPr lang="en-IN" dirty="0"/>
+              <a:t>: 0.8688 </a:t>
+            </a:r>
+          </a:p>
+          <a:p>
+            <a:r>
+              <a:rPr lang="en-IN" dirty="0"/>
+              <a:t>Val </a:t>
+            </a:r>
+            <a:r>
+              <a:rPr lang="en-IN" dirty="0" err="1"/>
+              <a:t>acc</a:t>
+            </a:r>
+            <a:r>
+              <a:rPr lang="en-IN" dirty="0"/>
+              <a:t>: 0.7726</a:t>
+            </a:r>
+          </a:p>
+        </p:txBody>
+      </p:sp>
+      <p:sp>
+        <p:nvSpPr>
+          <p:cNvPr id="10" name="TextBox 9">
+            <a:extLst>
+              <a:ext uri="{FF2B5EF4-FFF2-40B4-BE49-F238E27FC236}">
+                <a16:creationId xmlns:a16="http://schemas.microsoft.com/office/drawing/2014/main" id="{05D8520C-FDA2-E9FC-0E10-CB2F3CD6A35F}"/>
+              </a:ext>
+            </a:extLst>
+          </p:cNvPr>
+          <p:cNvSpPr txBox="1"/>
+          <p:nvPr/>
+        </p:nvSpPr>
+        <p:spPr>
+          <a:xfrm>
+            <a:off x="838200" y="3752091"/>
+            <a:ext cx="3303917" cy="375053"/>
+          </a:xfrm>
+          <a:prstGeom prst="rect">
+            <a:avLst/>
+          </a:prstGeom>
+          <a:noFill/>
+        </p:spPr>
+        <p:txBody>
+          <a:bodyPr wrap="square" rtlCol="0">
+            <a:spAutoFit/>
+          </a:bodyPr>
+          <a:lstStyle/>
+          <a:p>
+            <a:r>
+              <a:rPr lang="en-US" dirty="0"/>
+              <a:t>Test set results</a:t>
+            </a:r>
+            <a:endParaRPr lang="en-IN" dirty="0"/>
+          </a:p>
+        </p:txBody>
+      </p:sp>
+      <p:sp>
+        <p:nvSpPr>
+          <p:cNvPr id="11" name="TextBox 10">
+            <a:extLst>
+              <a:ext uri="{FF2B5EF4-FFF2-40B4-BE49-F238E27FC236}">
+                <a16:creationId xmlns:a16="http://schemas.microsoft.com/office/drawing/2014/main" id="{6587380A-FD9C-81CB-3FCE-2E43AFB10428}"/>
+              </a:ext>
+            </a:extLst>
+          </p:cNvPr>
+          <p:cNvSpPr txBox="1"/>
+          <p:nvPr/>
+        </p:nvSpPr>
+        <p:spPr>
+          <a:xfrm>
+            <a:off x="7661186" y="4573483"/>
+            <a:ext cx="2191110" cy="646331"/>
+          </a:xfrm>
+          <a:prstGeom prst="rect">
+            <a:avLst/>
+          </a:prstGeom>
+          <a:noFill/>
+        </p:spPr>
+        <p:txBody>
+          <a:bodyPr wrap="square" rtlCol="0">
+            <a:spAutoFit/>
+          </a:bodyPr>
+          <a:lstStyle/>
+          <a:p>
+            <a:r>
+              <a:rPr lang="en-US" dirty="0"/>
+              <a:t>Test samples: 387 Test accuracy: 0.7700</a:t>
+            </a:r>
+            <a:endParaRPr lang="en-IN" dirty="0"/>
+          </a:p>
+        </p:txBody>
+      </p:sp>
+      <p:pic>
+        <p:nvPicPr>
+          <p:cNvPr id="4" name="Picture 3">
+            <a:extLst>
+              <a:ext uri="{FF2B5EF4-FFF2-40B4-BE49-F238E27FC236}">
+                <a16:creationId xmlns:a16="http://schemas.microsoft.com/office/drawing/2014/main" id="{F94DF538-36A2-6AF9-BF95-57CC458D0552}"/>
+              </a:ext>
+            </a:extLst>
+          </p:cNvPr>
+          <p:cNvPicPr>
+            <a:picLocks noChangeAspect="1"/>
+          </p:cNvPicPr>
+          <p:nvPr/>
+        </p:nvPicPr>
+        <p:blipFill>
+          <a:blip r:embed="rId2"/>
+          <a:stretch>
+            <a:fillRect/>
+          </a:stretch>
+        </p:blipFill>
+        <p:spPr>
+          <a:xfrm>
+            <a:off x="985837" y="1569106"/>
+            <a:ext cx="6675349" cy="2172717"/>
+          </a:xfrm>
+          <a:prstGeom prst="rect">
+            <a:avLst/>
+          </a:prstGeom>
+        </p:spPr>
+      </p:pic>
+      <p:pic>
+        <p:nvPicPr>
+          <p:cNvPr id="8" name="Picture 7">
+            <a:extLst>
+              <a:ext uri="{FF2B5EF4-FFF2-40B4-BE49-F238E27FC236}">
+                <a16:creationId xmlns:a16="http://schemas.microsoft.com/office/drawing/2014/main" id="{0D118DFA-CD70-7BA4-92CB-4EB36FB0A967}"/>
+              </a:ext>
+            </a:extLst>
+          </p:cNvPr>
+          <p:cNvPicPr>
+            <a:picLocks noChangeAspect="1"/>
+          </p:cNvPicPr>
+          <p:nvPr/>
+        </p:nvPicPr>
+        <p:blipFill>
+          <a:blip r:embed="rId3"/>
+          <a:stretch>
+            <a:fillRect/>
+          </a:stretch>
+        </p:blipFill>
+        <p:spPr>
+          <a:xfrm>
+            <a:off x="895350" y="4239898"/>
+            <a:ext cx="5839640" cy="2252977"/>
+          </a:xfrm>
+          <a:prstGeom prst="rect">
+            <a:avLst/>
+          </a:prstGeom>
+        </p:spPr>
+      </p:pic>
+      <p:sp>
+        <p:nvSpPr>
+          <p:cNvPr id="3" name="Slide Number Placeholder 2">
+            <a:extLst>
+              <a:ext uri="{FF2B5EF4-FFF2-40B4-BE49-F238E27FC236}">
+                <a16:creationId xmlns:a16="http://schemas.microsoft.com/office/drawing/2014/main" id="{AB3CB1A6-7109-14E9-C80D-04A1E6DE0D47}"/>
+              </a:ext>
+            </a:extLst>
+          </p:cNvPr>
+          <p:cNvSpPr>
+            <a:spLocks noGrp="1"/>
+          </p:cNvSpPr>
+          <p:nvPr>
+            <p:ph type="sldNum" sz="quarter" idx="12"/>
+          </p:nvPr>
+        </p:nvSpPr>
+        <p:spPr/>
+        <p:txBody>
+          <a:bodyPr/>
+          <a:lstStyle/>
+          <a:p>
+            <a:fld id="{FAF4F8EC-53F2-4EB2-97C1-60EB836CC882}" type="slidenum">
+              <a:rPr lang="en-IN" smtClean="0"/>
+              <a:t>25</a:t>
+            </a:fld>
+            <a:endParaRPr lang="en-IN"/>
+          </a:p>
+        </p:txBody>
+      </p:sp>
+    </p:spTree>
+    <p:extLst>
+      <p:ext uri="{BB962C8B-B14F-4D97-AF65-F5344CB8AC3E}">
+        <p14:creationId xmlns:p14="http://schemas.microsoft.com/office/powerpoint/2010/main" val="4138906995"/>
+      </p:ext>
+    </p:extLst>
+  </p:cSld>
+  <p:clrMapOvr>
+    <a:masterClrMapping/>
+  </p:clrMapOvr>
+</p:sld>
+</file>
+
+<file path=ppt/slides/slide3.xml><?xml version="1.0" encoding="utf-8"?>
+<p:sld xmlns:a="http://schemas.openxmlformats.org/drawingml/2006/main" xmlns:r="http://schemas.openxmlformats.org/officeDocument/2006/relationships" xmlns:p="http://schemas.openxmlformats.org/presentationml/2006/main">
+  <p:cSld>
+    <p:spTree>
+      <p:nvGrpSpPr>
+        <p:cNvPr id="1" name=""/>
+        <p:cNvGrpSpPr/>
+        <p:nvPr/>
+      </p:nvGrpSpPr>
+      <p:grpSpPr>
+        <a:xfrm>
+          <a:off x="0" y="0"/>
+          <a:ext cx="0" cy="0"/>
+          <a:chOff x="0" y="0"/>
+          <a:chExt cx="0" cy="0"/>
+        </a:xfrm>
+      </p:grpSpPr>
+      <p:sp>
+        <p:nvSpPr>
+          <p:cNvPr id="2" name="Title 1">
+            <a:extLst>
+              <a:ext uri="{FF2B5EF4-FFF2-40B4-BE49-F238E27FC236}">
+                <a16:creationId xmlns:a16="http://schemas.microsoft.com/office/drawing/2014/main" id="{DB1D95E4-3549-AC8A-87B5-3A3AE2A40FD3}"/>
+              </a:ext>
+            </a:extLst>
+          </p:cNvPr>
+          <p:cNvSpPr>
+            <a:spLocks noGrp="1"/>
+          </p:cNvSpPr>
+          <p:nvPr>
+            <p:ph type="title"/>
+          </p:nvPr>
+        </p:nvSpPr>
+        <p:spPr/>
+        <p:txBody>
+          <a:bodyPr/>
+          <a:lstStyle/>
+          <a:p>
+            <a:r>
+              <a:rPr lang="en-US" dirty="0"/>
+              <a:t>Mann –Whitney / </a:t>
+            </a:r>
+            <a:r>
+              <a:rPr lang="en-IN" dirty="0"/>
+              <a:t>Kruskal-Wallis test</a:t>
+            </a:r>
+          </a:p>
+        </p:txBody>
+      </p:sp>
+      <p:sp>
+        <p:nvSpPr>
+          <p:cNvPr id="3" name="Content Placeholder 2">
+            <a:extLst>
+              <a:ext uri="{FF2B5EF4-FFF2-40B4-BE49-F238E27FC236}">
+                <a16:creationId xmlns:a16="http://schemas.microsoft.com/office/drawing/2014/main" id="{A3E1BC5E-E5A5-546D-3070-7DAF3A783832}"/>
+              </a:ext>
+            </a:extLst>
+          </p:cNvPr>
+          <p:cNvSpPr>
+            <a:spLocks noGrp="1"/>
+          </p:cNvSpPr>
+          <p:nvPr>
+            <p:ph idx="1"/>
+          </p:nvPr>
+        </p:nvSpPr>
+        <p:spPr>
+          <a:xfrm>
+            <a:off x="838200" y="1443038"/>
+            <a:ext cx="10515600" cy="4733925"/>
+          </a:xfrm>
+        </p:spPr>
+        <p:txBody>
+          <a:bodyPr>
+            <a:normAutofit/>
+          </a:bodyPr>
+          <a:lstStyle/>
+          <a:p>
+            <a:r>
+              <a:rPr lang="en-IN" sz="1800" dirty="0"/>
+              <a:t>An orally active drug-like compound should not have more than one violation. The Lipinski's Rule stated the following:</a:t>
+            </a:r>
+          </a:p>
+          <a:p>
+            <a:pPr lvl="1"/>
+            <a:r>
+              <a:rPr lang="en-IN" sz="1400" dirty="0"/>
+              <a:t>Molecular weight (MW) &lt; 500 Dalton</a:t>
+            </a:r>
+          </a:p>
+          <a:p>
+            <a:pPr lvl="1"/>
+            <a:r>
+              <a:rPr lang="en-IN" sz="1400" dirty="0"/>
+              <a:t>Octanol-water partition coefficient (</a:t>
+            </a:r>
+            <a:r>
+              <a:rPr lang="en-IN" sz="1400" dirty="0" err="1"/>
+              <a:t>LogP</a:t>
+            </a:r>
+            <a:r>
+              <a:rPr lang="en-IN" sz="1400" dirty="0"/>
+              <a:t>) &lt; 5</a:t>
+            </a:r>
+          </a:p>
+          <a:p>
+            <a:pPr lvl="1"/>
+            <a:r>
+              <a:rPr lang="en-IN" sz="1400" dirty="0"/>
+              <a:t>Hydrogen bond donors (</a:t>
+            </a:r>
+            <a:r>
+              <a:rPr lang="en-IN" sz="1400" dirty="0" err="1"/>
+              <a:t>NumHDonors</a:t>
+            </a:r>
+            <a:r>
+              <a:rPr lang="en-IN" sz="1400" dirty="0"/>
+              <a:t>) &lt; 5</a:t>
+            </a:r>
+          </a:p>
+          <a:p>
+            <a:pPr lvl="1"/>
+            <a:r>
+              <a:rPr lang="en-IN" sz="1400" dirty="0"/>
+              <a:t>Hydrogen bond acceptors &lt; 10</a:t>
+            </a:r>
+          </a:p>
+          <a:p>
+            <a:endParaRPr lang="en-IN" sz="1800" dirty="0"/>
+          </a:p>
+        </p:txBody>
+      </p:sp>
+      <p:sp>
+        <p:nvSpPr>
+          <p:cNvPr id="4" name="Slide Number Placeholder 3">
+            <a:extLst>
+              <a:ext uri="{FF2B5EF4-FFF2-40B4-BE49-F238E27FC236}">
+                <a16:creationId xmlns:a16="http://schemas.microsoft.com/office/drawing/2014/main" id="{DA55695E-C7DD-C557-614A-EC73E2F2E225}"/>
+              </a:ext>
+            </a:extLst>
+          </p:cNvPr>
+          <p:cNvSpPr>
+            <a:spLocks noGrp="1"/>
+          </p:cNvSpPr>
+          <p:nvPr>
+            <p:ph type="sldNum" sz="quarter" idx="12"/>
+          </p:nvPr>
+        </p:nvSpPr>
+        <p:spPr/>
+        <p:txBody>
+          <a:bodyPr/>
+          <a:lstStyle/>
+          <a:p>
+            <a:fld id="{FAF4F8EC-53F2-4EB2-97C1-60EB836CC882}" type="slidenum">
+              <a:rPr lang="en-IN" smtClean="0"/>
+              <a:t>3</a:t>
+            </a:fld>
+            <a:endParaRPr lang="en-IN"/>
+          </a:p>
+        </p:txBody>
+      </p:sp>
+      <p:pic>
+        <p:nvPicPr>
+          <p:cNvPr id="6" name="Picture 5">
+            <a:extLst>
+              <a:ext uri="{FF2B5EF4-FFF2-40B4-BE49-F238E27FC236}">
+                <a16:creationId xmlns:a16="http://schemas.microsoft.com/office/drawing/2014/main" id="{812C24AF-353F-8C81-9245-D7DC33DCDDC2}"/>
+              </a:ext>
+            </a:extLst>
+          </p:cNvPr>
+          <p:cNvPicPr>
+            <a:picLocks noChangeAspect="1"/>
+          </p:cNvPicPr>
+          <p:nvPr/>
+        </p:nvPicPr>
+        <p:blipFill>
+          <a:blip r:embed="rId2"/>
+          <a:stretch>
+            <a:fillRect/>
+          </a:stretch>
+        </p:blipFill>
+        <p:spPr>
+          <a:xfrm>
+            <a:off x="838200" y="3190422"/>
+            <a:ext cx="10499667" cy="1988795"/>
+          </a:xfrm>
+          <a:prstGeom prst="rect">
+            <a:avLst/>
+          </a:prstGeom>
+        </p:spPr>
+      </p:pic>
+    </p:spTree>
+    <p:extLst>
+      <p:ext uri="{BB962C8B-B14F-4D97-AF65-F5344CB8AC3E}">
+        <p14:creationId xmlns:p14="http://schemas.microsoft.com/office/powerpoint/2010/main" val="3328094206"/>
+      </p:ext>
+    </p:extLst>
+  </p:cSld>
+  <p:clrMapOvr>
+    <a:masterClrMapping/>
+  </p:clrMapOvr>
+</p:sld>
+</file>
+
+<file path=ppt/slides/slide4.xml><?xml version="1.0" encoding="utf-8"?>
+<p:sld xmlns:a="http://schemas.openxmlformats.org/drawingml/2006/main" xmlns:r="http://schemas.openxmlformats.org/officeDocument/2006/relationships" xmlns:p="http://schemas.openxmlformats.org/presentationml/2006/main">
+  <p:cSld>
+    <p:spTree>
+      <p:nvGrpSpPr>
+        <p:cNvPr id="1" name=""/>
+        <p:cNvGrpSpPr/>
+        <p:nvPr/>
+      </p:nvGrpSpPr>
+      <p:grpSpPr>
+        <a:xfrm>
+          <a:off x="0" y="0"/>
+          <a:ext cx="0" cy="0"/>
+          <a:chOff x="0" y="0"/>
+          <a:chExt cx="0" cy="0"/>
+        </a:xfrm>
+      </p:grpSpPr>
+      <p:sp>
+        <p:nvSpPr>
+          <p:cNvPr id="2" name="Title 1">
+            <a:extLst>
+              <a:ext uri="{FF2B5EF4-FFF2-40B4-BE49-F238E27FC236}">
+                <a16:creationId xmlns:a16="http://schemas.microsoft.com/office/drawing/2014/main" id="{85F6E863-3562-034F-0111-B04BA2D15676}"/>
+              </a:ext>
+            </a:extLst>
+          </p:cNvPr>
+          <p:cNvSpPr>
+            <a:spLocks noGrp="1"/>
+          </p:cNvSpPr>
+          <p:nvPr>
+            <p:ph type="title"/>
+          </p:nvPr>
+        </p:nvSpPr>
+        <p:spPr/>
+        <p:txBody>
+          <a:bodyPr/>
+          <a:lstStyle/>
+          <a:p>
+            <a:r>
+              <a:rPr lang="en-US" dirty="0"/>
+              <a:t>Modelling</a:t>
+            </a:r>
+            <a:endParaRPr lang="en-IN" dirty="0"/>
+          </a:p>
+        </p:txBody>
+      </p:sp>
+      <p:sp>
+        <p:nvSpPr>
+          <p:cNvPr id="4" name="Slide Number Placeholder 3">
+            <a:extLst>
+              <a:ext uri="{FF2B5EF4-FFF2-40B4-BE49-F238E27FC236}">
+                <a16:creationId xmlns:a16="http://schemas.microsoft.com/office/drawing/2014/main" id="{74648192-1CEB-4FC2-B33E-4054E8C7948B}"/>
+              </a:ext>
+            </a:extLst>
+          </p:cNvPr>
+          <p:cNvSpPr>
+            <a:spLocks noGrp="1"/>
+          </p:cNvSpPr>
+          <p:nvPr>
+            <p:ph type="sldNum" sz="quarter" idx="12"/>
+          </p:nvPr>
+        </p:nvSpPr>
+        <p:spPr/>
+        <p:txBody>
+          <a:bodyPr/>
+          <a:lstStyle/>
+          <a:p>
+            <a:fld id="{FAF4F8EC-53F2-4EB2-97C1-60EB836CC882}" type="slidenum">
+              <a:rPr lang="en-IN" smtClean="0"/>
+              <a:t>4</a:t>
+            </a:fld>
+            <a:endParaRPr lang="en-IN"/>
+          </a:p>
+        </p:txBody>
+      </p:sp>
+      <p:pic>
+        <p:nvPicPr>
+          <p:cNvPr id="2050" name="Picture 2">
+            <a:extLst>
+              <a:ext uri="{FF2B5EF4-FFF2-40B4-BE49-F238E27FC236}">
+                <a16:creationId xmlns:a16="http://schemas.microsoft.com/office/drawing/2014/main" id="{7E0718EC-09F2-9D38-9129-B63E63A700B3}"/>
+              </a:ext>
+            </a:extLst>
+          </p:cNvPr>
+          <p:cNvPicPr>
+            <a:picLocks noGrp="1" noChangeAspect="1" noChangeArrowheads="1"/>
+          </p:cNvPicPr>
+          <p:nvPr>
+            <p:ph idx="1"/>
+          </p:nvPr>
+        </p:nvPicPr>
+        <p:blipFill>
+          <a:blip r:embed="rId2">
+            <a:extLst>
+              <a:ext uri="{28A0092B-C50C-407E-A947-70E740481C1C}">
+                <a14:useLocalDpi xmlns:a14="http://schemas.microsoft.com/office/drawing/2010/main" val="0"/>
+              </a:ext>
+            </a:extLst>
+          </a:blip>
+          <a:srcRect/>
+          <a:stretch>
+            <a:fillRect/>
+          </a:stretch>
+        </p:blipFill>
+        <p:spPr bwMode="auto">
+          <a:xfrm rot="16200000">
+            <a:off x="5183729" y="-2747811"/>
+            <a:ext cx="1784296" cy="10226424"/>
+          </a:xfrm>
+          <a:prstGeom prst="rect">
+            <a:avLst/>
+          </a:prstGeom>
+          <a:noFill/>
+          <a:extLst>
+            <a:ext uri="{909E8E84-426E-40DD-AFC4-6F175D3DCCD1}">
+              <a14:hiddenFill xmlns:a14="http://schemas.microsoft.com/office/drawing/2010/main">
+                <a:solidFill>
+                  <a:srgbClr val="FFFFFF"/>
+                </a:solidFill>
+              </a14:hiddenFill>
+            </a:ext>
+          </a:extLst>
+        </p:spPr>
+      </p:pic>
+      <p:pic>
+        <p:nvPicPr>
+          <p:cNvPr id="2052" name="Picture 4" descr="Working process of qml models. | Download Scientific Diagram">
+            <a:extLst>
+              <a:ext uri="{FF2B5EF4-FFF2-40B4-BE49-F238E27FC236}">
+                <a16:creationId xmlns:a16="http://schemas.microsoft.com/office/drawing/2014/main" id="{51BF05AF-64AB-4AAC-0B95-4AA9338DF290}"/>
+              </a:ext>
+            </a:extLst>
+          </p:cNvPr>
+          <p:cNvPicPr>
+            <a:picLocks noChangeAspect="1" noChangeArrowheads="1"/>
+          </p:cNvPicPr>
+          <p:nvPr/>
+        </p:nvPicPr>
+        <p:blipFill>
+          <a:blip r:embed="rId3">
+            <a:extLst>
+              <a:ext uri="{28A0092B-C50C-407E-A947-70E740481C1C}">
+                <a14:useLocalDpi xmlns:a14="http://schemas.microsoft.com/office/drawing/2010/main" val="0"/>
+              </a:ext>
+            </a:extLst>
+          </a:blip>
+          <a:srcRect/>
+          <a:stretch>
+            <a:fillRect/>
+          </a:stretch>
+        </p:blipFill>
+        <p:spPr bwMode="auto">
+          <a:xfrm>
+            <a:off x="1002912" y="3538537"/>
+            <a:ext cx="6219825" cy="2914650"/>
+          </a:xfrm>
+          <a:prstGeom prst="rect">
+            <a:avLst/>
+          </a:prstGeom>
+          <a:noFill/>
+          <a:extLst>
+            <a:ext uri="{909E8E84-426E-40DD-AFC4-6F175D3DCCD1}">
+              <a14:hiddenFill xmlns:a14="http://schemas.microsoft.com/office/drawing/2010/main">
+                <a:solidFill>
+                  <a:srgbClr val="FFFFFF"/>
+                </a:solidFill>
+              </a14:hiddenFill>
+            </a:ext>
+          </a:extLst>
+        </p:spPr>
+      </p:pic>
+    </p:spTree>
+    <p:extLst>
+      <p:ext uri="{BB962C8B-B14F-4D97-AF65-F5344CB8AC3E}">
+        <p14:creationId xmlns:p14="http://schemas.microsoft.com/office/powerpoint/2010/main" val="1120996675"/>
       </p:ext>
     </p:extLst>
   </p:cSld>
@@ -6264,7 +9349,7 @@
           <p:cNvPr id="2" name="Title 1">
             <a:extLst>
               <a:ext uri="{FF2B5EF4-FFF2-40B4-BE49-F238E27FC236}">
-                <a16:creationId xmlns:a16="http://schemas.microsoft.com/office/drawing/2014/main" id="{2BDD4831-613C-80B6-7BC3-7F2072369A24}"/>
+                <a16:creationId xmlns:a16="http://schemas.microsoft.com/office/drawing/2014/main" id="{4E5157E5-0220-0D52-785E-38A77CA74826}"/>
               </a:ext>
             </a:extLst>
           </p:cNvPr>
@@ -6282,7 +9367,7 @@
           <a:p>
             <a:r>
               <a:rPr lang="en-US" dirty="0"/>
-              <a:t>Classical DNN – Multi-class classification</a:t>
+              <a:t>Binary classification Results</a:t>
             </a:r>
             <a:endParaRPr lang="en-IN" dirty="0"/>
           </a:p>
@@ -6290,17 +9375,19 @@
       </p:sp>
       <p:pic>
         <p:nvPicPr>
-          <p:cNvPr id="6" name="Picture 5">
-            <a:extLst>
-              <a:ext uri="{FF2B5EF4-FFF2-40B4-BE49-F238E27FC236}">
-                <a16:creationId xmlns:a16="http://schemas.microsoft.com/office/drawing/2014/main" id="{220932A1-0AF5-3804-5BD9-B8416A752D8F}"/>
+          <p:cNvPr id="5" name="Content Placeholder 4">
+            <a:extLst>
+              <a:ext uri="{FF2B5EF4-FFF2-40B4-BE49-F238E27FC236}">
+                <a16:creationId xmlns:a16="http://schemas.microsoft.com/office/drawing/2014/main" id="{D77F360B-FC4B-9E7D-8D85-8BD1F1920E1D}"/>
               </a:ext>
             </a:extLst>
           </p:cNvPr>
           <p:cNvPicPr>
-            <a:picLocks noChangeAspect="1"/>
+            <a:picLocks noGrp="1" noChangeAspect="1"/>
           </p:cNvPicPr>
-          <p:nvPr/>
+          <p:nvPr>
+            <p:ph idx="1"/>
+          </p:nvPr>
         </p:nvPicPr>
         <p:blipFill>
           <a:blip r:embed="rId2"/>
@@ -6310,8 +9397,8 @@
         </p:blipFill>
         <p:spPr>
           <a:xfrm>
-            <a:off x="838200" y="1298382"/>
-            <a:ext cx="7362451" cy="2398233"/>
+            <a:off x="838200" y="1924563"/>
+            <a:ext cx="10515600" cy="4153461"/>
           </a:xfrm>
           <a:prstGeom prst="rect">
             <a:avLst/>
@@ -6320,209 +9407,37 @@
       </p:pic>
       <p:sp>
         <p:nvSpPr>
-          <p:cNvPr id="7" name="TextBox 6">
-            <a:extLst>
-              <a:ext uri="{FF2B5EF4-FFF2-40B4-BE49-F238E27FC236}">
-                <a16:creationId xmlns:a16="http://schemas.microsoft.com/office/drawing/2014/main" id="{DA560149-96EB-5461-932D-EB259877F9BE}"/>
-              </a:ext>
-            </a:extLst>
-          </p:cNvPr>
-          <p:cNvSpPr txBox="1"/>
-          <p:nvPr/>
-        </p:nvSpPr>
-        <p:spPr>
-          <a:xfrm>
-            <a:off x="8635042" y="1854680"/>
-            <a:ext cx="2718758" cy="923330"/>
-          </a:xfrm>
-          <a:prstGeom prst="rect">
-            <a:avLst/>
-          </a:prstGeom>
-          <a:noFill/>
-        </p:spPr>
-        <p:txBody>
-          <a:bodyPr wrap="square" rtlCol="0">
-            <a:spAutoFit/>
-          </a:bodyPr>
-          <a:lstStyle/>
-          <a:p>
-            <a:r>
-              <a:rPr lang="en-IN" dirty="0"/>
-              <a:t>Best epoch: 52 </a:t>
-            </a:r>
-          </a:p>
-          <a:p>
-            <a:r>
-              <a:rPr lang="en-IN" dirty="0"/>
-              <a:t>Train </a:t>
-            </a:r>
-            <a:r>
-              <a:rPr lang="en-IN" dirty="0" err="1"/>
-              <a:t>acc</a:t>
-            </a:r>
-            <a:r>
-              <a:rPr lang="en-IN" dirty="0"/>
-              <a:t>: 0.9395 </a:t>
-            </a:r>
-          </a:p>
-          <a:p>
-            <a:r>
-              <a:rPr lang="en-IN" dirty="0"/>
-              <a:t>Val </a:t>
-            </a:r>
-            <a:r>
-              <a:rPr lang="en-IN" dirty="0" err="1"/>
-              <a:t>acc</a:t>
-            </a:r>
-            <a:r>
-              <a:rPr lang="en-IN" dirty="0"/>
-              <a:t>: 0.8501</a:t>
-            </a:r>
-          </a:p>
-        </p:txBody>
-      </p:sp>
-      <p:pic>
-        <p:nvPicPr>
-          <p:cNvPr id="9" name="Picture 8">
-            <a:extLst>
-              <a:ext uri="{FF2B5EF4-FFF2-40B4-BE49-F238E27FC236}">
-                <a16:creationId xmlns:a16="http://schemas.microsoft.com/office/drawing/2014/main" id="{F69E6E37-9075-A149-89AA-B0C1AE54D618}"/>
-              </a:ext>
-            </a:extLst>
-          </p:cNvPr>
-          <p:cNvPicPr>
-            <a:picLocks noChangeAspect="1"/>
-          </p:cNvPicPr>
-          <p:nvPr/>
-        </p:nvPicPr>
-        <p:blipFill>
-          <a:blip r:embed="rId3"/>
-          <a:stretch>
-            <a:fillRect/>
-          </a:stretch>
-        </p:blipFill>
-        <p:spPr>
-          <a:xfrm>
-            <a:off x="838200" y="4167786"/>
-            <a:ext cx="3384307" cy="2622027"/>
-          </a:xfrm>
-          <a:prstGeom prst="rect">
-            <a:avLst/>
-          </a:prstGeom>
-        </p:spPr>
-      </p:pic>
-      <p:sp>
-        <p:nvSpPr>
-          <p:cNvPr id="10" name="TextBox 9">
-            <a:extLst>
-              <a:ext uri="{FF2B5EF4-FFF2-40B4-BE49-F238E27FC236}">
-                <a16:creationId xmlns:a16="http://schemas.microsoft.com/office/drawing/2014/main" id="{99500484-1C7B-F1F9-EEA1-6F10AD1A1F7D}"/>
-              </a:ext>
-            </a:extLst>
-          </p:cNvPr>
-          <p:cNvSpPr txBox="1"/>
-          <p:nvPr/>
-        </p:nvSpPr>
-        <p:spPr>
-          <a:xfrm>
-            <a:off x="1104181" y="3696615"/>
-            <a:ext cx="3303917" cy="375053"/>
-          </a:xfrm>
-          <a:prstGeom prst="rect">
-            <a:avLst/>
-          </a:prstGeom>
-          <a:noFill/>
-        </p:spPr>
-        <p:txBody>
-          <a:bodyPr wrap="square" rtlCol="0">
-            <a:spAutoFit/>
-          </a:bodyPr>
-          <a:lstStyle/>
-          <a:p>
-            <a:r>
-              <a:rPr lang="en-US" dirty="0"/>
-              <a:t>Test set results</a:t>
-            </a:r>
-            <a:endParaRPr lang="en-IN" dirty="0"/>
-          </a:p>
-        </p:txBody>
-      </p:sp>
-      <p:pic>
-        <p:nvPicPr>
-          <p:cNvPr id="12" name="Picture 11">
-            <a:extLst>
-              <a:ext uri="{FF2B5EF4-FFF2-40B4-BE49-F238E27FC236}">
-                <a16:creationId xmlns:a16="http://schemas.microsoft.com/office/drawing/2014/main" id="{CE680300-765A-3345-548C-CDC63E292131}"/>
-              </a:ext>
-            </a:extLst>
-          </p:cNvPr>
-          <p:cNvPicPr>
-            <a:picLocks noChangeAspect="1"/>
-          </p:cNvPicPr>
-          <p:nvPr/>
-        </p:nvPicPr>
-        <p:blipFill>
-          <a:blip r:embed="rId4"/>
-          <a:stretch>
-            <a:fillRect/>
-          </a:stretch>
-        </p:blipFill>
-        <p:spPr>
-          <a:xfrm>
-            <a:off x="4408098" y="4167786"/>
-            <a:ext cx="2785020" cy="2444406"/>
-          </a:xfrm>
-          <a:prstGeom prst="rect">
-            <a:avLst/>
-          </a:prstGeom>
-        </p:spPr>
-      </p:pic>
-      <p:sp>
-        <p:nvSpPr>
-          <p:cNvPr id="13" name="TextBox 12">
-            <a:extLst>
-              <a:ext uri="{FF2B5EF4-FFF2-40B4-BE49-F238E27FC236}">
-                <a16:creationId xmlns:a16="http://schemas.microsoft.com/office/drawing/2014/main" id="{495C6DD1-5652-5949-7F5F-2DDD8EDFAA8D}"/>
-              </a:ext>
-            </a:extLst>
-          </p:cNvPr>
-          <p:cNvSpPr txBox="1"/>
-          <p:nvPr/>
-        </p:nvSpPr>
-        <p:spPr>
-          <a:xfrm>
-            <a:off x="7332453" y="4304581"/>
-            <a:ext cx="2553419" cy="646331"/>
-          </a:xfrm>
-          <a:prstGeom prst="rect">
-            <a:avLst/>
-          </a:prstGeom>
-          <a:noFill/>
-        </p:spPr>
-        <p:txBody>
-          <a:bodyPr wrap="square" rtlCol="0">
-            <a:spAutoFit/>
-          </a:bodyPr>
-          <a:lstStyle/>
-          <a:p>
-            <a:r>
-              <a:rPr lang="en-US" dirty="0"/>
-              <a:t>Test samples: 387 </a:t>
-            </a:r>
-          </a:p>
-          <a:p>
-            <a:r>
-              <a:rPr lang="en-US" dirty="0"/>
-              <a:t>Test accuracy: 0.8036</a:t>
-            </a:r>
-            <a:endParaRPr lang="en-IN" dirty="0"/>
+          <p:cNvPr id="6" name="Slide Number Placeholder 5">
+            <a:extLst>
+              <a:ext uri="{FF2B5EF4-FFF2-40B4-BE49-F238E27FC236}">
+                <a16:creationId xmlns:a16="http://schemas.microsoft.com/office/drawing/2014/main" id="{30A7257C-B897-D7B6-F7F0-2B0BF0F176F9}"/>
+              </a:ext>
+            </a:extLst>
+          </p:cNvPr>
+          <p:cNvSpPr>
+            <a:spLocks noGrp="1"/>
+          </p:cNvSpPr>
+          <p:nvPr>
+            <p:ph type="sldNum" sz="quarter" idx="12"/>
+          </p:nvPr>
+        </p:nvSpPr>
+        <p:spPr/>
+        <p:txBody>
+          <a:bodyPr/>
+          <a:lstStyle/>
+          <a:p>
+            <a:fld id="{FAF4F8EC-53F2-4EB2-97C1-60EB836CC882}" type="slidenum">
+              <a:rPr lang="en-IN" smtClean="0"/>
+              <a:t>5</a:t>
+            </a:fld>
+            <a:endParaRPr lang="en-IN"/>
           </a:p>
         </p:txBody>
       </p:sp>
     </p:spTree>
     <p:extLst>
       <p:ext uri="{BB962C8B-B14F-4D97-AF65-F5344CB8AC3E}">
-        <p14:creationId xmlns:p14="http://schemas.microsoft.com/office/powerpoint/2010/main" val="1978811724"/>
+        <p14:creationId xmlns:p14="http://schemas.microsoft.com/office/powerpoint/2010/main" val="1706036738"/>
       </p:ext>
     </p:extLst>
   </p:cSld>
@@ -6554,7 +9469,7 @@
           <p:cNvPr id="2" name="Title 1">
             <a:extLst>
               <a:ext uri="{FF2B5EF4-FFF2-40B4-BE49-F238E27FC236}">
-                <a16:creationId xmlns:a16="http://schemas.microsoft.com/office/drawing/2014/main" id="{B6B8FCC8-F3E8-5685-D222-F2F5DE26AA30}"/>
+                <a16:creationId xmlns:a16="http://schemas.microsoft.com/office/drawing/2014/main" id="{EFF46209-80D2-D50A-CA20-870E6AEA2423}"/>
               </a:ext>
             </a:extLst>
           </p:cNvPr>
@@ -6572,211 +9487,45 @@
           <a:p>
             <a:r>
               <a:rPr lang="en-US" dirty="0"/>
-              <a:t>Hybrid QML- 3 class classification – Basic entangler 4 qubits, 2 rep</a:t>
+              <a:t>Multi-class classification results</a:t>
             </a:r>
             <a:endParaRPr lang="en-IN" dirty="0"/>
           </a:p>
         </p:txBody>
       </p:sp>
-      <p:pic>
-        <p:nvPicPr>
-          <p:cNvPr id="6" name="Picture 5">
-            <a:extLst>
-              <a:ext uri="{FF2B5EF4-FFF2-40B4-BE49-F238E27FC236}">
-                <a16:creationId xmlns:a16="http://schemas.microsoft.com/office/drawing/2014/main" id="{BCE7E419-FE52-CA49-8B01-0025923944B5}"/>
-              </a:ext>
-            </a:extLst>
-          </p:cNvPr>
-          <p:cNvPicPr>
-            <a:picLocks noChangeAspect="1"/>
-          </p:cNvPicPr>
-          <p:nvPr/>
-        </p:nvPicPr>
-        <p:blipFill>
-          <a:blip r:embed="rId2"/>
-          <a:stretch>
-            <a:fillRect/>
-          </a:stretch>
-        </p:blipFill>
-        <p:spPr>
-          <a:xfrm>
-            <a:off x="838200" y="1618874"/>
-            <a:ext cx="6252713" cy="2073658"/>
-          </a:xfrm>
-          <a:prstGeom prst="rect">
-            <a:avLst/>
-          </a:prstGeom>
-        </p:spPr>
-      </p:pic>
-      <p:sp>
-        <p:nvSpPr>
-          <p:cNvPr id="7" name="TextBox 6">
-            <a:extLst>
-              <a:ext uri="{FF2B5EF4-FFF2-40B4-BE49-F238E27FC236}">
-                <a16:creationId xmlns:a16="http://schemas.microsoft.com/office/drawing/2014/main" id="{E7C2CF0F-5AB9-75AB-E9A0-CEDE422A5E02}"/>
-              </a:ext>
-            </a:extLst>
-          </p:cNvPr>
-          <p:cNvSpPr txBox="1"/>
-          <p:nvPr/>
-        </p:nvSpPr>
-        <p:spPr>
-          <a:xfrm>
-            <a:off x="7349706" y="1923690"/>
-            <a:ext cx="2251495" cy="923330"/>
-          </a:xfrm>
-          <a:prstGeom prst="rect">
-            <a:avLst/>
-          </a:prstGeom>
-          <a:noFill/>
-        </p:spPr>
-        <p:txBody>
-          <a:bodyPr wrap="square" rtlCol="0">
-            <a:spAutoFit/>
-          </a:bodyPr>
-          <a:lstStyle/>
-          <a:p>
-            <a:r>
-              <a:rPr lang="en-IN" dirty="0"/>
-              <a:t>Best epoch: 52 </a:t>
-            </a:r>
-          </a:p>
-          <a:p>
-            <a:r>
-              <a:rPr lang="en-IN" dirty="0"/>
-              <a:t>Train </a:t>
-            </a:r>
-            <a:r>
-              <a:rPr lang="en-IN" dirty="0" err="1"/>
-              <a:t>acc</a:t>
-            </a:r>
-            <a:r>
-              <a:rPr lang="en-IN" dirty="0"/>
-              <a:t>: 0.9395 </a:t>
-            </a:r>
-          </a:p>
-          <a:p>
-            <a:r>
-              <a:rPr lang="en-IN" dirty="0"/>
-              <a:t>Val </a:t>
-            </a:r>
-            <a:r>
-              <a:rPr lang="en-IN" dirty="0" err="1"/>
-              <a:t>acc</a:t>
-            </a:r>
-            <a:r>
-              <a:rPr lang="en-IN" dirty="0"/>
-              <a:t>: 0.8501</a:t>
-            </a:r>
-          </a:p>
-        </p:txBody>
-      </p:sp>
-      <p:pic>
-        <p:nvPicPr>
-          <p:cNvPr id="9" name="Picture 8">
-            <a:extLst>
-              <a:ext uri="{FF2B5EF4-FFF2-40B4-BE49-F238E27FC236}">
-                <a16:creationId xmlns:a16="http://schemas.microsoft.com/office/drawing/2014/main" id="{48C3B45E-3051-3F10-5B19-744E14ADF229}"/>
-              </a:ext>
-            </a:extLst>
-          </p:cNvPr>
-          <p:cNvPicPr>
-            <a:picLocks noChangeAspect="1"/>
-          </p:cNvPicPr>
-          <p:nvPr/>
-        </p:nvPicPr>
-        <p:blipFill>
-          <a:blip r:embed="rId3"/>
-          <a:stretch>
-            <a:fillRect/>
-          </a:stretch>
-        </p:blipFill>
-        <p:spPr>
-          <a:xfrm>
-            <a:off x="838200" y="4186704"/>
-            <a:ext cx="6328206" cy="2469794"/>
-          </a:xfrm>
-          <a:prstGeom prst="rect">
-            <a:avLst/>
-          </a:prstGeom>
-        </p:spPr>
-      </p:pic>
-      <p:sp>
-        <p:nvSpPr>
-          <p:cNvPr id="10" name="TextBox 9">
-            <a:extLst>
-              <a:ext uri="{FF2B5EF4-FFF2-40B4-BE49-F238E27FC236}">
-                <a16:creationId xmlns:a16="http://schemas.microsoft.com/office/drawing/2014/main" id="{4D8B371D-EECC-52FD-F15F-99037214DA2E}"/>
-              </a:ext>
-            </a:extLst>
-          </p:cNvPr>
-          <p:cNvSpPr txBox="1"/>
-          <p:nvPr/>
-        </p:nvSpPr>
-        <p:spPr>
-          <a:xfrm>
-            <a:off x="838200" y="3752091"/>
-            <a:ext cx="3303917" cy="375053"/>
-          </a:xfrm>
-          <a:prstGeom prst="rect">
-            <a:avLst/>
-          </a:prstGeom>
-          <a:noFill/>
-        </p:spPr>
-        <p:txBody>
-          <a:bodyPr wrap="square" rtlCol="0">
-            <a:spAutoFit/>
-          </a:bodyPr>
-          <a:lstStyle/>
-          <a:p>
-            <a:r>
-              <a:rPr lang="en-US" dirty="0"/>
-              <a:t>Test set results</a:t>
-            </a:r>
-            <a:endParaRPr lang="en-IN" dirty="0"/>
-          </a:p>
-        </p:txBody>
-      </p:sp>
-      <p:sp>
-        <p:nvSpPr>
-          <p:cNvPr id="11" name="TextBox 10">
-            <a:extLst>
-              <a:ext uri="{FF2B5EF4-FFF2-40B4-BE49-F238E27FC236}">
-                <a16:creationId xmlns:a16="http://schemas.microsoft.com/office/drawing/2014/main" id="{EE741BA0-154F-4F49-8C97-834DEC9FB3D2}"/>
-              </a:ext>
-            </a:extLst>
-          </p:cNvPr>
-          <p:cNvSpPr txBox="1"/>
-          <p:nvPr/>
-        </p:nvSpPr>
-        <p:spPr>
-          <a:xfrm>
-            <a:off x="7530860" y="4580626"/>
-            <a:ext cx="2191110" cy="646331"/>
-          </a:xfrm>
-          <a:prstGeom prst="rect">
-            <a:avLst/>
-          </a:prstGeom>
-          <a:noFill/>
-        </p:spPr>
-        <p:txBody>
-          <a:bodyPr wrap="square" rtlCol="0">
-            <a:spAutoFit/>
-          </a:bodyPr>
-          <a:lstStyle/>
-          <a:p>
-            <a:r>
-              <a:rPr lang="en-US" dirty="0"/>
-              <a:t>Test samples: 387 Test accuracy: 0.8036</a:t>
-            </a:r>
-            <a:endParaRPr lang="en-IN" dirty="0"/>
+      <p:sp>
+        <p:nvSpPr>
+          <p:cNvPr id="4" name="Slide Number Placeholder 3">
+            <a:extLst>
+              <a:ext uri="{FF2B5EF4-FFF2-40B4-BE49-F238E27FC236}">
+                <a16:creationId xmlns:a16="http://schemas.microsoft.com/office/drawing/2014/main" id="{C9217BDF-AEDF-C672-56E0-9D8564EE4282}"/>
+              </a:ext>
+            </a:extLst>
+          </p:cNvPr>
+          <p:cNvSpPr>
+            <a:spLocks noGrp="1"/>
+          </p:cNvSpPr>
+          <p:nvPr>
+            <p:ph type="sldNum" sz="quarter" idx="12"/>
+          </p:nvPr>
+        </p:nvSpPr>
+        <p:spPr/>
+        <p:txBody>
+          <a:bodyPr/>
+          <a:lstStyle/>
+          <a:p>
+            <a:fld id="{FAF4F8EC-53F2-4EB2-97C1-60EB836CC882}" type="slidenum">
+              <a:rPr lang="en-IN" smtClean="0"/>
+              <a:t>6</a:t>
+            </a:fld>
+            <a:endParaRPr lang="en-IN"/>
           </a:p>
         </p:txBody>
       </p:sp>
     </p:spTree>
     <p:extLst>
       <p:ext uri="{BB962C8B-B14F-4D97-AF65-F5344CB8AC3E}">
-        <p14:creationId xmlns:p14="http://schemas.microsoft.com/office/powerpoint/2010/main" val="402914566"/>
+        <p14:creationId xmlns:p14="http://schemas.microsoft.com/office/powerpoint/2010/main" val="1903704786"/>
       </p:ext>
     </p:extLst>
   </p:cSld>
@@ -6791,13 +9540,7 @@
   <p:cSld>
     <p:spTree>
       <p:nvGrpSpPr>
-        <p:cNvPr id="1" name="">
-          <a:extLst>
-            <a:ext uri="{FF2B5EF4-FFF2-40B4-BE49-F238E27FC236}">
-              <a16:creationId xmlns:a16="http://schemas.microsoft.com/office/drawing/2014/main" id="{F267C0FA-3211-E229-31E7-CE1D741889E7}"/>
-            </a:ext>
-          </a:extLst>
-        </p:cNvPr>
+        <p:cNvPr id="1" name=""/>
         <p:cNvGrpSpPr/>
         <p:nvPr/>
       </p:nvGrpSpPr>
@@ -6814,7 +9557,7 @@
           <p:cNvPr id="2" name="Title 1">
             <a:extLst>
               <a:ext uri="{FF2B5EF4-FFF2-40B4-BE49-F238E27FC236}">
-                <a16:creationId xmlns:a16="http://schemas.microsoft.com/office/drawing/2014/main" id="{E12D5F3E-2134-59F8-14E2-5AD873584216}"/>
+                <a16:creationId xmlns:a16="http://schemas.microsoft.com/office/drawing/2014/main" id="{3B3E3282-A289-5CC2-334A-5E91635C52E4}"/>
               </a:ext>
             </a:extLst>
           </p:cNvPr>
@@ -6832,142 +9575,7 @@
           <a:p>
             <a:r>
               <a:rPr lang="en-US" dirty="0"/>
-              <a:t>Hybrid QML- 3 class classification – Basic entangler 4 qubits, 4 rep</a:t>
-            </a:r>
-            <a:endParaRPr lang="en-IN" dirty="0"/>
-          </a:p>
-        </p:txBody>
-      </p:sp>
-      <p:sp>
-        <p:nvSpPr>
-          <p:cNvPr id="7" name="TextBox 6">
-            <a:extLst>
-              <a:ext uri="{FF2B5EF4-FFF2-40B4-BE49-F238E27FC236}">
-                <a16:creationId xmlns:a16="http://schemas.microsoft.com/office/drawing/2014/main" id="{309FF1B8-232B-69C9-1F62-4649D5A4D1E1}"/>
-              </a:ext>
-            </a:extLst>
-          </p:cNvPr>
-          <p:cNvSpPr txBox="1"/>
-          <p:nvPr/>
-        </p:nvSpPr>
-        <p:spPr>
-          <a:xfrm>
-            <a:off x="8006931" y="1973696"/>
-            <a:ext cx="2251495" cy="923330"/>
-          </a:xfrm>
-          <a:prstGeom prst="rect">
-            <a:avLst/>
-          </a:prstGeom>
-          <a:noFill/>
-        </p:spPr>
-        <p:txBody>
-          <a:bodyPr wrap="square" rtlCol="0">
-            <a:spAutoFit/>
-          </a:bodyPr>
-          <a:lstStyle/>
-          <a:p>
-            <a:r>
-              <a:rPr lang="en-IN" dirty="0"/>
-              <a:t>Best epoch: 35 </a:t>
-            </a:r>
-          </a:p>
-          <a:p>
-            <a:r>
-              <a:rPr lang="en-IN" dirty="0"/>
-              <a:t>Train </a:t>
-            </a:r>
-            <a:r>
-              <a:rPr lang="en-IN" dirty="0" err="1"/>
-              <a:t>acc</a:t>
-            </a:r>
-            <a:r>
-              <a:rPr lang="en-IN" dirty="0"/>
-              <a:t>: 0.8192 </a:t>
-            </a:r>
-          </a:p>
-          <a:p>
-            <a:r>
-              <a:rPr lang="en-IN" dirty="0"/>
-              <a:t>Val </a:t>
-            </a:r>
-            <a:r>
-              <a:rPr lang="en-IN" dirty="0" err="1"/>
-              <a:t>acc</a:t>
-            </a:r>
-            <a:r>
-              <a:rPr lang="en-IN" dirty="0"/>
-              <a:t>: 0.7649</a:t>
-            </a:r>
-          </a:p>
-        </p:txBody>
-      </p:sp>
-      <p:sp>
-        <p:nvSpPr>
-          <p:cNvPr id="10" name="TextBox 9">
-            <a:extLst>
-              <a:ext uri="{FF2B5EF4-FFF2-40B4-BE49-F238E27FC236}">
-                <a16:creationId xmlns:a16="http://schemas.microsoft.com/office/drawing/2014/main" id="{0403ED6F-21B3-7B92-A4FF-1C019D198EAF}"/>
-              </a:ext>
-            </a:extLst>
-          </p:cNvPr>
-          <p:cNvSpPr txBox="1"/>
-          <p:nvPr/>
-        </p:nvSpPr>
-        <p:spPr>
-          <a:xfrm>
-            <a:off x="838200" y="3752091"/>
-            <a:ext cx="3303917" cy="375053"/>
-          </a:xfrm>
-          <a:prstGeom prst="rect">
-            <a:avLst/>
-          </a:prstGeom>
-          <a:noFill/>
-        </p:spPr>
-        <p:txBody>
-          <a:bodyPr wrap="square" rtlCol="0">
-            <a:spAutoFit/>
-          </a:bodyPr>
-          <a:lstStyle/>
-          <a:p>
-            <a:r>
-              <a:rPr lang="en-US" dirty="0"/>
-              <a:t>Test set results</a:t>
-            </a:r>
-            <a:endParaRPr lang="en-IN" dirty="0"/>
-          </a:p>
-        </p:txBody>
-      </p:sp>
-      <p:sp>
-        <p:nvSpPr>
-          <p:cNvPr id="11" name="TextBox 10">
-            <a:extLst>
-              <a:ext uri="{FF2B5EF4-FFF2-40B4-BE49-F238E27FC236}">
-                <a16:creationId xmlns:a16="http://schemas.microsoft.com/office/drawing/2014/main" id="{A83FD581-A033-EF2A-B974-DC46DB8DD83F}"/>
-              </a:ext>
-            </a:extLst>
-          </p:cNvPr>
-          <p:cNvSpPr txBox="1"/>
-          <p:nvPr/>
-        </p:nvSpPr>
-        <p:spPr>
-          <a:xfrm>
-            <a:off x="7530860" y="4580626"/>
-            <a:ext cx="2191110" cy="646331"/>
-          </a:xfrm>
-          <a:prstGeom prst="rect">
-            <a:avLst/>
-          </a:prstGeom>
-          <a:noFill/>
-        </p:spPr>
-        <p:txBody>
-          <a:bodyPr wrap="square" rtlCol="0">
-            <a:spAutoFit/>
-          </a:bodyPr>
-          <a:lstStyle/>
-          <a:p>
-            <a:r>
-              <a:rPr lang="en-US" dirty="0"/>
-              <a:t>Test samples: 387 Test accuracy: 0.8036</a:t>
+              <a:t>Benchmark – State vector simulator</a:t>
             </a:r>
             <a:endParaRPr lang="en-IN" dirty="0"/>
           </a:p>
@@ -6975,17 +9583,19 @@
       </p:sp>
       <p:pic>
         <p:nvPicPr>
-          <p:cNvPr id="4" name="Picture 3">
-            <a:extLst>
-              <a:ext uri="{FF2B5EF4-FFF2-40B4-BE49-F238E27FC236}">
-                <a16:creationId xmlns:a16="http://schemas.microsoft.com/office/drawing/2014/main" id="{996BAC2D-61F1-F2D8-0C4D-DF801178A95E}"/>
+          <p:cNvPr id="5" name="Content Placeholder 4">
+            <a:extLst>
+              <a:ext uri="{FF2B5EF4-FFF2-40B4-BE49-F238E27FC236}">
+                <a16:creationId xmlns:a16="http://schemas.microsoft.com/office/drawing/2014/main" id="{83DCC424-1139-9FDA-4FB3-0D3363D47CEC}"/>
               </a:ext>
             </a:extLst>
           </p:cNvPr>
           <p:cNvPicPr>
-            <a:picLocks noChangeAspect="1"/>
+            <a:picLocks noGrp="1" noChangeAspect="1"/>
           </p:cNvPicPr>
-          <p:nvPr/>
+          <p:nvPr>
+            <p:ph idx="1"/>
+          </p:nvPr>
         </p:nvPicPr>
         <p:blipFill>
           <a:blip r:embed="rId2"/>
@@ -6995,48 +9605,47 @@
         </p:blipFill>
         <p:spPr>
           <a:xfrm>
-            <a:off x="838199" y="1521124"/>
-            <a:ext cx="6950543" cy="2230967"/>
+            <a:off x="1135904" y="1847056"/>
+            <a:ext cx="8791479" cy="4351338"/>
           </a:xfrm>
           <a:prstGeom prst="rect">
             <a:avLst/>
           </a:prstGeom>
         </p:spPr>
       </p:pic>
-      <p:pic>
-        <p:nvPicPr>
-          <p:cNvPr id="8" name="Picture 7">
-            <a:extLst>
-              <a:ext uri="{FF2B5EF4-FFF2-40B4-BE49-F238E27FC236}">
-                <a16:creationId xmlns:a16="http://schemas.microsoft.com/office/drawing/2014/main" id="{AE40E8CD-FB47-77CB-624C-95C9D528E250}"/>
-              </a:ext>
-            </a:extLst>
-          </p:cNvPr>
-          <p:cNvPicPr>
-            <a:picLocks noChangeAspect="1"/>
-          </p:cNvPicPr>
-          <p:nvPr/>
-        </p:nvPicPr>
-        <p:blipFill>
-          <a:blip r:embed="rId3"/>
-          <a:stretch>
-            <a:fillRect/>
-          </a:stretch>
-        </p:blipFill>
-        <p:spPr>
-          <a:xfrm>
-            <a:off x="925827" y="4075280"/>
-            <a:ext cx="6432580" cy="2523191"/>
-          </a:xfrm>
-          <a:prstGeom prst="rect">
-            <a:avLst/>
-          </a:prstGeom>
-        </p:spPr>
-      </p:pic>
+      <p:sp>
+        <p:nvSpPr>
+          <p:cNvPr id="3" name="Slide Number Placeholder 2">
+            <a:extLst>
+              <a:ext uri="{FF2B5EF4-FFF2-40B4-BE49-F238E27FC236}">
+                <a16:creationId xmlns:a16="http://schemas.microsoft.com/office/drawing/2014/main" id="{232E3951-B67D-6CED-C5D2-8A87DA22C7D9}"/>
+              </a:ext>
+            </a:extLst>
+          </p:cNvPr>
+          <p:cNvSpPr>
+            <a:spLocks noGrp="1"/>
+          </p:cNvSpPr>
+          <p:nvPr>
+            <p:ph type="sldNum" sz="quarter" idx="12"/>
+          </p:nvPr>
+        </p:nvSpPr>
+        <p:spPr/>
+        <p:txBody>
+          <a:bodyPr/>
+          <a:lstStyle/>
+          <a:p>
+            <a:fld id="{FAF4F8EC-53F2-4EB2-97C1-60EB836CC882}" type="slidenum">
+              <a:rPr lang="en-IN" smtClean="0"/>
+              <a:t>7</a:t>
+            </a:fld>
+            <a:endParaRPr lang="en-IN"/>
+          </a:p>
+        </p:txBody>
+      </p:sp>
     </p:spTree>
     <p:extLst>
       <p:ext uri="{BB962C8B-B14F-4D97-AF65-F5344CB8AC3E}">
-        <p14:creationId xmlns:p14="http://schemas.microsoft.com/office/powerpoint/2010/main" val="2892183383"/>
+        <p14:creationId xmlns:p14="http://schemas.microsoft.com/office/powerpoint/2010/main" val="2503977742"/>
       </p:ext>
     </p:extLst>
   </p:cSld>
@@ -7051,13 +9660,7 @@
   <p:cSld>
     <p:spTree>
       <p:nvGrpSpPr>
-        <p:cNvPr id="1" name="">
-          <a:extLst>
-            <a:ext uri="{FF2B5EF4-FFF2-40B4-BE49-F238E27FC236}">
-              <a16:creationId xmlns:a16="http://schemas.microsoft.com/office/drawing/2014/main" id="{DEEDA080-D4CF-B6F4-03C7-C661FA8654B8}"/>
-            </a:ext>
-          </a:extLst>
-        </p:cNvPr>
+        <p:cNvPr id="1" name=""/>
         <p:cNvGrpSpPr/>
         <p:nvPr/>
       </p:nvGrpSpPr>
@@ -7074,7 +9677,7 @@
           <p:cNvPr id="2" name="Title 1">
             <a:extLst>
               <a:ext uri="{FF2B5EF4-FFF2-40B4-BE49-F238E27FC236}">
-                <a16:creationId xmlns:a16="http://schemas.microsoft.com/office/drawing/2014/main" id="{98BF376A-E4B1-874D-9792-444C9886505F}"/>
+                <a16:creationId xmlns:a16="http://schemas.microsoft.com/office/drawing/2014/main" id="{2F6ED2F8-19F1-50F5-B2C8-90154A4B2396}"/>
               </a:ext>
             </a:extLst>
           </p:cNvPr>
@@ -7092,142 +9695,7 @@
           <a:p>
             <a:r>
               <a:rPr lang="en-US" dirty="0"/>
-              <a:t>Hybrid QML- 3 class classification – Basic entangler 4 qubits, 8 rep</a:t>
-            </a:r>
-            <a:endParaRPr lang="en-IN" dirty="0"/>
-          </a:p>
-        </p:txBody>
-      </p:sp>
-      <p:sp>
-        <p:nvSpPr>
-          <p:cNvPr id="7" name="TextBox 6">
-            <a:extLst>
-              <a:ext uri="{FF2B5EF4-FFF2-40B4-BE49-F238E27FC236}">
-                <a16:creationId xmlns:a16="http://schemas.microsoft.com/office/drawing/2014/main" id="{F8C0D608-941C-2C87-DFBB-46D52AE4D788}"/>
-              </a:ext>
-            </a:extLst>
-          </p:cNvPr>
-          <p:cNvSpPr txBox="1"/>
-          <p:nvPr/>
-        </p:nvSpPr>
-        <p:spPr>
-          <a:xfrm>
-            <a:off x="7349706" y="2212327"/>
-            <a:ext cx="2251495" cy="923330"/>
-          </a:xfrm>
-          <a:prstGeom prst="rect">
-            <a:avLst/>
-          </a:prstGeom>
-          <a:noFill/>
-        </p:spPr>
-        <p:txBody>
-          <a:bodyPr wrap="square" rtlCol="0">
-            <a:spAutoFit/>
-          </a:bodyPr>
-          <a:lstStyle/>
-          <a:p>
-            <a:r>
-              <a:rPr lang="en-IN" dirty="0"/>
-              <a:t>Best epoch: 10 </a:t>
-            </a:r>
-          </a:p>
-          <a:p>
-            <a:r>
-              <a:rPr lang="en-IN" dirty="0"/>
-              <a:t>Train </a:t>
-            </a:r>
-            <a:r>
-              <a:rPr lang="en-IN" dirty="0" err="1"/>
-              <a:t>acc</a:t>
-            </a:r>
-            <a:r>
-              <a:rPr lang="en-IN" dirty="0"/>
-              <a:t>: 0.8552 </a:t>
-            </a:r>
-          </a:p>
-          <a:p>
-            <a:r>
-              <a:rPr lang="en-IN" dirty="0"/>
-              <a:t>Val </a:t>
-            </a:r>
-            <a:r>
-              <a:rPr lang="en-IN" dirty="0" err="1"/>
-              <a:t>acc</a:t>
-            </a:r>
-            <a:r>
-              <a:rPr lang="en-IN" dirty="0"/>
-              <a:t>: 0.8114</a:t>
-            </a:r>
-          </a:p>
-        </p:txBody>
-      </p:sp>
-      <p:sp>
-        <p:nvSpPr>
-          <p:cNvPr id="10" name="TextBox 9">
-            <a:extLst>
-              <a:ext uri="{FF2B5EF4-FFF2-40B4-BE49-F238E27FC236}">
-                <a16:creationId xmlns:a16="http://schemas.microsoft.com/office/drawing/2014/main" id="{F36D0318-3103-DD39-910B-1701314BFED9}"/>
-              </a:ext>
-            </a:extLst>
-          </p:cNvPr>
-          <p:cNvSpPr txBox="1"/>
-          <p:nvPr/>
-        </p:nvSpPr>
-        <p:spPr>
-          <a:xfrm>
-            <a:off x="838200" y="3752091"/>
-            <a:ext cx="3303917" cy="375053"/>
-          </a:xfrm>
-          <a:prstGeom prst="rect">
-            <a:avLst/>
-          </a:prstGeom>
-          <a:noFill/>
-        </p:spPr>
-        <p:txBody>
-          <a:bodyPr wrap="square" rtlCol="0">
-            <a:spAutoFit/>
-          </a:bodyPr>
-          <a:lstStyle/>
-          <a:p>
-            <a:r>
-              <a:rPr lang="en-US" dirty="0"/>
-              <a:t>Test set results</a:t>
-            </a:r>
-            <a:endParaRPr lang="en-IN" dirty="0"/>
-          </a:p>
-        </p:txBody>
-      </p:sp>
-      <p:sp>
-        <p:nvSpPr>
-          <p:cNvPr id="11" name="TextBox 10">
-            <a:extLst>
-              <a:ext uri="{FF2B5EF4-FFF2-40B4-BE49-F238E27FC236}">
-                <a16:creationId xmlns:a16="http://schemas.microsoft.com/office/drawing/2014/main" id="{6CDA8E5C-1A20-CA56-66C2-836A69FA1E48}"/>
-              </a:ext>
-            </a:extLst>
-          </p:cNvPr>
-          <p:cNvSpPr txBox="1"/>
-          <p:nvPr/>
-        </p:nvSpPr>
-        <p:spPr>
-          <a:xfrm>
-            <a:off x="7530860" y="4580626"/>
-            <a:ext cx="2191110" cy="646331"/>
-          </a:xfrm>
-          <a:prstGeom prst="rect">
-            <a:avLst/>
-          </a:prstGeom>
-          <a:noFill/>
-        </p:spPr>
-        <p:txBody>
-          <a:bodyPr wrap="square" rtlCol="0">
-            <a:spAutoFit/>
-          </a:bodyPr>
-          <a:lstStyle/>
-          <a:p>
-            <a:r>
-              <a:rPr lang="en-US" dirty="0"/>
-              <a:t>Test samples: 387 Test accuracy: 0.7494</a:t>
+              <a:t>Benchmark – Sampling based simulator</a:t>
             </a:r>
             <a:endParaRPr lang="en-IN" dirty="0"/>
           </a:p>
@@ -7235,10 +9703,10 @@
       </p:sp>
       <p:pic>
         <p:nvPicPr>
-          <p:cNvPr id="4" name="Picture 3">
-            <a:extLst>
-              <a:ext uri="{FF2B5EF4-FFF2-40B4-BE49-F238E27FC236}">
-                <a16:creationId xmlns:a16="http://schemas.microsoft.com/office/drawing/2014/main" id="{6D0CE648-4BE5-A24B-5536-A363E6999757}"/>
+          <p:cNvPr id="5" name="Picture 4">
+            <a:extLst>
+              <a:ext uri="{FF2B5EF4-FFF2-40B4-BE49-F238E27FC236}">
+                <a16:creationId xmlns:a16="http://schemas.microsoft.com/office/drawing/2014/main" id="{A30FEE24-7E85-72A4-3E15-4B908D37859A}"/>
               </a:ext>
             </a:extLst>
           </p:cNvPr>
@@ -7255,48 +9723,47 @@
         </p:blipFill>
         <p:spPr>
           <a:xfrm>
-            <a:off x="838200" y="1690687"/>
-            <a:ext cx="6511506" cy="2082583"/>
+            <a:off x="838200" y="1818481"/>
+            <a:ext cx="9421540" cy="4582164"/>
           </a:xfrm>
           <a:prstGeom prst="rect">
             <a:avLst/>
           </a:prstGeom>
         </p:spPr>
       </p:pic>
-      <p:pic>
-        <p:nvPicPr>
-          <p:cNvPr id="6" name="Picture 5">
-            <a:extLst>
-              <a:ext uri="{FF2B5EF4-FFF2-40B4-BE49-F238E27FC236}">
-                <a16:creationId xmlns:a16="http://schemas.microsoft.com/office/drawing/2014/main" id="{55F350C3-F9B8-C6FB-AA0F-E23167F769BA}"/>
-              </a:ext>
-            </a:extLst>
-          </p:cNvPr>
-          <p:cNvPicPr>
-            <a:picLocks noChangeAspect="1"/>
-          </p:cNvPicPr>
-          <p:nvPr/>
-        </p:nvPicPr>
-        <p:blipFill>
-          <a:blip r:embed="rId3"/>
-          <a:stretch>
-            <a:fillRect/>
-          </a:stretch>
-        </p:blipFill>
-        <p:spPr>
-          <a:xfrm>
-            <a:off x="950343" y="4127144"/>
-            <a:ext cx="6511506" cy="2577251"/>
-          </a:xfrm>
-          <a:prstGeom prst="rect">
-            <a:avLst/>
-          </a:prstGeom>
-        </p:spPr>
-      </p:pic>
+      <p:sp>
+        <p:nvSpPr>
+          <p:cNvPr id="3" name="Slide Number Placeholder 2">
+            <a:extLst>
+              <a:ext uri="{FF2B5EF4-FFF2-40B4-BE49-F238E27FC236}">
+                <a16:creationId xmlns:a16="http://schemas.microsoft.com/office/drawing/2014/main" id="{930E4272-0A33-BFA1-CD13-75B1947F88A8}"/>
+              </a:ext>
+            </a:extLst>
+          </p:cNvPr>
+          <p:cNvSpPr>
+            <a:spLocks noGrp="1"/>
+          </p:cNvSpPr>
+          <p:nvPr>
+            <p:ph type="sldNum" sz="quarter" idx="12"/>
+          </p:nvPr>
+        </p:nvSpPr>
+        <p:spPr/>
+        <p:txBody>
+          <a:bodyPr/>
+          <a:lstStyle/>
+          <a:p>
+            <a:fld id="{FAF4F8EC-53F2-4EB2-97C1-60EB836CC882}" type="slidenum">
+              <a:rPr lang="en-IN" smtClean="0"/>
+              <a:t>8</a:t>
+            </a:fld>
+            <a:endParaRPr lang="en-IN"/>
+          </a:p>
+        </p:txBody>
+      </p:sp>
     </p:spTree>
     <p:extLst>
       <p:ext uri="{BB962C8B-B14F-4D97-AF65-F5344CB8AC3E}">
-        <p14:creationId xmlns:p14="http://schemas.microsoft.com/office/powerpoint/2010/main" val="53803434"/>
+        <p14:creationId xmlns:p14="http://schemas.microsoft.com/office/powerpoint/2010/main" val="3712610399"/>
       </p:ext>
     </p:extLst>
   </p:cSld>
@@ -7328,7 +9795,7 @@
           <p:cNvPr id="2" name="Title 1">
             <a:extLst>
               <a:ext uri="{FF2B5EF4-FFF2-40B4-BE49-F238E27FC236}">
-                <a16:creationId xmlns:a16="http://schemas.microsoft.com/office/drawing/2014/main" id="{44F76F41-2AC2-92E4-3306-F7919242080B}"/>
+                <a16:creationId xmlns:a16="http://schemas.microsoft.com/office/drawing/2014/main" id="{D5C88AA4-8C01-75CC-8AB7-1E83FE37ECF3}"/>
               </a:ext>
             </a:extLst>
           </p:cNvPr>
@@ -7346,7 +9813,7 @@
           <a:p>
             <a:r>
               <a:rPr lang="en-US" dirty="0"/>
-              <a:t>Hybrid QML- 3 class classification – Basic entangler 8 qubits, 1 rep</a:t>
+              <a:t>Benchmark – IONQ Aria1 simulator</a:t>
             </a:r>
             <a:endParaRPr lang="en-IN" dirty="0"/>
           </a:p>
@@ -7354,17 +9821,19 @@
       </p:sp>
       <p:pic>
         <p:nvPicPr>
-          <p:cNvPr id="6" name="Picture 5">
-            <a:extLst>
-              <a:ext uri="{FF2B5EF4-FFF2-40B4-BE49-F238E27FC236}">
-                <a16:creationId xmlns:a16="http://schemas.microsoft.com/office/drawing/2014/main" id="{4407D620-3DC7-D5FB-E867-8A32FD42E8E8}"/>
+          <p:cNvPr id="6" name="Content Placeholder 5">
+            <a:extLst>
+              <a:ext uri="{FF2B5EF4-FFF2-40B4-BE49-F238E27FC236}">
+                <a16:creationId xmlns:a16="http://schemas.microsoft.com/office/drawing/2014/main" id="{CE0BE226-53DF-ABC1-04E9-2D79761C1DDA}"/>
               </a:ext>
             </a:extLst>
           </p:cNvPr>
           <p:cNvPicPr>
-            <a:picLocks noChangeAspect="1"/>
+            <a:picLocks noGrp="1" noChangeAspect="1"/>
           </p:cNvPicPr>
-          <p:nvPr/>
+          <p:nvPr>
+            <p:ph idx="1"/>
+          </p:nvPr>
         </p:nvPicPr>
         <p:blipFill>
           <a:blip r:embed="rId2"/>
@@ -7374,8 +9843,8 @@
         </p:blipFill>
         <p:spPr>
           <a:xfrm>
-            <a:off x="838200" y="1509837"/>
-            <a:ext cx="8256578" cy="2684612"/>
+            <a:off x="1654009" y="1825625"/>
+            <a:ext cx="8883981" cy="4351338"/>
           </a:xfrm>
           <a:prstGeom prst="rect">
             <a:avLst/>
@@ -7384,179 +9853,37 @@
       </p:pic>
       <p:sp>
         <p:nvSpPr>
-          <p:cNvPr id="7" name="TextBox 6">
-            <a:extLst>
-              <a:ext uri="{FF2B5EF4-FFF2-40B4-BE49-F238E27FC236}">
-                <a16:creationId xmlns:a16="http://schemas.microsoft.com/office/drawing/2014/main" id="{52F1D253-159B-9E8F-E86B-5F1D741A2287}"/>
-              </a:ext>
-            </a:extLst>
-          </p:cNvPr>
-          <p:cNvSpPr txBox="1"/>
-          <p:nvPr/>
-        </p:nvSpPr>
-        <p:spPr>
-          <a:xfrm>
-            <a:off x="9279731" y="1928813"/>
-            <a:ext cx="2586038" cy="923330"/>
-          </a:xfrm>
-          <a:prstGeom prst="rect">
-            <a:avLst/>
-          </a:prstGeom>
-          <a:noFill/>
-        </p:spPr>
-        <p:txBody>
-          <a:bodyPr wrap="square" rtlCol="0">
-            <a:spAutoFit/>
-          </a:bodyPr>
-          <a:lstStyle/>
-          <a:p>
-            <a:r>
-              <a:rPr lang="en-IN" dirty="0"/>
-              <a:t>Best epoch: 20 </a:t>
-            </a:r>
-          </a:p>
-          <a:p>
-            <a:r>
-              <a:rPr lang="en-IN" dirty="0"/>
-              <a:t>Train </a:t>
-            </a:r>
-            <a:r>
-              <a:rPr lang="en-IN" dirty="0" err="1"/>
-              <a:t>acc</a:t>
-            </a:r>
-            <a:r>
-              <a:rPr lang="en-IN" dirty="0"/>
-              <a:t>: 0.8403  </a:t>
-            </a:r>
-          </a:p>
-          <a:p>
-            <a:r>
-              <a:rPr lang="en-IN" dirty="0"/>
-              <a:t>Val </a:t>
-            </a:r>
-            <a:r>
-              <a:rPr lang="en-IN" dirty="0" err="1"/>
-              <a:t>acc</a:t>
-            </a:r>
-            <a:r>
-              <a:rPr lang="en-IN" dirty="0"/>
-              <a:t>: 0.8036</a:t>
-            </a:r>
-          </a:p>
-        </p:txBody>
-      </p:sp>
-      <p:sp>
-        <p:nvSpPr>
-          <p:cNvPr id="8" name="TextBox 7">
-            <a:extLst>
-              <a:ext uri="{FF2B5EF4-FFF2-40B4-BE49-F238E27FC236}">
-                <a16:creationId xmlns:a16="http://schemas.microsoft.com/office/drawing/2014/main" id="{4C3D9C4B-1A4D-78CF-3D20-19D506297CD6}"/>
-              </a:ext>
-            </a:extLst>
-          </p:cNvPr>
-          <p:cNvSpPr txBox="1"/>
-          <p:nvPr/>
-        </p:nvSpPr>
-        <p:spPr>
-          <a:xfrm>
-            <a:off x="1052513" y="4080704"/>
-            <a:ext cx="3303917" cy="375053"/>
-          </a:xfrm>
-          <a:prstGeom prst="rect">
-            <a:avLst/>
-          </a:prstGeom>
-          <a:noFill/>
-        </p:spPr>
-        <p:txBody>
-          <a:bodyPr wrap="square" rtlCol="0">
-            <a:spAutoFit/>
-          </a:bodyPr>
-          <a:lstStyle/>
-          <a:p>
-            <a:r>
-              <a:rPr lang="en-US" dirty="0"/>
-              <a:t>Test set results</a:t>
-            </a:r>
-            <a:endParaRPr lang="en-IN" dirty="0"/>
-          </a:p>
-        </p:txBody>
-      </p:sp>
-      <p:pic>
-        <p:nvPicPr>
-          <p:cNvPr id="10" name="Picture 9">
-            <a:extLst>
-              <a:ext uri="{FF2B5EF4-FFF2-40B4-BE49-F238E27FC236}">
-                <a16:creationId xmlns:a16="http://schemas.microsoft.com/office/drawing/2014/main" id="{86FA8033-4EAA-15FE-9BC3-3DBBB2B44CE2}"/>
-              </a:ext>
-            </a:extLst>
-          </p:cNvPr>
-          <p:cNvPicPr>
-            <a:picLocks noChangeAspect="1"/>
-          </p:cNvPicPr>
-          <p:nvPr/>
-        </p:nvPicPr>
-        <p:blipFill>
-          <a:blip r:embed="rId3"/>
-          <a:stretch>
-            <a:fillRect/>
-          </a:stretch>
-        </p:blipFill>
-        <p:spPr>
-          <a:xfrm>
-            <a:off x="909637" y="4455757"/>
-            <a:ext cx="5863456" cy="2300609"/>
-          </a:xfrm>
-          <a:prstGeom prst="rect">
-            <a:avLst/>
-          </a:prstGeom>
-        </p:spPr>
-      </p:pic>
-      <p:sp>
-        <p:nvSpPr>
-          <p:cNvPr id="11" name="TextBox 10">
-            <a:extLst>
-              <a:ext uri="{FF2B5EF4-FFF2-40B4-BE49-F238E27FC236}">
-                <a16:creationId xmlns:a16="http://schemas.microsoft.com/office/drawing/2014/main" id="{4E36C15A-2C21-C693-E541-84524DCB2598}"/>
-              </a:ext>
-            </a:extLst>
-          </p:cNvPr>
-          <p:cNvSpPr txBox="1"/>
-          <p:nvPr/>
-        </p:nvSpPr>
-        <p:spPr>
-          <a:xfrm>
-            <a:off x="7008019" y="4979194"/>
-            <a:ext cx="2900362" cy="646331"/>
-          </a:xfrm>
-          <a:prstGeom prst="rect">
-            <a:avLst/>
-          </a:prstGeom>
-          <a:noFill/>
-        </p:spPr>
-        <p:txBody>
-          <a:bodyPr wrap="square" rtlCol="0">
-            <a:spAutoFit/>
-          </a:bodyPr>
-          <a:lstStyle/>
-          <a:p>
-            <a:r>
-              <a:rPr lang="en-US" dirty="0"/>
-              <a:t>Test samples: 387 </a:t>
-            </a:r>
-          </a:p>
-          <a:p>
-            <a:r>
-              <a:rPr lang="en-US" dirty="0"/>
-              <a:t>Test accuracy: 0.7907</a:t>
-            </a:r>
-            <a:endParaRPr lang="en-IN" dirty="0"/>
+          <p:cNvPr id="4" name="Slide Number Placeholder 3">
+            <a:extLst>
+              <a:ext uri="{FF2B5EF4-FFF2-40B4-BE49-F238E27FC236}">
+                <a16:creationId xmlns:a16="http://schemas.microsoft.com/office/drawing/2014/main" id="{667D708A-6369-B221-28E6-BF5374C27F3E}"/>
+              </a:ext>
+            </a:extLst>
+          </p:cNvPr>
+          <p:cNvSpPr>
+            <a:spLocks noGrp="1"/>
+          </p:cNvSpPr>
+          <p:nvPr>
+            <p:ph type="sldNum" sz="quarter" idx="12"/>
+          </p:nvPr>
+        </p:nvSpPr>
+        <p:spPr/>
+        <p:txBody>
+          <a:bodyPr/>
+          <a:lstStyle/>
+          <a:p>
+            <a:fld id="{FAF4F8EC-53F2-4EB2-97C1-60EB836CC882}" type="slidenum">
+              <a:rPr lang="en-IN" smtClean="0"/>
+              <a:t>9</a:t>
+            </a:fld>
+            <a:endParaRPr lang="en-IN"/>
           </a:p>
         </p:txBody>
       </p:sp>
     </p:spTree>
     <p:extLst>
       <p:ext uri="{BB962C8B-B14F-4D97-AF65-F5344CB8AC3E}">
-        <p14:creationId xmlns:p14="http://schemas.microsoft.com/office/powerpoint/2010/main" val="3414256386"/>
+        <p14:creationId xmlns:p14="http://schemas.microsoft.com/office/powerpoint/2010/main" val="3054282942"/>
       </p:ext>
     </p:extLst>
   </p:cSld>
@@ -7859,4 +10186,299 @@
     </a:ext>
   </a:extLst>
 </a:theme>
+</file>
+
+<file path=ppt/theme/theme2.xml><?xml version="1.0" encoding="utf-8"?>
+<a:theme xmlns:a="http://schemas.openxmlformats.org/drawingml/2006/main" name="Office Theme">
+  <a:themeElements>
+    <a:clrScheme name="Office">
+      <a:dk1>
+        <a:sysClr val="windowText" lastClr="000000"/>
+      </a:dk1>
+      <a:lt1>
+        <a:sysClr val="window" lastClr="FFFFFF"/>
+      </a:lt1>
+      <a:dk2>
+        <a:srgbClr val="44546A"/>
+      </a:dk2>
+      <a:lt2>
+        <a:srgbClr val="E7E6E6"/>
+      </a:lt2>
+      <a:accent1>
+        <a:srgbClr val="4472C4"/>
+      </a:accent1>
+      <a:accent2>
+        <a:srgbClr val="ED7D31"/>
+      </a:accent2>
+      <a:accent3>
+        <a:srgbClr val="A5A5A5"/>
+      </a:accent3>
+      <a:accent4>
+        <a:srgbClr val="FFC000"/>
+      </a:accent4>
+      <a:accent5>
+        <a:srgbClr val="5B9BD5"/>
+      </a:accent5>
+      <a:accent6>
+        <a:srgbClr val="70AD47"/>
+      </a:accent6>
+      <a:hlink>
+        <a:srgbClr val="0563C1"/>
+      </a:hlink>
+      <a:folHlink>
+        <a:srgbClr val="954F72"/>
+      </a:folHlink>
+    </a:clrScheme>
+    <a:fontScheme name="Office">
+      <a:majorFont>
+        <a:latin typeface="Calibri Light" panose="020F0302020204030204"/>
+        <a:ea typeface=""/>
+        <a:cs typeface=""/>
+        <a:font script="Jpan" typeface="游ゴシック Light"/>
+        <a:font script="Hang" typeface="맑은 고딕"/>
+        <a:font script="Hans" typeface="等线 Light"/>
+        <a:font script="Hant" typeface="新細明體"/>
+        <a:font script="Arab" typeface="Times New Roman"/>
+        <a:font script="Hebr" typeface="Times New Roman"/>
+        <a:font script="Thai" typeface="Angsana New"/>
+        <a:font script="Ethi" typeface="Nyala"/>
+        <a:font script="Beng" typeface="Vrinda"/>
+        <a:font script="Gujr" typeface="Shruti"/>
+        <a:font script="Khmr" typeface="MoolBoran"/>
+        <a:font script="Knda" typeface="Tunga"/>
+        <a:font script="Guru" typeface="Raavi"/>
+        <a:font script="Cans" typeface="Euphemia"/>
+        <a:font script="Cher" typeface="Plantagenet Cherokee"/>
+        <a:font script="Yiii" typeface="Microsoft Yi Baiti"/>
+        <a:font script="Tibt" typeface="Microsoft Himalaya"/>
+        <a:font script="Thaa" typeface="MV Boli"/>
+        <a:font script="Deva" typeface="Mangal"/>
+        <a:font script="Telu" typeface="Gautami"/>
+        <a:font script="Taml" typeface="Latha"/>
+        <a:font script="Syrc" typeface="Estrangelo Edessa"/>
+        <a:font script="Orya" typeface="Kalinga"/>
+        <a:font script="Mlym" typeface="Kartika"/>
+        <a:font script="Laoo" typeface="DokChampa"/>
+        <a:font script="Sinh" typeface="Iskoola Pota"/>
+        <a:font script="Mong" typeface="Mongolian Baiti"/>
+        <a:font script="Viet" typeface="Times New Roman"/>
+        <a:font script="Uigh" typeface="Microsoft Uighur"/>
+        <a:font script="Geor" typeface="Sylfaen"/>
+        <a:font script="Armn" typeface="Arial"/>
+        <a:font script="Bugi" typeface="Leelawadee UI"/>
+        <a:font script="Bopo" typeface="Microsoft JhengHei"/>
+        <a:font script="Java" typeface="Javanese Text"/>
+        <a:font script="Lisu" typeface="Segoe UI"/>
+        <a:font script="Mymr" typeface="Myanmar Text"/>
+        <a:font script="Nkoo" typeface="Ebrima"/>
+        <a:font script="Olck" typeface="Nirmala UI"/>
+        <a:font script="Osma" typeface="Ebrima"/>
+        <a:font script="Phag" typeface="Phagspa"/>
+        <a:font script="Syrn" typeface="Estrangelo Edessa"/>
+        <a:font script="Syrj" typeface="Estrangelo Edessa"/>
+        <a:font script="Syre" typeface="Estrangelo Edessa"/>
+        <a:font script="Sora" typeface="Nirmala UI"/>
+        <a:font script="Tale" typeface="Microsoft Tai Le"/>
+        <a:font script="Talu" typeface="Microsoft New Tai Lue"/>
+        <a:font script="Tfng" typeface="Ebrima"/>
+      </a:majorFont>
+      <a:minorFont>
+        <a:latin typeface="Calibri" panose="020F0502020204030204"/>
+        <a:ea typeface=""/>
+        <a:cs typeface=""/>
+        <a:font script="Jpan" typeface="游ゴシック"/>
+        <a:font script="Hang" typeface="맑은 고딕"/>
+        <a:font script="Hans" typeface="等线"/>
+        <a:font script="Hant" typeface="新細明體"/>
+        <a:font script="Arab" typeface="Arial"/>
+        <a:font script="Hebr" typeface="Arial"/>
+        <a:font script="Thai" typeface="Cordia New"/>
+        <a:font script="Ethi" typeface="Nyala"/>
+        <a:font script="Beng" typeface="Vrinda"/>
+        <a:font script="Gujr" typeface="Shruti"/>
+        <a:font script="Khmr" typeface="DaunPenh"/>
+        <a:font script="Knda" typeface="Tunga"/>
+        <a:font script="Guru" typeface="Raavi"/>
+        <a:font script="Cans" typeface="Euphemia"/>
+        <a:font script="Cher" typeface="Plantagenet Cherokee"/>
+        <a:font script="Yiii" typeface="Microsoft Yi Baiti"/>
+        <a:font script="Tibt" typeface="Microsoft Himalaya"/>
+        <a:font script="Thaa" typeface="MV Boli"/>
+        <a:font script="Deva" typeface="Mangal"/>
+        <a:font script="Telu" typeface="Gautami"/>
+        <a:font script="Taml" typeface="Latha"/>
+        <a:font script="Syrc" typeface="Estrangelo Edessa"/>
+        <a:font script="Orya" typeface="Kalinga"/>
+        <a:font script="Mlym" typeface="Kartika"/>
+        <a:font script="Laoo" typeface="DokChampa"/>
+        <a:font script="Sinh" typeface="Iskoola Pota"/>
+        <a:font script="Mong" typeface="Mongolian Baiti"/>
+        <a:font script="Viet" typeface="Arial"/>
+        <a:font script="Uigh" typeface="Microsoft Uighur"/>
+        <a:font script="Geor" typeface="Sylfaen"/>
+        <a:font script="Armn" typeface="Arial"/>
+        <a:font script="Bugi" typeface="Leelawadee UI"/>
+        <a:font script="Bopo" typeface="Microsoft JhengHei"/>
+        <a:font script="Java" typeface="Javanese Text"/>
+        <a:font script="Lisu" typeface="Segoe UI"/>
+        <a:font script="Mymr" typeface="Myanmar Text"/>
+        <a:font script="Nkoo" typeface="Ebrima"/>
+        <a:font script="Olck" typeface="Nirmala UI"/>
+        <a:font script="Osma" typeface="Ebrima"/>
+        <a:font script="Phag" typeface="Phagspa"/>
+        <a:font script="Syrn" typeface="Estrangelo Edessa"/>
+        <a:font script="Syrj" typeface="Estrangelo Edessa"/>
+        <a:font script="Syre" typeface="Estrangelo Edessa"/>
+        <a:font script="Sora" typeface="Nirmala UI"/>
+        <a:font script="Tale" typeface="Microsoft Tai Le"/>
+        <a:font script="Talu" typeface="Microsoft New Tai Lue"/>
+        <a:font script="Tfng" typeface="Ebrima"/>
+      </a:minorFont>
+    </a:fontScheme>
+    <a:fmtScheme name="Office">
+      <a:fillStyleLst>
+        <a:solidFill>
+          <a:schemeClr val="phClr"/>
+        </a:solidFill>
+        <a:gradFill rotWithShape="1">
+          <a:gsLst>
+            <a:gs pos="0">
+              <a:schemeClr val="phClr">
+                <a:lumMod val="110000"/>
+                <a:satMod val="105000"/>
+                <a:tint val="67000"/>
+              </a:schemeClr>
+            </a:gs>
+            <a:gs pos="50000">
+              <a:schemeClr val="phClr">
+                <a:lumMod val="105000"/>
+                <a:satMod val="103000"/>
+                <a:tint val="73000"/>
+              </a:schemeClr>
+            </a:gs>
+            <a:gs pos="100000">
+              <a:schemeClr val="phClr">
+                <a:lumMod val="105000"/>
+                <a:satMod val="109000"/>
+                <a:tint val="81000"/>
+              </a:schemeClr>
+            </a:gs>
+          </a:gsLst>
+          <a:lin ang="5400000" scaled="0"/>
+        </a:gradFill>
+        <a:gradFill rotWithShape="1">
+          <a:gsLst>
+            <a:gs pos="0">
+              <a:schemeClr val="phClr">
+                <a:satMod val="103000"/>
+                <a:lumMod val="102000"/>
+                <a:tint val="94000"/>
+              </a:schemeClr>
+            </a:gs>
+            <a:gs pos="50000">
+              <a:schemeClr val="phClr">
+                <a:satMod val="110000"/>
+                <a:lumMod val="100000"/>
+                <a:shade val="100000"/>
+              </a:schemeClr>
+            </a:gs>
+            <a:gs pos="100000">
+              <a:schemeClr val="phClr">
+                <a:lumMod val="99000"/>
+                <a:satMod val="120000"/>
+                <a:shade val="78000"/>
+              </a:schemeClr>
+            </a:gs>
+          </a:gsLst>
+          <a:lin ang="5400000" scaled="0"/>
+        </a:gradFill>
+      </a:fillStyleLst>
+      <a:lnStyleLst>
+        <a:ln w="6350" cap="flat" cmpd="sng" algn="ctr">
+          <a:solidFill>
+            <a:schemeClr val="phClr"/>
+          </a:solidFill>
+          <a:prstDash val="solid"/>
+          <a:miter lim="800000"/>
+        </a:ln>
+        <a:ln w="12700" cap="flat" cmpd="sng" algn="ctr">
+          <a:solidFill>
+            <a:schemeClr val="phClr"/>
+          </a:solidFill>
+          <a:prstDash val="solid"/>
+          <a:miter lim="800000"/>
+        </a:ln>
+        <a:ln w="19050" cap="flat" cmpd="sng" algn="ctr">
+          <a:solidFill>
+            <a:schemeClr val="phClr"/>
+          </a:solidFill>
+          <a:prstDash val="solid"/>
+          <a:miter lim="800000"/>
+        </a:ln>
+      </a:lnStyleLst>
+      <a:effectStyleLst>
+        <a:effectStyle>
+          <a:effectLst/>
+        </a:effectStyle>
+        <a:effectStyle>
+          <a:effectLst/>
+        </a:effectStyle>
+        <a:effectStyle>
+          <a:effectLst>
+            <a:outerShdw blurRad="57150" dist="19050" dir="5400000" algn="ctr" rotWithShape="0">
+              <a:srgbClr val="000000">
+                <a:alpha val="63000"/>
+              </a:srgbClr>
+            </a:outerShdw>
+          </a:effectLst>
+        </a:effectStyle>
+      </a:effectStyleLst>
+      <a:bgFillStyleLst>
+        <a:solidFill>
+          <a:schemeClr val="phClr"/>
+        </a:solidFill>
+        <a:solidFill>
+          <a:schemeClr val="phClr">
+            <a:tint val="95000"/>
+            <a:satMod val="170000"/>
+          </a:schemeClr>
+        </a:solidFill>
+        <a:gradFill rotWithShape="1">
+          <a:gsLst>
+            <a:gs pos="0">
+              <a:schemeClr val="phClr">
+                <a:tint val="93000"/>
+                <a:satMod val="150000"/>
+                <a:shade val="98000"/>
+                <a:lumMod val="102000"/>
+              </a:schemeClr>
+            </a:gs>
+            <a:gs pos="50000">
+              <a:schemeClr val="phClr">
+                <a:tint val="98000"/>
+                <a:satMod val="130000"/>
+                <a:shade val="90000"/>
+                <a:lumMod val="103000"/>
+              </a:schemeClr>
+            </a:gs>
+            <a:gs pos="100000">
+              <a:schemeClr val="phClr">
+                <a:shade val="63000"/>
+                <a:satMod val="120000"/>
+              </a:schemeClr>
+            </a:gs>
+          </a:gsLst>
+          <a:lin ang="5400000" scaled="0"/>
+        </a:gradFill>
+      </a:bgFillStyleLst>
+    </a:fmtScheme>
+  </a:themeElements>
+  <a:objectDefaults/>
+  <a:extraClrSchemeLst/>
+  <a:extLst>
+    <a:ext uri="{05A4C25C-085E-4340-85A3-A5531E510DB2}">
+      <thm15:themeFamily xmlns:thm15="http://schemas.microsoft.com/office/thememl/2012/main" name="Office Theme" id="{62F939B6-93AF-4DB8-9C6B-D6C7DFDC589F}" vid="{4A3C46E8-61CC-4603-A589-7422A47A8E4A}"/>
+    </a:ext>
+  </a:extLst>
+</a:theme>
 </file>